--- a/26fall/1860/Lecture/Week1.4/Lecture 1.4.2.pptx
+++ b/26fall/1860/Lecture/Week1.4/Lecture 1.4.2.pptx
@@ -8,46 +8,45 @@
     <p:sldId id="256" r:id="rId2"/>
     <p:sldId id="257" r:id="rId3"/>
     <p:sldId id="339" r:id="rId4"/>
-    <p:sldId id="258" r:id="rId5"/>
-    <p:sldId id="261" r:id="rId6"/>
-    <p:sldId id="279" r:id="rId7"/>
-    <p:sldId id="295" r:id="rId8"/>
-    <p:sldId id="303" r:id="rId9"/>
-    <p:sldId id="340" r:id="rId10"/>
-    <p:sldId id="315" r:id="rId11"/>
-    <p:sldId id="288" r:id="rId12"/>
-    <p:sldId id="289" r:id="rId13"/>
-    <p:sldId id="341" r:id="rId14"/>
-    <p:sldId id="342" r:id="rId15"/>
-    <p:sldId id="293" r:id="rId16"/>
-    <p:sldId id="294" r:id="rId17"/>
-    <p:sldId id="344" r:id="rId18"/>
-    <p:sldId id="345" r:id="rId19"/>
-    <p:sldId id="347" r:id="rId20"/>
-    <p:sldId id="348" r:id="rId21"/>
-    <p:sldId id="346" r:id="rId22"/>
-    <p:sldId id="353" r:id="rId23"/>
-    <p:sldId id="301" r:id="rId24"/>
-    <p:sldId id="305" r:id="rId25"/>
-    <p:sldId id="306" r:id="rId26"/>
-    <p:sldId id="307" r:id="rId27"/>
-    <p:sldId id="313" r:id="rId28"/>
-    <p:sldId id="304" r:id="rId29"/>
-    <p:sldId id="296" r:id="rId30"/>
-    <p:sldId id="297" r:id="rId31"/>
-    <p:sldId id="299" r:id="rId32"/>
-    <p:sldId id="314" r:id="rId33"/>
-    <p:sldId id="349" r:id="rId34"/>
-    <p:sldId id="350" r:id="rId35"/>
-    <p:sldId id="351" r:id="rId36"/>
-    <p:sldId id="352" r:id="rId37"/>
-    <p:sldId id="308" r:id="rId38"/>
-    <p:sldId id="309" r:id="rId39"/>
-    <p:sldId id="310" r:id="rId40"/>
-    <p:sldId id="311" r:id="rId41"/>
-    <p:sldId id="312" r:id="rId42"/>
-    <p:sldId id="358" r:id="rId43"/>
-    <p:sldId id="259" r:id="rId44"/>
+    <p:sldId id="261" r:id="rId5"/>
+    <p:sldId id="279" r:id="rId6"/>
+    <p:sldId id="295" r:id="rId7"/>
+    <p:sldId id="303" r:id="rId8"/>
+    <p:sldId id="340" r:id="rId9"/>
+    <p:sldId id="315" r:id="rId10"/>
+    <p:sldId id="288" r:id="rId11"/>
+    <p:sldId id="289" r:id="rId12"/>
+    <p:sldId id="341" r:id="rId13"/>
+    <p:sldId id="342" r:id="rId14"/>
+    <p:sldId id="293" r:id="rId15"/>
+    <p:sldId id="294" r:id="rId16"/>
+    <p:sldId id="344" r:id="rId17"/>
+    <p:sldId id="345" r:id="rId18"/>
+    <p:sldId id="347" r:id="rId19"/>
+    <p:sldId id="348" r:id="rId20"/>
+    <p:sldId id="346" r:id="rId21"/>
+    <p:sldId id="353" r:id="rId22"/>
+    <p:sldId id="301" r:id="rId23"/>
+    <p:sldId id="305" r:id="rId24"/>
+    <p:sldId id="306" r:id="rId25"/>
+    <p:sldId id="307" r:id="rId26"/>
+    <p:sldId id="313" r:id="rId27"/>
+    <p:sldId id="304" r:id="rId28"/>
+    <p:sldId id="296" r:id="rId29"/>
+    <p:sldId id="297" r:id="rId30"/>
+    <p:sldId id="299" r:id="rId31"/>
+    <p:sldId id="314" r:id="rId32"/>
+    <p:sldId id="349" r:id="rId33"/>
+    <p:sldId id="350" r:id="rId34"/>
+    <p:sldId id="351" r:id="rId35"/>
+    <p:sldId id="352" r:id="rId36"/>
+    <p:sldId id="308" r:id="rId37"/>
+    <p:sldId id="309" r:id="rId38"/>
+    <p:sldId id="310" r:id="rId39"/>
+    <p:sldId id="311" r:id="rId40"/>
+    <p:sldId id="312" r:id="rId41"/>
+    <p:sldId id="358" r:id="rId42"/>
+    <p:sldId id="259" r:id="rId43"/>
   </p:sldIdLst>
   <p:sldSz cx="12192000" cy="6858000"/>
   <p:notesSz cx="6858000" cy="9144000"/>
@@ -156,393 +155,6 @@
 
 <file path=ppt/changesInfos/changesInfo1.xml><?xml version="1.0" encoding="utf-8"?>
 <pc:chgInfo xmlns:a="http://schemas.openxmlformats.org/drawingml/2006/main" xmlns:r="http://schemas.openxmlformats.org/officeDocument/2006/relationships" xmlns:ac="http://schemas.microsoft.com/office/drawing/2013/main/command" xmlns:pc="http://schemas.microsoft.com/office/powerpoint/2013/main/command">
-  <pc:docChgLst>
-    <pc:chgData name="James Dyer" userId="c78f284b-7e37-4191-b5a6-8e3806eb7037" providerId="ADAL" clId="{9F1B4838-F5B8-4009-8553-2583D5CDEF26}"/>
-    <pc:docChg chg="undo redo custSel addSld delSld modSld">
-      <pc:chgData name="James Dyer" userId="c78f284b-7e37-4191-b5a6-8e3806eb7037" providerId="ADAL" clId="{9F1B4838-F5B8-4009-8553-2583D5CDEF26}" dt="2025-04-01T12:34:13.812" v="5263" actId="20577"/>
-      <pc:docMkLst>
-        <pc:docMk/>
-      </pc:docMkLst>
-      <pc:sldChg chg="modSp mod">
-        <pc:chgData name="James Dyer" userId="c78f284b-7e37-4191-b5a6-8e3806eb7037" providerId="ADAL" clId="{9F1B4838-F5B8-4009-8553-2583D5CDEF26}" dt="2025-03-12T14:51:17.336" v="3004" actId="20577"/>
-        <pc:sldMkLst>
-          <pc:docMk/>
-          <pc:sldMk cId="340163789" sldId="256"/>
-        </pc:sldMkLst>
-      </pc:sldChg>
-      <pc:sldChg chg="modSp mod">
-        <pc:chgData name="James Dyer" userId="c78f284b-7e37-4191-b5a6-8e3806eb7037" providerId="ADAL" clId="{9F1B4838-F5B8-4009-8553-2583D5CDEF26}" dt="2025-03-28T12:39:50.722" v="4418" actId="20577"/>
-        <pc:sldMkLst>
-          <pc:docMk/>
-          <pc:sldMk cId="757110763" sldId="258"/>
-        </pc:sldMkLst>
-      </pc:sldChg>
-      <pc:sldChg chg="modSp mod">
-        <pc:chgData name="James Dyer" userId="c78f284b-7e37-4191-b5a6-8e3806eb7037" providerId="ADAL" clId="{9F1B4838-F5B8-4009-8553-2583D5CDEF26}" dt="2025-03-28T12:42:20.560" v="4421" actId="20577"/>
-        <pc:sldMkLst>
-          <pc:docMk/>
-          <pc:sldMk cId="506699912" sldId="259"/>
-        </pc:sldMkLst>
-      </pc:sldChg>
-      <pc:sldChg chg="del">
-        <pc:chgData name="James Dyer" userId="c78f284b-7e37-4191-b5a6-8e3806eb7037" providerId="ADAL" clId="{9F1B4838-F5B8-4009-8553-2583D5CDEF26}" dt="2025-03-28T12:37:46.135" v="4417" actId="2696"/>
-        <pc:sldMkLst>
-          <pc:docMk/>
-          <pc:sldMk cId="2581238198" sldId="260"/>
-        </pc:sldMkLst>
-      </pc:sldChg>
-      <pc:sldChg chg="del">
-        <pc:chgData name="James Dyer" userId="c78f284b-7e37-4191-b5a6-8e3806eb7037" providerId="ADAL" clId="{9F1B4838-F5B8-4009-8553-2583D5CDEF26}" dt="2025-03-28T12:37:46.135" v="4417" actId="2696"/>
-        <pc:sldMkLst>
-          <pc:docMk/>
-          <pc:sldMk cId="1318305980" sldId="262"/>
-        </pc:sldMkLst>
-      </pc:sldChg>
-      <pc:sldChg chg="del">
-        <pc:chgData name="James Dyer" userId="c78f284b-7e37-4191-b5a6-8e3806eb7037" providerId="ADAL" clId="{9F1B4838-F5B8-4009-8553-2583D5CDEF26}" dt="2025-03-28T12:37:46.135" v="4417" actId="2696"/>
-        <pc:sldMkLst>
-          <pc:docMk/>
-          <pc:sldMk cId="3190321217" sldId="263"/>
-        </pc:sldMkLst>
-      </pc:sldChg>
-      <pc:sldChg chg="del">
-        <pc:chgData name="James Dyer" userId="c78f284b-7e37-4191-b5a6-8e3806eb7037" providerId="ADAL" clId="{9F1B4838-F5B8-4009-8553-2583D5CDEF26}" dt="2025-03-28T12:37:46.135" v="4417" actId="2696"/>
-        <pc:sldMkLst>
-          <pc:docMk/>
-          <pc:sldMk cId="2475208075" sldId="264"/>
-        </pc:sldMkLst>
-      </pc:sldChg>
-      <pc:sldChg chg="del">
-        <pc:chgData name="James Dyer" userId="c78f284b-7e37-4191-b5a6-8e3806eb7037" providerId="ADAL" clId="{9F1B4838-F5B8-4009-8553-2583D5CDEF26}" dt="2025-03-28T12:37:46.135" v="4417" actId="2696"/>
-        <pc:sldMkLst>
-          <pc:docMk/>
-          <pc:sldMk cId="271333520" sldId="265"/>
-        </pc:sldMkLst>
-      </pc:sldChg>
-      <pc:sldChg chg="del">
-        <pc:chgData name="James Dyer" userId="c78f284b-7e37-4191-b5a6-8e3806eb7037" providerId="ADAL" clId="{9F1B4838-F5B8-4009-8553-2583D5CDEF26}" dt="2025-03-28T12:37:46.135" v="4417" actId="2696"/>
-        <pc:sldMkLst>
-          <pc:docMk/>
-          <pc:sldMk cId="874173536" sldId="266"/>
-        </pc:sldMkLst>
-      </pc:sldChg>
-      <pc:sldChg chg="del">
-        <pc:chgData name="James Dyer" userId="c78f284b-7e37-4191-b5a6-8e3806eb7037" providerId="ADAL" clId="{9F1B4838-F5B8-4009-8553-2583D5CDEF26}" dt="2025-03-28T12:37:46.135" v="4417" actId="2696"/>
-        <pc:sldMkLst>
-          <pc:docMk/>
-          <pc:sldMk cId="409111657" sldId="267"/>
-        </pc:sldMkLst>
-      </pc:sldChg>
-      <pc:sldChg chg="del">
-        <pc:chgData name="James Dyer" userId="c78f284b-7e37-4191-b5a6-8e3806eb7037" providerId="ADAL" clId="{9F1B4838-F5B8-4009-8553-2583D5CDEF26}" dt="2025-03-28T12:37:46.135" v="4417" actId="2696"/>
-        <pc:sldMkLst>
-          <pc:docMk/>
-          <pc:sldMk cId="77911456" sldId="268"/>
-        </pc:sldMkLst>
-      </pc:sldChg>
-      <pc:sldChg chg="del">
-        <pc:chgData name="James Dyer" userId="c78f284b-7e37-4191-b5a6-8e3806eb7037" providerId="ADAL" clId="{9F1B4838-F5B8-4009-8553-2583D5CDEF26}" dt="2025-03-28T12:37:46.135" v="4417" actId="2696"/>
-        <pc:sldMkLst>
-          <pc:docMk/>
-          <pc:sldMk cId="126883131" sldId="269"/>
-        </pc:sldMkLst>
-      </pc:sldChg>
-      <pc:sldChg chg="del">
-        <pc:chgData name="James Dyer" userId="c78f284b-7e37-4191-b5a6-8e3806eb7037" providerId="ADAL" clId="{9F1B4838-F5B8-4009-8553-2583D5CDEF26}" dt="2025-03-13T12:12:01.409" v="3060" actId="2696"/>
-        <pc:sldMkLst>
-          <pc:docMk/>
-          <pc:sldMk cId="3114036420" sldId="270"/>
-        </pc:sldMkLst>
-      </pc:sldChg>
-      <pc:sldChg chg="del">
-        <pc:chgData name="James Dyer" userId="c78f284b-7e37-4191-b5a6-8e3806eb7037" providerId="ADAL" clId="{9F1B4838-F5B8-4009-8553-2583D5CDEF26}" dt="2025-03-28T12:37:46.135" v="4417" actId="2696"/>
-        <pc:sldMkLst>
-          <pc:docMk/>
-          <pc:sldMk cId="1918331364" sldId="271"/>
-        </pc:sldMkLst>
-      </pc:sldChg>
-      <pc:sldChg chg="del">
-        <pc:chgData name="James Dyer" userId="c78f284b-7e37-4191-b5a6-8e3806eb7037" providerId="ADAL" clId="{9F1B4838-F5B8-4009-8553-2583D5CDEF26}" dt="2025-03-28T12:37:46.135" v="4417" actId="2696"/>
-        <pc:sldMkLst>
-          <pc:docMk/>
-          <pc:sldMk cId="3713491935" sldId="272"/>
-        </pc:sldMkLst>
-      </pc:sldChg>
-      <pc:sldChg chg="modSp del mod">
-        <pc:chgData name="James Dyer" userId="c78f284b-7e37-4191-b5a6-8e3806eb7037" providerId="ADAL" clId="{9F1B4838-F5B8-4009-8553-2583D5CDEF26}" dt="2025-03-28T12:37:46.135" v="4417" actId="2696"/>
-        <pc:sldMkLst>
-          <pc:docMk/>
-          <pc:sldMk cId="3860212923" sldId="274"/>
-        </pc:sldMkLst>
-      </pc:sldChg>
-      <pc:sldChg chg="modSp del">
-        <pc:chgData name="James Dyer" userId="c78f284b-7e37-4191-b5a6-8e3806eb7037" providerId="ADAL" clId="{9F1B4838-F5B8-4009-8553-2583D5CDEF26}" dt="2025-03-28T12:37:46.135" v="4417" actId="2696"/>
-        <pc:sldMkLst>
-          <pc:docMk/>
-          <pc:sldMk cId="3700872050" sldId="275"/>
-        </pc:sldMkLst>
-      </pc:sldChg>
-      <pc:sldChg chg="del">
-        <pc:chgData name="James Dyer" userId="c78f284b-7e37-4191-b5a6-8e3806eb7037" providerId="ADAL" clId="{9F1B4838-F5B8-4009-8553-2583D5CDEF26}" dt="2025-03-28T12:39:54.166" v="4419" actId="2696"/>
-        <pc:sldMkLst>
-          <pc:docMk/>
-          <pc:sldMk cId="238652036" sldId="276"/>
-        </pc:sldMkLst>
-      </pc:sldChg>
-      <pc:sldChg chg="delSp modSp del mod modClrScheme chgLayout">
-        <pc:chgData name="James Dyer" userId="c78f284b-7e37-4191-b5a6-8e3806eb7037" providerId="ADAL" clId="{9F1B4838-F5B8-4009-8553-2583D5CDEF26}" dt="2025-03-28T12:37:46.135" v="4417" actId="2696"/>
-        <pc:sldMkLst>
-          <pc:docMk/>
-          <pc:sldMk cId="827335259" sldId="277"/>
-        </pc:sldMkLst>
-      </pc:sldChg>
-      <pc:sldChg chg="modSp mod">
-        <pc:chgData name="James Dyer" userId="c78f284b-7e37-4191-b5a6-8e3806eb7037" providerId="ADAL" clId="{9F1B4838-F5B8-4009-8553-2583D5CDEF26}" dt="2025-03-11T13:52:15.989" v="709" actId="20577"/>
-        <pc:sldMkLst>
-          <pc:docMk/>
-          <pc:sldMk cId="4191342174" sldId="279"/>
-        </pc:sldMkLst>
-      </pc:sldChg>
-      <pc:sldChg chg="delSp modSp del mod modClrScheme chgLayout">
-        <pc:chgData name="James Dyer" userId="c78f284b-7e37-4191-b5a6-8e3806eb7037" providerId="ADAL" clId="{9F1B4838-F5B8-4009-8553-2583D5CDEF26}" dt="2025-03-28T12:37:46.135" v="4417" actId="2696"/>
-        <pc:sldMkLst>
-          <pc:docMk/>
-          <pc:sldMk cId="2686022152" sldId="280"/>
-        </pc:sldMkLst>
-      </pc:sldChg>
-      <pc:sldChg chg="del">
-        <pc:chgData name="James Dyer" userId="c78f284b-7e37-4191-b5a6-8e3806eb7037" providerId="ADAL" clId="{9F1B4838-F5B8-4009-8553-2583D5CDEF26}" dt="2025-03-13T12:12:12.796" v="3061" actId="47"/>
-        <pc:sldMkLst>
-          <pc:docMk/>
-          <pc:sldMk cId="769213268" sldId="281"/>
-        </pc:sldMkLst>
-      </pc:sldChg>
-      <pc:sldChg chg="del">
-        <pc:chgData name="James Dyer" userId="c78f284b-7e37-4191-b5a6-8e3806eb7037" providerId="ADAL" clId="{9F1B4838-F5B8-4009-8553-2583D5CDEF26}" dt="2025-03-13T12:12:12.796" v="3061" actId="47"/>
-        <pc:sldMkLst>
-          <pc:docMk/>
-          <pc:sldMk cId="2971002891" sldId="282"/>
-        </pc:sldMkLst>
-      </pc:sldChg>
-      <pc:sldChg chg="modSp del mod">
-        <pc:chgData name="James Dyer" userId="c78f284b-7e37-4191-b5a6-8e3806eb7037" providerId="ADAL" clId="{9F1B4838-F5B8-4009-8553-2583D5CDEF26}" dt="2025-03-13T12:12:12.796" v="3061" actId="47"/>
-        <pc:sldMkLst>
-          <pc:docMk/>
-          <pc:sldMk cId="3368075927" sldId="283"/>
-        </pc:sldMkLst>
-      </pc:sldChg>
-      <pc:sldChg chg="modSp del mod">
-        <pc:chgData name="James Dyer" userId="c78f284b-7e37-4191-b5a6-8e3806eb7037" providerId="ADAL" clId="{9F1B4838-F5B8-4009-8553-2583D5CDEF26}" dt="2025-03-13T12:12:12.796" v="3061" actId="47"/>
-        <pc:sldMkLst>
-          <pc:docMk/>
-          <pc:sldMk cId="3704461853" sldId="284"/>
-        </pc:sldMkLst>
-      </pc:sldChg>
-      <pc:sldChg chg="del">
-        <pc:chgData name="James Dyer" userId="c78f284b-7e37-4191-b5a6-8e3806eb7037" providerId="ADAL" clId="{9F1B4838-F5B8-4009-8553-2583D5CDEF26}" dt="2025-03-13T12:12:12.796" v="3061" actId="47"/>
-        <pc:sldMkLst>
-          <pc:docMk/>
-          <pc:sldMk cId="3888307331" sldId="285"/>
-        </pc:sldMkLst>
-      </pc:sldChg>
-      <pc:sldChg chg="modSp mod">
-        <pc:chgData name="James Dyer" userId="c78f284b-7e37-4191-b5a6-8e3806eb7037" providerId="ADAL" clId="{9F1B4838-F5B8-4009-8553-2583D5CDEF26}" dt="2025-03-13T12:14:27.601" v="3145" actId="20577"/>
-        <pc:sldMkLst>
-          <pc:docMk/>
-          <pc:sldMk cId="3570547801" sldId="288"/>
-        </pc:sldMkLst>
-      </pc:sldChg>
-      <pc:sldChg chg="modSp mod">
-        <pc:chgData name="James Dyer" userId="c78f284b-7e37-4191-b5a6-8e3806eb7037" providerId="ADAL" clId="{9F1B4838-F5B8-4009-8553-2583D5CDEF26}" dt="2025-03-11T13:55:18.583" v="1043" actId="20577"/>
-        <pc:sldMkLst>
-          <pc:docMk/>
-          <pc:sldMk cId="1666710443" sldId="289"/>
-        </pc:sldMkLst>
-      </pc:sldChg>
-      <pc:sldChg chg="modSp del mod">
-        <pc:chgData name="James Dyer" userId="c78f284b-7e37-4191-b5a6-8e3806eb7037" providerId="ADAL" clId="{9F1B4838-F5B8-4009-8553-2583D5CDEF26}" dt="2025-04-01T12:23:45.491" v="4762" actId="2696"/>
-        <pc:sldMkLst>
-          <pc:docMk/>
-          <pc:sldMk cId="764597875" sldId="291"/>
-        </pc:sldMkLst>
-      </pc:sldChg>
-      <pc:sldChg chg="modSp mod">
-        <pc:chgData name="James Dyer" userId="c78f284b-7e37-4191-b5a6-8e3806eb7037" providerId="ADAL" clId="{9F1B4838-F5B8-4009-8553-2583D5CDEF26}" dt="2025-03-13T12:24:37.489" v="3365" actId="20577"/>
-        <pc:sldMkLst>
-          <pc:docMk/>
-          <pc:sldMk cId="3918256761" sldId="293"/>
-        </pc:sldMkLst>
-      </pc:sldChg>
-      <pc:sldChg chg="modSp mod">
-        <pc:chgData name="James Dyer" userId="c78f284b-7e37-4191-b5a6-8e3806eb7037" providerId="ADAL" clId="{9F1B4838-F5B8-4009-8553-2583D5CDEF26}" dt="2025-03-11T13:42:23.970" v="127" actId="20577"/>
-        <pc:sldMkLst>
-          <pc:docMk/>
-          <pc:sldMk cId="2676814525" sldId="294"/>
-        </pc:sldMkLst>
-      </pc:sldChg>
-      <pc:sldChg chg="modSp mod">
-        <pc:chgData name="James Dyer" userId="c78f284b-7e37-4191-b5a6-8e3806eb7037" providerId="ADAL" clId="{9F1B4838-F5B8-4009-8553-2583D5CDEF26}" dt="2025-03-13T12:24:23.833" v="3358" actId="20577"/>
-        <pc:sldMkLst>
-          <pc:docMk/>
-          <pc:sldMk cId="2243817902" sldId="296"/>
-        </pc:sldMkLst>
-      </pc:sldChg>
-      <pc:sldChg chg="modSp mod">
-        <pc:chgData name="James Dyer" userId="c78f284b-7e37-4191-b5a6-8e3806eb7037" providerId="ADAL" clId="{9F1B4838-F5B8-4009-8553-2583D5CDEF26}" dt="2025-03-13T12:24:14.228" v="3351" actId="20577"/>
-        <pc:sldMkLst>
-          <pc:docMk/>
-          <pc:sldMk cId="389684381" sldId="297"/>
-        </pc:sldMkLst>
-      </pc:sldChg>
-      <pc:sldChg chg="modSp mod">
-        <pc:chgData name="James Dyer" userId="c78f284b-7e37-4191-b5a6-8e3806eb7037" providerId="ADAL" clId="{9F1B4838-F5B8-4009-8553-2583D5CDEF26}" dt="2025-03-11T14:20:37.020" v="2126" actId="20577"/>
-        <pc:sldMkLst>
-          <pc:docMk/>
-          <pc:sldMk cId="222425812" sldId="299"/>
-        </pc:sldMkLst>
-      </pc:sldChg>
-      <pc:sldChg chg="modSp mod">
-        <pc:chgData name="James Dyer" userId="c78f284b-7e37-4191-b5a6-8e3806eb7037" providerId="ADAL" clId="{9F1B4838-F5B8-4009-8553-2583D5CDEF26}" dt="2025-03-13T12:19:36.810" v="3225" actId="20577"/>
-        <pc:sldMkLst>
-          <pc:docMk/>
-          <pc:sldMk cId="3259653556" sldId="301"/>
-        </pc:sldMkLst>
-      </pc:sldChg>
-      <pc:sldChg chg="modSp mod">
-        <pc:chgData name="James Dyer" userId="c78f284b-7e37-4191-b5a6-8e3806eb7037" providerId="ADAL" clId="{9F1B4838-F5B8-4009-8553-2583D5CDEF26}" dt="2025-03-11T14:29:58.006" v="2635" actId="20577"/>
-        <pc:sldMkLst>
-          <pc:docMk/>
-          <pc:sldMk cId="2143019687" sldId="303"/>
-        </pc:sldMkLst>
-      </pc:sldChg>
-      <pc:sldChg chg="modSp mod">
-        <pc:chgData name="James Dyer" userId="c78f284b-7e37-4191-b5a6-8e3806eb7037" providerId="ADAL" clId="{9F1B4838-F5B8-4009-8553-2583D5CDEF26}" dt="2025-03-27T13:36:29.559" v="4011" actId="20577"/>
-        <pc:sldMkLst>
-          <pc:docMk/>
-          <pc:sldMk cId="1894063612" sldId="304"/>
-        </pc:sldMkLst>
-      </pc:sldChg>
-      <pc:sldChg chg="modSp mod">
-        <pc:chgData name="James Dyer" userId="c78f284b-7e37-4191-b5a6-8e3806eb7037" providerId="ADAL" clId="{9F1B4838-F5B8-4009-8553-2583D5CDEF26}" dt="2025-03-13T12:20:52.153" v="3272" actId="20577"/>
-        <pc:sldMkLst>
-          <pc:docMk/>
-          <pc:sldMk cId="2162822551" sldId="305"/>
-        </pc:sldMkLst>
-      </pc:sldChg>
-      <pc:sldChg chg="modSp mod">
-        <pc:chgData name="James Dyer" userId="c78f284b-7e37-4191-b5a6-8e3806eb7037" providerId="ADAL" clId="{9F1B4838-F5B8-4009-8553-2583D5CDEF26}" dt="2025-03-13T12:22:35.473" v="3337" actId="20577"/>
-        <pc:sldMkLst>
-          <pc:docMk/>
-          <pc:sldMk cId="1235335834" sldId="306"/>
-        </pc:sldMkLst>
-      </pc:sldChg>
-      <pc:sldChg chg="modSp mod">
-        <pc:chgData name="James Dyer" userId="c78f284b-7e37-4191-b5a6-8e3806eb7037" providerId="ADAL" clId="{9F1B4838-F5B8-4009-8553-2583D5CDEF26}" dt="2025-03-27T13:54:51.592" v="4408" actId="20577"/>
-        <pc:sldMkLst>
-          <pc:docMk/>
-          <pc:sldMk cId="3899289595" sldId="307"/>
-        </pc:sldMkLst>
-      </pc:sldChg>
-      <pc:sldChg chg="modSp mod">
-        <pc:chgData name="James Dyer" userId="c78f284b-7e37-4191-b5a6-8e3806eb7037" providerId="ADAL" clId="{9F1B4838-F5B8-4009-8553-2583D5CDEF26}" dt="2025-03-13T12:24:03.346" v="3344" actId="20577"/>
-        <pc:sldMkLst>
-          <pc:docMk/>
-          <pc:sldMk cId="516866492" sldId="308"/>
-        </pc:sldMkLst>
-      </pc:sldChg>
-      <pc:sldChg chg="modSp mod">
-        <pc:chgData name="James Dyer" userId="c78f284b-7e37-4191-b5a6-8e3806eb7037" providerId="ADAL" clId="{9F1B4838-F5B8-4009-8553-2583D5CDEF26}" dt="2025-03-27T13:41:08.785" v="4088" actId="20577"/>
-        <pc:sldMkLst>
-          <pc:docMk/>
-          <pc:sldMk cId="912287713" sldId="309"/>
-        </pc:sldMkLst>
-      </pc:sldChg>
-      <pc:sldChg chg="modSp mod">
-        <pc:chgData name="James Dyer" userId="c78f284b-7e37-4191-b5a6-8e3806eb7037" providerId="ADAL" clId="{9F1B4838-F5B8-4009-8553-2583D5CDEF26}" dt="2025-03-27T13:41:31.167" v="4111" actId="20577"/>
-        <pc:sldMkLst>
-          <pc:docMk/>
-          <pc:sldMk cId="332745502" sldId="310"/>
-        </pc:sldMkLst>
-      </pc:sldChg>
-      <pc:sldChg chg="modSp mod">
-        <pc:chgData name="James Dyer" userId="c78f284b-7e37-4191-b5a6-8e3806eb7037" providerId="ADAL" clId="{9F1B4838-F5B8-4009-8553-2583D5CDEF26}" dt="2025-03-27T13:41:49.561" v="4133" actId="20577"/>
-        <pc:sldMkLst>
-          <pc:docMk/>
-          <pc:sldMk cId="3754273850" sldId="311"/>
-        </pc:sldMkLst>
-      </pc:sldChg>
-      <pc:sldChg chg="modSp mod">
-        <pc:chgData name="James Dyer" userId="c78f284b-7e37-4191-b5a6-8e3806eb7037" providerId="ADAL" clId="{9F1B4838-F5B8-4009-8553-2583D5CDEF26}" dt="2025-03-11T14:22:14.824" v="2201" actId="20577"/>
-        <pc:sldMkLst>
-          <pc:docMk/>
-          <pc:sldMk cId="3090130419" sldId="312"/>
-        </pc:sldMkLst>
-      </pc:sldChg>
-      <pc:sldChg chg="modSp mod">
-        <pc:chgData name="James Dyer" userId="c78f284b-7e37-4191-b5a6-8e3806eb7037" providerId="ADAL" clId="{9F1B4838-F5B8-4009-8553-2583D5CDEF26}" dt="2025-03-11T14:23:54.362" v="2270" actId="20577"/>
-        <pc:sldMkLst>
-          <pc:docMk/>
-          <pc:sldMk cId="1329593464" sldId="313"/>
-        </pc:sldMkLst>
-      </pc:sldChg>
-      <pc:sldChg chg="modSp mod">
-        <pc:chgData name="James Dyer" userId="c78f284b-7e37-4191-b5a6-8e3806eb7037" providerId="ADAL" clId="{9F1B4838-F5B8-4009-8553-2583D5CDEF26}" dt="2025-03-27T13:39:44.283" v="4062" actId="20577"/>
-        <pc:sldMkLst>
-          <pc:docMk/>
-          <pc:sldMk cId="576566906" sldId="314"/>
-        </pc:sldMkLst>
-      </pc:sldChg>
-      <pc:sldChg chg="modSp mod">
-        <pc:chgData name="James Dyer" userId="c78f284b-7e37-4191-b5a6-8e3806eb7037" providerId="ADAL" clId="{9F1B4838-F5B8-4009-8553-2583D5CDEF26}" dt="2025-04-01T12:34:13.812" v="5263" actId="20577"/>
-        <pc:sldMkLst>
-          <pc:docMk/>
-          <pc:sldMk cId="683459384" sldId="316"/>
-        </pc:sldMkLst>
-      </pc:sldChg>
-      <pc:sldChg chg="modSp mod">
-        <pc:chgData name="James Dyer" userId="c78f284b-7e37-4191-b5a6-8e3806eb7037" providerId="ADAL" clId="{9F1B4838-F5B8-4009-8553-2583D5CDEF26}" dt="2025-03-27T13:55:14.546" v="4416" actId="20577"/>
-        <pc:sldMkLst>
-          <pc:docMk/>
-          <pc:sldMk cId="1651744765" sldId="317"/>
-        </pc:sldMkLst>
-      </pc:sldChg>
-      <pc:sldChg chg="modSp mod">
-        <pc:chgData name="James Dyer" userId="c78f284b-7e37-4191-b5a6-8e3806eb7037" providerId="ADAL" clId="{9F1B4838-F5B8-4009-8553-2583D5CDEF26}" dt="2025-03-28T12:40:01.600" v="4420" actId="21"/>
-        <pc:sldMkLst>
-          <pc:docMk/>
-          <pc:sldMk cId="2458435575" sldId="339"/>
-        </pc:sldMkLst>
-      </pc:sldChg>
-      <pc:sldChg chg="new del">
-        <pc:chgData name="James Dyer" userId="c78f284b-7e37-4191-b5a6-8e3806eb7037" providerId="ADAL" clId="{9F1B4838-F5B8-4009-8553-2583D5CDEF26}" dt="2025-03-11T13:43:21.727" v="153" actId="47"/>
-        <pc:sldMkLst>
-          <pc:docMk/>
-          <pc:sldMk cId="2189458007" sldId="340"/>
-        </pc:sldMkLst>
-      </pc:sldChg>
-      <pc:sldChg chg="delSp modSp new mod modClrScheme chgLayout">
-        <pc:chgData name="James Dyer" userId="c78f284b-7e37-4191-b5a6-8e3806eb7037" providerId="ADAL" clId="{9F1B4838-F5B8-4009-8553-2583D5CDEF26}" dt="2025-03-27T13:36:22.336" v="4002" actId="20577"/>
-        <pc:sldMkLst>
-          <pc:docMk/>
-          <pc:sldMk cId="3428931588" sldId="340"/>
-        </pc:sldMkLst>
-      </pc:sldChg>
-      <pc:sldChg chg="addSp modSp new mod">
-        <pc:chgData name="James Dyer" userId="c78f284b-7e37-4191-b5a6-8e3806eb7037" providerId="ADAL" clId="{9F1B4838-F5B8-4009-8553-2583D5CDEF26}" dt="2025-04-01T12:25:36.602" v="4883"/>
-        <pc:sldMkLst>
-          <pc:docMk/>
-          <pc:sldMk cId="3326521812" sldId="341"/>
-        </pc:sldMkLst>
-      </pc:sldChg>
-      <pc:sldChg chg="addSp delSp modSp new mod modClrScheme chgLayout">
-        <pc:chgData name="James Dyer" userId="c78f284b-7e37-4191-b5a6-8e3806eb7037" providerId="ADAL" clId="{9F1B4838-F5B8-4009-8553-2583D5CDEF26}" dt="2025-04-01T12:32:28.647" v="5233" actId="20577"/>
-        <pc:sldMkLst>
-          <pc:docMk/>
-          <pc:sldMk cId="3663547034" sldId="342"/>
-        </pc:sldMkLst>
-      </pc:sldChg>
-    </pc:docChg>
-  </pc:docChgLst>
   <pc:docChgLst>
     <pc:chgData name="James Dyer" userId="c78f284b-7e37-4191-b5a6-8e3806eb7037" providerId="ADAL" clId="{8CAE880E-E8E5-4073-9B15-483A6F742718}"/>
     <pc:docChg chg="undo custSel addSld delSld modSld sldOrd">
@@ -878,146 +490,6 @@
           <pc:docMk/>
           <pc:sldMk cId="2458435575" sldId="339"/>
         </pc:sldMkLst>
-      </pc:sldChg>
-    </pc:docChg>
-  </pc:docChgLst>
-  <pc:docChgLst>
-    <pc:chgData name="James Dyer" userId="c78f284b-7e37-4191-b5a6-8e3806eb7037" providerId="ADAL" clId="{ED7FCED4-88BD-4EAF-A1A8-BA80AA5C3E54}"/>
-    <pc:docChg chg="modSld">
-      <pc:chgData name="James Dyer" userId="c78f284b-7e37-4191-b5a6-8e3806eb7037" providerId="ADAL" clId="{ED7FCED4-88BD-4EAF-A1A8-BA80AA5C3E54}" dt="2024-10-21T15:44:34.154" v="17" actId="20577"/>
-      <pc:docMkLst>
-        <pc:docMk/>
-      </pc:docMkLst>
-      <pc:sldChg chg="modSp">
-        <pc:chgData name="James Dyer" userId="c78f284b-7e37-4191-b5a6-8e3806eb7037" providerId="ADAL" clId="{ED7FCED4-88BD-4EAF-A1A8-BA80AA5C3E54}" dt="2024-10-21T15:13:33.380" v="3" actId="20577"/>
-        <pc:sldMkLst>
-          <pc:docMk/>
-          <pc:sldMk cId="2581238198" sldId="260"/>
-        </pc:sldMkLst>
-      </pc:sldChg>
-      <pc:sldChg chg="modSp">
-        <pc:chgData name="James Dyer" userId="c78f284b-7e37-4191-b5a6-8e3806eb7037" providerId="ADAL" clId="{ED7FCED4-88BD-4EAF-A1A8-BA80AA5C3E54}" dt="2024-10-21T15:11:04.806" v="1" actId="20577"/>
-        <pc:sldMkLst>
-          <pc:docMk/>
-          <pc:sldMk cId="2475208075" sldId="264"/>
-        </pc:sldMkLst>
-      </pc:sldChg>
-      <pc:sldChg chg="modSp mod">
-        <pc:chgData name="James Dyer" userId="c78f284b-7e37-4191-b5a6-8e3806eb7037" providerId="ADAL" clId="{ED7FCED4-88BD-4EAF-A1A8-BA80AA5C3E54}" dt="2024-10-21T15:36:24.961" v="15" actId="20577"/>
-        <pc:sldMkLst>
-          <pc:docMk/>
-          <pc:sldMk cId="126883131" sldId="269"/>
-        </pc:sldMkLst>
-      </pc:sldChg>
-      <pc:sldChg chg="modSp">
-        <pc:chgData name="James Dyer" userId="c78f284b-7e37-4191-b5a6-8e3806eb7037" providerId="ADAL" clId="{ED7FCED4-88BD-4EAF-A1A8-BA80AA5C3E54}" dt="2024-10-21T15:44:34.154" v="17" actId="20577"/>
-        <pc:sldMkLst>
-          <pc:docMk/>
-          <pc:sldMk cId="3860212923" sldId="274"/>
-        </pc:sldMkLst>
-      </pc:sldChg>
-    </pc:docChg>
-  </pc:docChgLst>
-  <pc:docChgLst>
-    <pc:chgData name="James Dyer" userId="c78f284b-7e37-4191-b5a6-8e3806eb7037" providerId="ADAL" clId="{1947EA28-F121-4360-BB10-97F90EB693A0}"/>
-    <pc:docChg chg="undo custSel addSld delSld modSld">
-      <pc:chgData name="James Dyer" userId="c78f284b-7e37-4191-b5a6-8e3806eb7037" providerId="ADAL" clId="{1947EA28-F121-4360-BB10-97F90EB693A0}" dt="2024-10-04T14:13:10.689" v="1929" actId="20577"/>
-      <pc:docMkLst>
-        <pc:docMk/>
-      </pc:docMkLst>
-      <pc:sldChg chg="modSp">
-        <pc:chgData name="James Dyer" userId="c78f284b-7e37-4191-b5a6-8e3806eb7037" providerId="ADAL" clId="{1947EA28-F121-4360-BB10-97F90EB693A0}" dt="2024-10-04T14:13:10.689" v="1929" actId="20577"/>
-        <pc:sldMkLst>
-          <pc:docMk/>
-          <pc:sldMk cId="77911456" sldId="268"/>
-        </pc:sldMkLst>
-      </pc:sldChg>
-      <pc:sldChg chg="modSp mod">
-        <pc:chgData name="James Dyer" userId="c78f284b-7e37-4191-b5a6-8e3806eb7037" providerId="ADAL" clId="{1947EA28-F121-4360-BB10-97F90EB693A0}" dt="2024-10-04T12:21:53.736" v="21" actId="20577"/>
-        <pc:sldMkLst>
-          <pc:docMk/>
-          <pc:sldMk cId="3713491935" sldId="272"/>
-        </pc:sldMkLst>
-      </pc:sldChg>
-      <pc:sldChg chg="addSp delSp modSp new del mod modClrScheme chgLayout">
-        <pc:chgData name="James Dyer" userId="c78f284b-7e37-4191-b5a6-8e3806eb7037" providerId="ADAL" clId="{1947EA28-F121-4360-BB10-97F90EB693A0}" dt="2024-10-04T12:55:37.843" v="105" actId="47"/>
-        <pc:sldMkLst>
-          <pc:docMk/>
-          <pc:sldMk cId="648843958" sldId="273"/>
-        </pc:sldMkLst>
-      </pc:sldChg>
-      <pc:sldChg chg="modSp new mod">
-        <pc:chgData name="James Dyer" userId="c78f284b-7e37-4191-b5a6-8e3806eb7037" providerId="ADAL" clId="{1947EA28-F121-4360-BB10-97F90EB693A0}" dt="2024-10-04T14:07:18.542" v="1871" actId="20577"/>
-        <pc:sldMkLst>
-          <pc:docMk/>
-          <pc:sldMk cId="3860212923" sldId="274"/>
-        </pc:sldMkLst>
-      </pc:sldChg>
-      <pc:sldChg chg="modSp new mod">
-        <pc:chgData name="James Dyer" userId="c78f284b-7e37-4191-b5a6-8e3806eb7037" providerId="ADAL" clId="{1947EA28-F121-4360-BB10-97F90EB693A0}" dt="2024-10-04T13:56:29.385" v="1683" actId="5793"/>
-        <pc:sldMkLst>
-          <pc:docMk/>
-          <pc:sldMk cId="3700872050" sldId="275"/>
-        </pc:sldMkLst>
-      </pc:sldChg>
-      <pc:sldChg chg="modSp new mod">
-        <pc:chgData name="James Dyer" userId="c78f284b-7e37-4191-b5a6-8e3806eb7037" providerId="ADAL" clId="{1947EA28-F121-4360-BB10-97F90EB693A0}" dt="2024-10-04T12:41:13.198" v="104" actId="20577"/>
-        <pc:sldMkLst>
-          <pc:docMk/>
-          <pc:sldMk cId="238652036" sldId="276"/>
-        </pc:sldMkLst>
-      </pc:sldChg>
-      <pc:sldChg chg="modSp new mod">
-        <pc:chgData name="James Dyer" userId="c78f284b-7e37-4191-b5a6-8e3806eb7037" providerId="ADAL" clId="{1947EA28-F121-4360-BB10-97F90EB693A0}" dt="2024-10-04T13:55:51.369" v="1675" actId="14"/>
-        <pc:sldMkLst>
-          <pc:docMk/>
-          <pc:sldMk cId="827335259" sldId="277"/>
-        </pc:sldMkLst>
-      </pc:sldChg>
-      <pc:sldChg chg="modSp new del mod">
-        <pc:chgData name="James Dyer" userId="c78f284b-7e37-4191-b5a6-8e3806eb7037" providerId="ADAL" clId="{1947EA28-F121-4360-BB10-97F90EB693A0}" dt="2024-10-04T14:07:28.546" v="1872" actId="2696"/>
-        <pc:sldMkLst>
-          <pc:docMk/>
-          <pc:sldMk cId="3724015866" sldId="278"/>
-        </pc:sldMkLst>
-      </pc:sldChg>
-      <pc:sldChg chg="modSp new mod">
-        <pc:chgData name="James Dyer" userId="c78f284b-7e37-4191-b5a6-8e3806eb7037" providerId="ADAL" clId="{1947EA28-F121-4360-BB10-97F90EB693A0}" dt="2024-10-04T13:53:42.542" v="1644" actId="20577"/>
-        <pc:sldMkLst>
-          <pc:docMk/>
-          <pc:sldMk cId="4191342174" sldId="279"/>
-        </pc:sldMkLst>
-      </pc:sldChg>
-      <pc:sldChg chg="modSp new mod">
-        <pc:chgData name="James Dyer" userId="c78f284b-7e37-4191-b5a6-8e3806eb7037" providerId="ADAL" clId="{1947EA28-F121-4360-BB10-97F90EB693A0}" dt="2024-10-04T13:55:37.249" v="1671"/>
-        <pc:sldMkLst>
-          <pc:docMk/>
-          <pc:sldMk cId="2686022152" sldId="280"/>
-        </pc:sldMkLst>
-      </pc:sldChg>
-    </pc:docChg>
-  </pc:docChgLst>
-  <pc:docChgLst>
-    <pc:chgData name="James Dyer" userId="c78f284b-7e37-4191-b5a6-8e3806eb7037" providerId="ADAL" clId="{266EDBC1-18D1-6D40-9E5D-319DD3A4E52B}"/>
-    <pc:docChg chg="modSld">
-      <pc:chgData name="James Dyer" userId="c78f284b-7e37-4191-b5a6-8e3806eb7037" providerId="ADAL" clId="{266EDBC1-18D1-6D40-9E5D-319DD3A4E52B}" dt="2025-08-18T16:09:13.814" v="6" actId="20577"/>
-      <pc:docMkLst>
-        <pc:docMk/>
-      </pc:docMkLst>
-      <pc:sldChg chg="modSp">
-        <pc:chgData name="James Dyer" userId="c78f284b-7e37-4191-b5a6-8e3806eb7037" providerId="ADAL" clId="{266EDBC1-18D1-6D40-9E5D-319DD3A4E52B}" dt="2025-08-18T16:09:13.814" v="6" actId="20577"/>
-        <pc:sldMkLst>
-          <pc:docMk/>
-          <pc:sldMk cId="62703184" sldId="345"/>
-        </pc:sldMkLst>
-        <pc:spChg chg="mod">
-          <ac:chgData name="James Dyer" userId="c78f284b-7e37-4191-b5a6-8e3806eb7037" providerId="ADAL" clId="{266EDBC1-18D1-6D40-9E5D-319DD3A4E52B}" dt="2025-08-18T16:09:13.814" v="6" actId="20577"/>
-          <ac:spMkLst>
-            <pc:docMk/>
-            <pc:sldMk cId="62703184" sldId="345"/>
-            <ac:spMk id="3" creationId="{50F47BB7-AC17-9CB3-D71A-8010D133D5C8}"/>
-          </ac:spMkLst>
-        </pc:spChg>
       </pc:sldChg>
     </pc:docChg>
   </pc:docChgLst>
@@ -1409,6 +881,43 @@
     </pc:docChg>
   </pc:docChgLst>
   <pc:docChgLst>
+    <pc:chgData name="James Dyer" userId="c78f284b-7e37-4191-b5a6-8e3806eb7037" providerId="ADAL" clId="{ED7FCED4-88BD-4EAF-A1A8-BA80AA5C3E54}"/>
+    <pc:docChg chg="modSld">
+      <pc:chgData name="James Dyer" userId="c78f284b-7e37-4191-b5a6-8e3806eb7037" providerId="ADAL" clId="{ED7FCED4-88BD-4EAF-A1A8-BA80AA5C3E54}" dt="2024-10-21T15:44:34.154" v="17" actId="20577"/>
+      <pc:docMkLst>
+        <pc:docMk/>
+      </pc:docMkLst>
+      <pc:sldChg chg="modSp">
+        <pc:chgData name="James Dyer" userId="c78f284b-7e37-4191-b5a6-8e3806eb7037" providerId="ADAL" clId="{ED7FCED4-88BD-4EAF-A1A8-BA80AA5C3E54}" dt="2024-10-21T15:13:33.380" v="3" actId="20577"/>
+        <pc:sldMkLst>
+          <pc:docMk/>
+          <pc:sldMk cId="2581238198" sldId="260"/>
+        </pc:sldMkLst>
+      </pc:sldChg>
+      <pc:sldChg chg="modSp">
+        <pc:chgData name="James Dyer" userId="c78f284b-7e37-4191-b5a6-8e3806eb7037" providerId="ADAL" clId="{ED7FCED4-88BD-4EAF-A1A8-BA80AA5C3E54}" dt="2024-10-21T15:11:04.806" v="1" actId="20577"/>
+        <pc:sldMkLst>
+          <pc:docMk/>
+          <pc:sldMk cId="2475208075" sldId="264"/>
+        </pc:sldMkLst>
+      </pc:sldChg>
+      <pc:sldChg chg="modSp mod">
+        <pc:chgData name="James Dyer" userId="c78f284b-7e37-4191-b5a6-8e3806eb7037" providerId="ADAL" clId="{ED7FCED4-88BD-4EAF-A1A8-BA80AA5C3E54}" dt="2024-10-21T15:36:24.961" v="15" actId="20577"/>
+        <pc:sldMkLst>
+          <pc:docMk/>
+          <pc:sldMk cId="126883131" sldId="269"/>
+        </pc:sldMkLst>
+      </pc:sldChg>
+      <pc:sldChg chg="modSp">
+        <pc:chgData name="James Dyer" userId="c78f284b-7e37-4191-b5a6-8e3806eb7037" providerId="ADAL" clId="{ED7FCED4-88BD-4EAF-A1A8-BA80AA5C3E54}" dt="2024-10-21T15:44:34.154" v="17" actId="20577"/>
+        <pc:sldMkLst>
+          <pc:docMk/>
+          <pc:sldMk cId="3860212923" sldId="274"/>
+        </pc:sldMkLst>
+      </pc:sldChg>
+    </pc:docChg>
+  </pc:docChgLst>
+  <pc:docChgLst>
     <pc:chgData name="James Dyer" userId="c78f284b-7e37-4191-b5a6-8e3806eb7037" providerId="ADAL" clId="{0C8F18DE-B7DB-483A-B1D7-D6D46145D899}"/>
     <pc:docChg chg="delSld">
       <pc:chgData name="James Dyer" userId="c78f284b-7e37-4191-b5a6-8e3806eb7037" providerId="ADAL" clId="{0C8F18DE-B7DB-483A-B1D7-D6D46145D899}" dt="2025-09-01T13:36:06.133" v="3" actId="47"/>
@@ -1566,6 +1075,496 @@
       </pc:sldChg>
     </pc:docChg>
   </pc:docChgLst>
+  <pc:docChgLst>
+    <pc:chgData name="James Dyer" userId="c78f284b-7e37-4191-b5a6-8e3806eb7037" providerId="ADAL" clId="{1947EA28-F121-4360-BB10-97F90EB693A0}"/>
+    <pc:docChg chg="undo custSel addSld delSld modSld">
+      <pc:chgData name="James Dyer" userId="c78f284b-7e37-4191-b5a6-8e3806eb7037" providerId="ADAL" clId="{1947EA28-F121-4360-BB10-97F90EB693A0}" dt="2024-10-04T14:13:10.689" v="1929" actId="20577"/>
+      <pc:docMkLst>
+        <pc:docMk/>
+      </pc:docMkLst>
+      <pc:sldChg chg="modSp">
+        <pc:chgData name="James Dyer" userId="c78f284b-7e37-4191-b5a6-8e3806eb7037" providerId="ADAL" clId="{1947EA28-F121-4360-BB10-97F90EB693A0}" dt="2024-10-04T14:13:10.689" v="1929" actId="20577"/>
+        <pc:sldMkLst>
+          <pc:docMk/>
+          <pc:sldMk cId="77911456" sldId="268"/>
+        </pc:sldMkLst>
+      </pc:sldChg>
+      <pc:sldChg chg="modSp mod">
+        <pc:chgData name="James Dyer" userId="c78f284b-7e37-4191-b5a6-8e3806eb7037" providerId="ADAL" clId="{1947EA28-F121-4360-BB10-97F90EB693A0}" dt="2024-10-04T12:21:53.736" v="21" actId="20577"/>
+        <pc:sldMkLst>
+          <pc:docMk/>
+          <pc:sldMk cId="3713491935" sldId="272"/>
+        </pc:sldMkLst>
+      </pc:sldChg>
+      <pc:sldChg chg="addSp delSp modSp new del mod modClrScheme chgLayout">
+        <pc:chgData name="James Dyer" userId="c78f284b-7e37-4191-b5a6-8e3806eb7037" providerId="ADAL" clId="{1947EA28-F121-4360-BB10-97F90EB693A0}" dt="2024-10-04T12:55:37.843" v="105" actId="47"/>
+        <pc:sldMkLst>
+          <pc:docMk/>
+          <pc:sldMk cId="648843958" sldId="273"/>
+        </pc:sldMkLst>
+      </pc:sldChg>
+      <pc:sldChg chg="modSp new mod">
+        <pc:chgData name="James Dyer" userId="c78f284b-7e37-4191-b5a6-8e3806eb7037" providerId="ADAL" clId="{1947EA28-F121-4360-BB10-97F90EB693A0}" dt="2024-10-04T14:07:18.542" v="1871" actId="20577"/>
+        <pc:sldMkLst>
+          <pc:docMk/>
+          <pc:sldMk cId="3860212923" sldId="274"/>
+        </pc:sldMkLst>
+      </pc:sldChg>
+      <pc:sldChg chg="modSp new mod">
+        <pc:chgData name="James Dyer" userId="c78f284b-7e37-4191-b5a6-8e3806eb7037" providerId="ADAL" clId="{1947EA28-F121-4360-BB10-97F90EB693A0}" dt="2024-10-04T13:56:29.385" v="1683" actId="5793"/>
+        <pc:sldMkLst>
+          <pc:docMk/>
+          <pc:sldMk cId="3700872050" sldId="275"/>
+        </pc:sldMkLst>
+      </pc:sldChg>
+      <pc:sldChg chg="modSp new mod">
+        <pc:chgData name="James Dyer" userId="c78f284b-7e37-4191-b5a6-8e3806eb7037" providerId="ADAL" clId="{1947EA28-F121-4360-BB10-97F90EB693A0}" dt="2024-10-04T12:41:13.198" v="104" actId="20577"/>
+        <pc:sldMkLst>
+          <pc:docMk/>
+          <pc:sldMk cId="238652036" sldId="276"/>
+        </pc:sldMkLst>
+      </pc:sldChg>
+      <pc:sldChg chg="modSp new mod">
+        <pc:chgData name="James Dyer" userId="c78f284b-7e37-4191-b5a6-8e3806eb7037" providerId="ADAL" clId="{1947EA28-F121-4360-BB10-97F90EB693A0}" dt="2024-10-04T13:55:51.369" v="1675" actId="14"/>
+        <pc:sldMkLst>
+          <pc:docMk/>
+          <pc:sldMk cId="827335259" sldId="277"/>
+        </pc:sldMkLst>
+      </pc:sldChg>
+      <pc:sldChg chg="modSp new del mod">
+        <pc:chgData name="James Dyer" userId="c78f284b-7e37-4191-b5a6-8e3806eb7037" providerId="ADAL" clId="{1947EA28-F121-4360-BB10-97F90EB693A0}" dt="2024-10-04T14:07:28.546" v="1872" actId="2696"/>
+        <pc:sldMkLst>
+          <pc:docMk/>
+          <pc:sldMk cId="3724015866" sldId="278"/>
+        </pc:sldMkLst>
+      </pc:sldChg>
+      <pc:sldChg chg="modSp new mod">
+        <pc:chgData name="James Dyer" userId="c78f284b-7e37-4191-b5a6-8e3806eb7037" providerId="ADAL" clId="{1947EA28-F121-4360-BB10-97F90EB693A0}" dt="2024-10-04T13:53:42.542" v="1644" actId="20577"/>
+        <pc:sldMkLst>
+          <pc:docMk/>
+          <pc:sldMk cId="4191342174" sldId="279"/>
+        </pc:sldMkLst>
+      </pc:sldChg>
+      <pc:sldChg chg="modSp new mod">
+        <pc:chgData name="James Dyer" userId="c78f284b-7e37-4191-b5a6-8e3806eb7037" providerId="ADAL" clId="{1947EA28-F121-4360-BB10-97F90EB693A0}" dt="2024-10-04T13:55:37.249" v="1671"/>
+        <pc:sldMkLst>
+          <pc:docMk/>
+          <pc:sldMk cId="2686022152" sldId="280"/>
+        </pc:sldMkLst>
+      </pc:sldChg>
+    </pc:docChg>
+  </pc:docChgLst>
+  <pc:docChgLst>
+    <pc:chgData name="James Dyer" userId="c78f284b-7e37-4191-b5a6-8e3806eb7037" providerId="ADAL" clId="{266EDBC1-18D1-6D40-9E5D-319DD3A4E52B}"/>
+    <pc:docChg chg="modSld">
+      <pc:chgData name="James Dyer" userId="c78f284b-7e37-4191-b5a6-8e3806eb7037" providerId="ADAL" clId="{266EDBC1-18D1-6D40-9E5D-319DD3A4E52B}" dt="2025-08-18T16:09:13.814" v="6" actId="20577"/>
+      <pc:docMkLst>
+        <pc:docMk/>
+      </pc:docMkLst>
+      <pc:sldChg chg="modSp">
+        <pc:chgData name="James Dyer" userId="c78f284b-7e37-4191-b5a6-8e3806eb7037" providerId="ADAL" clId="{266EDBC1-18D1-6D40-9E5D-319DD3A4E52B}" dt="2025-08-18T16:09:13.814" v="6" actId="20577"/>
+        <pc:sldMkLst>
+          <pc:docMk/>
+          <pc:sldMk cId="62703184" sldId="345"/>
+        </pc:sldMkLst>
+        <pc:spChg chg="mod">
+          <ac:chgData name="James Dyer" userId="c78f284b-7e37-4191-b5a6-8e3806eb7037" providerId="ADAL" clId="{266EDBC1-18D1-6D40-9E5D-319DD3A4E52B}" dt="2025-08-18T16:09:13.814" v="6" actId="20577"/>
+          <ac:spMkLst>
+            <pc:docMk/>
+            <pc:sldMk cId="62703184" sldId="345"/>
+            <ac:spMk id="3" creationId="{50F47BB7-AC17-9CB3-D71A-8010D133D5C8}"/>
+          </ac:spMkLst>
+        </pc:spChg>
+      </pc:sldChg>
+    </pc:docChg>
+  </pc:docChgLst>
+  <pc:docChgLst>
+    <pc:chgData name="James Dyer" userId="c78f284b-7e37-4191-b5a6-8e3806eb7037" providerId="ADAL" clId="{9F1B4838-F5B8-4009-8553-2583D5CDEF26}"/>
+    <pc:docChg chg="undo redo custSel addSld delSld modSld">
+      <pc:chgData name="James Dyer" userId="c78f284b-7e37-4191-b5a6-8e3806eb7037" providerId="ADAL" clId="{9F1B4838-F5B8-4009-8553-2583D5CDEF26}" dt="2025-04-01T12:34:13.812" v="5263" actId="20577"/>
+      <pc:docMkLst>
+        <pc:docMk/>
+      </pc:docMkLst>
+      <pc:sldChg chg="modSp mod">
+        <pc:chgData name="James Dyer" userId="c78f284b-7e37-4191-b5a6-8e3806eb7037" providerId="ADAL" clId="{9F1B4838-F5B8-4009-8553-2583D5CDEF26}" dt="2025-03-12T14:51:17.336" v="3004" actId="20577"/>
+        <pc:sldMkLst>
+          <pc:docMk/>
+          <pc:sldMk cId="340163789" sldId="256"/>
+        </pc:sldMkLst>
+      </pc:sldChg>
+      <pc:sldChg chg="modSp mod">
+        <pc:chgData name="James Dyer" userId="c78f284b-7e37-4191-b5a6-8e3806eb7037" providerId="ADAL" clId="{9F1B4838-F5B8-4009-8553-2583D5CDEF26}" dt="2025-03-28T12:39:50.722" v="4418" actId="20577"/>
+        <pc:sldMkLst>
+          <pc:docMk/>
+          <pc:sldMk cId="757110763" sldId="258"/>
+        </pc:sldMkLst>
+      </pc:sldChg>
+      <pc:sldChg chg="modSp mod">
+        <pc:chgData name="James Dyer" userId="c78f284b-7e37-4191-b5a6-8e3806eb7037" providerId="ADAL" clId="{9F1B4838-F5B8-4009-8553-2583D5CDEF26}" dt="2025-03-28T12:42:20.560" v="4421" actId="20577"/>
+        <pc:sldMkLst>
+          <pc:docMk/>
+          <pc:sldMk cId="506699912" sldId="259"/>
+        </pc:sldMkLst>
+      </pc:sldChg>
+      <pc:sldChg chg="del">
+        <pc:chgData name="James Dyer" userId="c78f284b-7e37-4191-b5a6-8e3806eb7037" providerId="ADAL" clId="{9F1B4838-F5B8-4009-8553-2583D5CDEF26}" dt="2025-03-28T12:37:46.135" v="4417" actId="2696"/>
+        <pc:sldMkLst>
+          <pc:docMk/>
+          <pc:sldMk cId="2581238198" sldId="260"/>
+        </pc:sldMkLst>
+      </pc:sldChg>
+      <pc:sldChg chg="del">
+        <pc:chgData name="James Dyer" userId="c78f284b-7e37-4191-b5a6-8e3806eb7037" providerId="ADAL" clId="{9F1B4838-F5B8-4009-8553-2583D5CDEF26}" dt="2025-03-28T12:37:46.135" v="4417" actId="2696"/>
+        <pc:sldMkLst>
+          <pc:docMk/>
+          <pc:sldMk cId="1318305980" sldId="262"/>
+        </pc:sldMkLst>
+      </pc:sldChg>
+      <pc:sldChg chg="del">
+        <pc:chgData name="James Dyer" userId="c78f284b-7e37-4191-b5a6-8e3806eb7037" providerId="ADAL" clId="{9F1B4838-F5B8-4009-8553-2583D5CDEF26}" dt="2025-03-28T12:37:46.135" v="4417" actId="2696"/>
+        <pc:sldMkLst>
+          <pc:docMk/>
+          <pc:sldMk cId="3190321217" sldId="263"/>
+        </pc:sldMkLst>
+      </pc:sldChg>
+      <pc:sldChg chg="del">
+        <pc:chgData name="James Dyer" userId="c78f284b-7e37-4191-b5a6-8e3806eb7037" providerId="ADAL" clId="{9F1B4838-F5B8-4009-8553-2583D5CDEF26}" dt="2025-03-28T12:37:46.135" v="4417" actId="2696"/>
+        <pc:sldMkLst>
+          <pc:docMk/>
+          <pc:sldMk cId="2475208075" sldId="264"/>
+        </pc:sldMkLst>
+      </pc:sldChg>
+      <pc:sldChg chg="del">
+        <pc:chgData name="James Dyer" userId="c78f284b-7e37-4191-b5a6-8e3806eb7037" providerId="ADAL" clId="{9F1B4838-F5B8-4009-8553-2583D5CDEF26}" dt="2025-03-28T12:37:46.135" v="4417" actId="2696"/>
+        <pc:sldMkLst>
+          <pc:docMk/>
+          <pc:sldMk cId="271333520" sldId="265"/>
+        </pc:sldMkLst>
+      </pc:sldChg>
+      <pc:sldChg chg="del">
+        <pc:chgData name="James Dyer" userId="c78f284b-7e37-4191-b5a6-8e3806eb7037" providerId="ADAL" clId="{9F1B4838-F5B8-4009-8553-2583D5CDEF26}" dt="2025-03-28T12:37:46.135" v="4417" actId="2696"/>
+        <pc:sldMkLst>
+          <pc:docMk/>
+          <pc:sldMk cId="874173536" sldId="266"/>
+        </pc:sldMkLst>
+      </pc:sldChg>
+      <pc:sldChg chg="del">
+        <pc:chgData name="James Dyer" userId="c78f284b-7e37-4191-b5a6-8e3806eb7037" providerId="ADAL" clId="{9F1B4838-F5B8-4009-8553-2583D5CDEF26}" dt="2025-03-28T12:37:46.135" v="4417" actId="2696"/>
+        <pc:sldMkLst>
+          <pc:docMk/>
+          <pc:sldMk cId="409111657" sldId="267"/>
+        </pc:sldMkLst>
+      </pc:sldChg>
+      <pc:sldChg chg="del">
+        <pc:chgData name="James Dyer" userId="c78f284b-7e37-4191-b5a6-8e3806eb7037" providerId="ADAL" clId="{9F1B4838-F5B8-4009-8553-2583D5CDEF26}" dt="2025-03-28T12:37:46.135" v="4417" actId="2696"/>
+        <pc:sldMkLst>
+          <pc:docMk/>
+          <pc:sldMk cId="77911456" sldId="268"/>
+        </pc:sldMkLst>
+      </pc:sldChg>
+      <pc:sldChg chg="del">
+        <pc:chgData name="James Dyer" userId="c78f284b-7e37-4191-b5a6-8e3806eb7037" providerId="ADAL" clId="{9F1B4838-F5B8-4009-8553-2583D5CDEF26}" dt="2025-03-28T12:37:46.135" v="4417" actId="2696"/>
+        <pc:sldMkLst>
+          <pc:docMk/>
+          <pc:sldMk cId="126883131" sldId="269"/>
+        </pc:sldMkLst>
+      </pc:sldChg>
+      <pc:sldChg chg="del">
+        <pc:chgData name="James Dyer" userId="c78f284b-7e37-4191-b5a6-8e3806eb7037" providerId="ADAL" clId="{9F1B4838-F5B8-4009-8553-2583D5CDEF26}" dt="2025-03-13T12:12:01.409" v="3060" actId="2696"/>
+        <pc:sldMkLst>
+          <pc:docMk/>
+          <pc:sldMk cId="3114036420" sldId="270"/>
+        </pc:sldMkLst>
+      </pc:sldChg>
+      <pc:sldChg chg="del">
+        <pc:chgData name="James Dyer" userId="c78f284b-7e37-4191-b5a6-8e3806eb7037" providerId="ADAL" clId="{9F1B4838-F5B8-4009-8553-2583D5CDEF26}" dt="2025-03-28T12:37:46.135" v="4417" actId="2696"/>
+        <pc:sldMkLst>
+          <pc:docMk/>
+          <pc:sldMk cId="1918331364" sldId="271"/>
+        </pc:sldMkLst>
+      </pc:sldChg>
+      <pc:sldChg chg="del">
+        <pc:chgData name="James Dyer" userId="c78f284b-7e37-4191-b5a6-8e3806eb7037" providerId="ADAL" clId="{9F1B4838-F5B8-4009-8553-2583D5CDEF26}" dt="2025-03-28T12:37:46.135" v="4417" actId="2696"/>
+        <pc:sldMkLst>
+          <pc:docMk/>
+          <pc:sldMk cId="3713491935" sldId="272"/>
+        </pc:sldMkLst>
+      </pc:sldChg>
+      <pc:sldChg chg="modSp del mod">
+        <pc:chgData name="James Dyer" userId="c78f284b-7e37-4191-b5a6-8e3806eb7037" providerId="ADAL" clId="{9F1B4838-F5B8-4009-8553-2583D5CDEF26}" dt="2025-03-28T12:37:46.135" v="4417" actId="2696"/>
+        <pc:sldMkLst>
+          <pc:docMk/>
+          <pc:sldMk cId="3860212923" sldId="274"/>
+        </pc:sldMkLst>
+      </pc:sldChg>
+      <pc:sldChg chg="modSp del">
+        <pc:chgData name="James Dyer" userId="c78f284b-7e37-4191-b5a6-8e3806eb7037" providerId="ADAL" clId="{9F1B4838-F5B8-4009-8553-2583D5CDEF26}" dt="2025-03-28T12:37:46.135" v="4417" actId="2696"/>
+        <pc:sldMkLst>
+          <pc:docMk/>
+          <pc:sldMk cId="3700872050" sldId="275"/>
+        </pc:sldMkLst>
+      </pc:sldChg>
+      <pc:sldChg chg="del">
+        <pc:chgData name="James Dyer" userId="c78f284b-7e37-4191-b5a6-8e3806eb7037" providerId="ADAL" clId="{9F1B4838-F5B8-4009-8553-2583D5CDEF26}" dt="2025-03-28T12:39:54.166" v="4419" actId="2696"/>
+        <pc:sldMkLst>
+          <pc:docMk/>
+          <pc:sldMk cId="238652036" sldId="276"/>
+        </pc:sldMkLst>
+      </pc:sldChg>
+      <pc:sldChg chg="delSp modSp del mod modClrScheme chgLayout">
+        <pc:chgData name="James Dyer" userId="c78f284b-7e37-4191-b5a6-8e3806eb7037" providerId="ADAL" clId="{9F1B4838-F5B8-4009-8553-2583D5CDEF26}" dt="2025-03-28T12:37:46.135" v="4417" actId="2696"/>
+        <pc:sldMkLst>
+          <pc:docMk/>
+          <pc:sldMk cId="827335259" sldId="277"/>
+        </pc:sldMkLst>
+      </pc:sldChg>
+      <pc:sldChg chg="modSp mod">
+        <pc:chgData name="James Dyer" userId="c78f284b-7e37-4191-b5a6-8e3806eb7037" providerId="ADAL" clId="{9F1B4838-F5B8-4009-8553-2583D5CDEF26}" dt="2025-03-11T13:52:15.989" v="709" actId="20577"/>
+        <pc:sldMkLst>
+          <pc:docMk/>
+          <pc:sldMk cId="4191342174" sldId="279"/>
+        </pc:sldMkLst>
+      </pc:sldChg>
+      <pc:sldChg chg="delSp modSp del mod modClrScheme chgLayout">
+        <pc:chgData name="James Dyer" userId="c78f284b-7e37-4191-b5a6-8e3806eb7037" providerId="ADAL" clId="{9F1B4838-F5B8-4009-8553-2583D5CDEF26}" dt="2025-03-28T12:37:46.135" v="4417" actId="2696"/>
+        <pc:sldMkLst>
+          <pc:docMk/>
+          <pc:sldMk cId="2686022152" sldId="280"/>
+        </pc:sldMkLst>
+      </pc:sldChg>
+      <pc:sldChg chg="del">
+        <pc:chgData name="James Dyer" userId="c78f284b-7e37-4191-b5a6-8e3806eb7037" providerId="ADAL" clId="{9F1B4838-F5B8-4009-8553-2583D5CDEF26}" dt="2025-03-13T12:12:12.796" v="3061" actId="47"/>
+        <pc:sldMkLst>
+          <pc:docMk/>
+          <pc:sldMk cId="769213268" sldId="281"/>
+        </pc:sldMkLst>
+      </pc:sldChg>
+      <pc:sldChg chg="del">
+        <pc:chgData name="James Dyer" userId="c78f284b-7e37-4191-b5a6-8e3806eb7037" providerId="ADAL" clId="{9F1B4838-F5B8-4009-8553-2583D5CDEF26}" dt="2025-03-13T12:12:12.796" v="3061" actId="47"/>
+        <pc:sldMkLst>
+          <pc:docMk/>
+          <pc:sldMk cId="2971002891" sldId="282"/>
+        </pc:sldMkLst>
+      </pc:sldChg>
+      <pc:sldChg chg="modSp del mod">
+        <pc:chgData name="James Dyer" userId="c78f284b-7e37-4191-b5a6-8e3806eb7037" providerId="ADAL" clId="{9F1B4838-F5B8-4009-8553-2583D5CDEF26}" dt="2025-03-13T12:12:12.796" v="3061" actId="47"/>
+        <pc:sldMkLst>
+          <pc:docMk/>
+          <pc:sldMk cId="3368075927" sldId="283"/>
+        </pc:sldMkLst>
+      </pc:sldChg>
+      <pc:sldChg chg="modSp del mod">
+        <pc:chgData name="James Dyer" userId="c78f284b-7e37-4191-b5a6-8e3806eb7037" providerId="ADAL" clId="{9F1B4838-F5B8-4009-8553-2583D5CDEF26}" dt="2025-03-13T12:12:12.796" v="3061" actId="47"/>
+        <pc:sldMkLst>
+          <pc:docMk/>
+          <pc:sldMk cId="3704461853" sldId="284"/>
+        </pc:sldMkLst>
+      </pc:sldChg>
+      <pc:sldChg chg="del">
+        <pc:chgData name="James Dyer" userId="c78f284b-7e37-4191-b5a6-8e3806eb7037" providerId="ADAL" clId="{9F1B4838-F5B8-4009-8553-2583D5CDEF26}" dt="2025-03-13T12:12:12.796" v="3061" actId="47"/>
+        <pc:sldMkLst>
+          <pc:docMk/>
+          <pc:sldMk cId="3888307331" sldId="285"/>
+        </pc:sldMkLst>
+      </pc:sldChg>
+      <pc:sldChg chg="modSp mod">
+        <pc:chgData name="James Dyer" userId="c78f284b-7e37-4191-b5a6-8e3806eb7037" providerId="ADAL" clId="{9F1B4838-F5B8-4009-8553-2583D5CDEF26}" dt="2025-03-13T12:14:27.601" v="3145" actId="20577"/>
+        <pc:sldMkLst>
+          <pc:docMk/>
+          <pc:sldMk cId="3570547801" sldId="288"/>
+        </pc:sldMkLst>
+      </pc:sldChg>
+      <pc:sldChg chg="modSp mod">
+        <pc:chgData name="James Dyer" userId="c78f284b-7e37-4191-b5a6-8e3806eb7037" providerId="ADAL" clId="{9F1B4838-F5B8-4009-8553-2583D5CDEF26}" dt="2025-03-11T13:55:18.583" v="1043" actId="20577"/>
+        <pc:sldMkLst>
+          <pc:docMk/>
+          <pc:sldMk cId="1666710443" sldId="289"/>
+        </pc:sldMkLst>
+      </pc:sldChg>
+      <pc:sldChg chg="modSp del mod">
+        <pc:chgData name="James Dyer" userId="c78f284b-7e37-4191-b5a6-8e3806eb7037" providerId="ADAL" clId="{9F1B4838-F5B8-4009-8553-2583D5CDEF26}" dt="2025-04-01T12:23:45.491" v="4762" actId="2696"/>
+        <pc:sldMkLst>
+          <pc:docMk/>
+          <pc:sldMk cId="764597875" sldId="291"/>
+        </pc:sldMkLst>
+      </pc:sldChg>
+      <pc:sldChg chg="modSp mod">
+        <pc:chgData name="James Dyer" userId="c78f284b-7e37-4191-b5a6-8e3806eb7037" providerId="ADAL" clId="{9F1B4838-F5B8-4009-8553-2583D5CDEF26}" dt="2025-03-13T12:24:37.489" v="3365" actId="20577"/>
+        <pc:sldMkLst>
+          <pc:docMk/>
+          <pc:sldMk cId="3918256761" sldId="293"/>
+        </pc:sldMkLst>
+      </pc:sldChg>
+      <pc:sldChg chg="modSp mod">
+        <pc:chgData name="James Dyer" userId="c78f284b-7e37-4191-b5a6-8e3806eb7037" providerId="ADAL" clId="{9F1B4838-F5B8-4009-8553-2583D5CDEF26}" dt="2025-03-11T13:42:23.970" v="127" actId="20577"/>
+        <pc:sldMkLst>
+          <pc:docMk/>
+          <pc:sldMk cId="2676814525" sldId="294"/>
+        </pc:sldMkLst>
+      </pc:sldChg>
+      <pc:sldChg chg="modSp mod">
+        <pc:chgData name="James Dyer" userId="c78f284b-7e37-4191-b5a6-8e3806eb7037" providerId="ADAL" clId="{9F1B4838-F5B8-4009-8553-2583D5CDEF26}" dt="2025-03-13T12:24:23.833" v="3358" actId="20577"/>
+        <pc:sldMkLst>
+          <pc:docMk/>
+          <pc:sldMk cId="2243817902" sldId="296"/>
+        </pc:sldMkLst>
+      </pc:sldChg>
+      <pc:sldChg chg="modSp mod">
+        <pc:chgData name="James Dyer" userId="c78f284b-7e37-4191-b5a6-8e3806eb7037" providerId="ADAL" clId="{9F1B4838-F5B8-4009-8553-2583D5CDEF26}" dt="2025-03-13T12:24:14.228" v="3351" actId="20577"/>
+        <pc:sldMkLst>
+          <pc:docMk/>
+          <pc:sldMk cId="389684381" sldId="297"/>
+        </pc:sldMkLst>
+      </pc:sldChg>
+      <pc:sldChg chg="modSp mod">
+        <pc:chgData name="James Dyer" userId="c78f284b-7e37-4191-b5a6-8e3806eb7037" providerId="ADAL" clId="{9F1B4838-F5B8-4009-8553-2583D5CDEF26}" dt="2025-03-11T14:20:37.020" v="2126" actId="20577"/>
+        <pc:sldMkLst>
+          <pc:docMk/>
+          <pc:sldMk cId="222425812" sldId="299"/>
+        </pc:sldMkLst>
+      </pc:sldChg>
+      <pc:sldChg chg="modSp mod">
+        <pc:chgData name="James Dyer" userId="c78f284b-7e37-4191-b5a6-8e3806eb7037" providerId="ADAL" clId="{9F1B4838-F5B8-4009-8553-2583D5CDEF26}" dt="2025-03-13T12:19:36.810" v="3225" actId="20577"/>
+        <pc:sldMkLst>
+          <pc:docMk/>
+          <pc:sldMk cId="3259653556" sldId="301"/>
+        </pc:sldMkLst>
+      </pc:sldChg>
+      <pc:sldChg chg="modSp mod">
+        <pc:chgData name="James Dyer" userId="c78f284b-7e37-4191-b5a6-8e3806eb7037" providerId="ADAL" clId="{9F1B4838-F5B8-4009-8553-2583D5CDEF26}" dt="2025-03-11T14:29:58.006" v="2635" actId="20577"/>
+        <pc:sldMkLst>
+          <pc:docMk/>
+          <pc:sldMk cId="2143019687" sldId="303"/>
+        </pc:sldMkLst>
+      </pc:sldChg>
+      <pc:sldChg chg="modSp mod">
+        <pc:chgData name="James Dyer" userId="c78f284b-7e37-4191-b5a6-8e3806eb7037" providerId="ADAL" clId="{9F1B4838-F5B8-4009-8553-2583D5CDEF26}" dt="2025-03-27T13:36:29.559" v="4011" actId="20577"/>
+        <pc:sldMkLst>
+          <pc:docMk/>
+          <pc:sldMk cId="1894063612" sldId="304"/>
+        </pc:sldMkLst>
+      </pc:sldChg>
+      <pc:sldChg chg="modSp mod">
+        <pc:chgData name="James Dyer" userId="c78f284b-7e37-4191-b5a6-8e3806eb7037" providerId="ADAL" clId="{9F1B4838-F5B8-4009-8553-2583D5CDEF26}" dt="2025-03-13T12:20:52.153" v="3272" actId="20577"/>
+        <pc:sldMkLst>
+          <pc:docMk/>
+          <pc:sldMk cId="2162822551" sldId="305"/>
+        </pc:sldMkLst>
+      </pc:sldChg>
+      <pc:sldChg chg="modSp mod">
+        <pc:chgData name="James Dyer" userId="c78f284b-7e37-4191-b5a6-8e3806eb7037" providerId="ADAL" clId="{9F1B4838-F5B8-4009-8553-2583D5CDEF26}" dt="2025-03-13T12:22:35.473" v="3337" actId="20577"/>
+        <pc:sldMkLst>
+          <pc:docMk/>
+          <pc:sldMk cId="1235335834" sldId="306"/>
+        </pc:sldMkLst>
+      </pc:sldChg>
+      <pc:sldChg chg="modSp mod">
+        <pc:chgData name="James Dyer" userId="c78f284b-7e37-4191-b5a6-8e3806eb7037" providerId="ADAL" clId="{9F1B4838-F5B8-4009-8553-2583D5CDEF26}" dt="2025-03-27T13:54:51.592" v="4408" actId="20577"/>
+        <pc:sldMkLst>
+          <pc:docMk/>
+          <pc:sldMk cId="3899289595" sldId="307"/>
+        </pc:sldMkLst>
+      </pc:sldChg>
+      <pc:sldChg chg="modSp mod">
+        <pc:chgData name="James Dyer" userId="c78f284b-7e37-4191-b5a6-8e3806eb7037" providerId="ADAL" clId="{9F1B4838-F5B8-4009-8553-2583D5CDEF26}" dt="2025-03-13T12:24:03.346" v="3344" actId="20577"/>
+        <pc:sldMkLst>
+          <pc:docMk/>
+          <pc:sldMk cId="516866492" sldId="308"/>
+        </pc:sldMkLst>
+      </pc:sldChg>
+      <pc:sldChg chg="modSp mod">
+        <pc:chgData name="James Dyer" userId="c78f284b-7e37-4191-b5a6-8e3806eb7037" providerId="ADAL" clId="{9F1B4838-F5B8-4009-8553-2583D5CDEF26}" dt="2025-03-27T13:41:08.785" v="4088" actId="20577"/>
+        <pc:sldMkLst>
+          <pc:docMk/>
+          <pc:sldMk cId="912287713" sldId="309"/>
+        </pc:sldMkLst>
+      </pc:sldChg>
+      <pc:sldChg chg="modSp mod">
+        <pc:chgData name="James Dyer" userId="c78f284b-7e37-4191-b5a6-8e3806eb7037" providerId="ADAL" clId="{9F1B4838-F5B8-4009-8553-2583D5CDEF26}" dt="2025-03-27T13:41:31.167" v="4111" actId="20577"/>
+        <pc:sldMkLst>
+          <pc:docMk/>
+          <pc:sldMk cId="332745502" sldId="310"/>
+        </pc:sldMkLst>
+      </pc:sldChg>
+      <pc:sldChg chg="modSp mod">
+        <pc:chgData name="James Dyer" userId="c78f284b-7e37-4191-b5a6-8e3806eb7037" providerId="ADAL" clId="{9F1B4838-F5B8-4009-8553-2583D5CDEF26}" dt="2025-03-27T13:41:49.561" v="4133" actId="20577"/>
+        <pc:sldMkLst>
+          <pc:docMk/>
+          <pc:sldMk cId="3754273850" sldId="311"/>
+        </pc:sldMkLst>
+      </pc:sldChg>
+      <pc:sldChg chg="modSp mod">
+        <pc:chgData name="James Dyer" userId="c78f284b-7e37-4191-b5a6-8e3806eb7037" providerId="ADAL" clId="{9F1B4838-F5B8-4009-8553-2583D5CDEF26}" dt="2025-03-11T14:22:14.824" v="2201" actId="20577"/>
+        <pc:sldMkLst>
+          <pc:docMk/>
+          <pc:sldMk cId="3090130419" sldId="312"/>
+        </pc:sldMkLst>
+      </pc:sldChg>
+      <pc:sldChg chg="modSp mod">
+        <pc:chgData name="James Dyer" userId="c78f284b-7e37-4191-b5a6-8e3806eb7037" providerId="ADAL" clId="{9F1B4838-F5B8-4009-8553-2583D5CDEF26}" dt="2025-03-11T14:23:54.362" v="2270" actId="20577"/>
+        <pc:sldMkLst>
+          <pc:docMk/>
+          <pc:sldMk cId="1329593464" sldId="313"/>
+        </pc:sldMkLst>
+      </pc:sldChg>
+      <pc:sldChg chg="modSp mod">
+        <pc:chgData name="James Dyer" userId="c78f284b-7e37-4191-b5a6-8e3806eb7037" providerId="ADAL" clId="{9F1B4838-F5B8-4009-8553-2583D5CDEF26}" dt="2025-03-27T13:39:44.283" v="4062" actId="20577"/>
+        <pc:sldMkLst>
+          <pc:docMk/>
+          <pc:sldMk cId="576566906" sldId="314"/>
+        </pc:sldMkLst>
+      </pc:sldChg>
+      <pc:sldChg chg="modSp mod">
+        <pc:chgData name="James Dyer" userId="c78f284b-7e37-4191-b5a6-8e3806eb7037" providerId="ADAL" clId="{9F1B4838-F5B8-4009-8553-2583D5CDEF26}" dt="2025-04-01T12:34:13.812" v="5263" actId="20577"/>
+        <pc:sldMkLst>
+          <pc:docMk/>
+          <pc:sldMk cId="683459384" sldId="316"/>
+        </pc:sldMkLst>
+      </pc:sldChg>
+      <pc:sldChg chg="modSp mod">
+        <pc:chgData name="James Dyer" userId="c78f284b-7e37-4191-b5a6-8e3806eb7037" providerId="ADAL" clId="{9F1B4838-F5B8-4009-8553-2583D5CDEF26}" dt="2025-03-27T13:55:14.546" v="4416" actId="20577"/>
+        <pc:sldMkLst>
+          <pc:docMk/>
+          <pc:sldMk cId="1651744765" sldId="317"/>
+        </pc:sldMkLst>
+      </pc:sldChg>
+      <pc:sldChg chg="modSp mod">
+        <pc:chgData name="James Dyer" userId="c78f284b-7e37-4191-b5a6-8e3806eb7037" providerId="ADAL" clId="{9F1B4838-F5B8-4009-8553-2583D5CDEF26}" dt="2025-03-28T12:40:01.600" v="4420" actId="21"/>
+        <pc:sldMkLst>
+          <pc:docMk/>
+          <pc:sldMk cId="2458435575" sldId="339"/>
+        </pc:sldMkLst>
+      </pc:sldChg>
+      <pc:sldChg chg="new del">
+        <pc:chgData name="James Dyer" userId="c78f284b-7e37-4191-b5a6-8e3806eb7037" providerId="ADAL" clId="{9F1B4838-F5B8-4009-8553-2583D5CDEF26}" dt="2025-03-11T13:43:21.727" v="153" actId="47"/>
+        <pc:sldMkLst>
+          <pc:docMk/>
+          <pc:sldMk cId="2189458007" sldId="340"/>
+        </pc:sldMkLst>
+      </pc:sldChg>
+      <pc:sldChg chg="delSp modSp new mod modClrScheme chgLayout">
+        <pc:chgData name="James Dyer" userId="c78f284b-7e37-4191-b5a6-8e3806eb7037" providerId="ADAL" clId="{9F1B4838-F5B8-4009-8553-2583D5CDEF26}" dt="2025-03-27T13:36:22.336" v="4002" actId="20577"/>
+        <pc:sldMkLst>
+          <pc:docMk/>
+          <pc:sldMk cId="3428931588" sldId="340"/>
+        </pc:sldMkLst>
+      </pc:sldChg>
+      <pc:sldChg chg="addSp modSp new mod">
+        <pc:chgData name="James Dyer" userId="c78f284b-7e37-4191-b5a6-8e3806eb7037" providerId="ADAL" clId="{9F1B4838-F5B8-4009-8553-2583D5CDEF26}" dt="2025-04-01T12:25:36.602" v="4883"/>
+        <pc:sldMkLst>
+          <pc:docMk/>
+          <pc:sldMk cId="3326521812" sldId="341"/>
+        </pc:sldMkLst>
+      </pc:sldChg>
+      <pc:sldChg chg="addSp delSp modSp new mod modClrScheme chgLayout">
+        <pc:chgData name="James Dyer" userId="c78f284b-7e37-4191-b5a6-8e3806eb7037" providerId="ADAL" clId="{9F1B4838-F5B8-4009-8553-2583D5CDEF26}" dt="2025-04-01T12:32:28.647" v="5233" actId="20577"/>
+        <pc:sldMkLst>
+          <pc:docMk/>
+          <pc:sldMk cId="3663547034" sldId="342"/>
+        </pc:sldMkLst>
+      </pc:sldChg>
+    </pc:docChg>
+  </pc:docChgLst>
 </pc:chgInfo>
 </file>
 
@@ -1718,7 +1717,7 @@
           <a:p>
             <a:fld id="{F63F5758-9E5B-4149-91B8-267E55E5CF63}" type="datetimeFigureOut">
               <a:rPr lang="en-GB" smtClean="0"/>
-              <a:t>01/09/2025</a:t>
+              <a:t>19/10/2026</a:t>
             </a:fld>
             <a:endParaRPr lang="en-GB" dirty="0"/>
           </a:p>
@@ -1918,7 +1917,7 @@
           <a:p>
             <a:fld id="{F63F5758-9E5B-4149-91B8-267E55E5CF63}" type="datetimeFigureOut">
               <a:rPr lang="en-GB" smtClean="0"/>
-              <a:t>01/09/2025</a:t>
+              <a:t>19/10/2026</a:t>
             </a:fld>
             <a:endParaRPr lang="en-GB" dirty="0"/>
           </a:p>
@@ -2128,7 +2127,7 @@
           <a:p>
             <a:fld id="{F63F5758-9E5B-4149-91B8-267E55E5CF63}" type="datetimeFigureOut">
               <a:rPr lang="en-GB" smtClean="0"/>
-              <a:t>01/09/2025</a:t>
+              <a:t>19/10/2026</a:t>
             </a:fld>
             <a:endParaRPr lang="en-GB" dirty="0"/>
           </a:p>
@@ -2328,7 +2327,7 @@
           <a:p>
             <a:fld id="{F63F5758-9E5B-4149-91B8-267E55E5CF63}" type="datetimeFigureOut">
               <a:rPr lang="en-GB" smtClean="0"/>
-              <a:t>01/09/2025</a:t>
+              <a:t>19/10/2026</a:t>
             </a:fld>
             <a:endParaRPr lang="en-GB" dirty="0"/>
           </a:p>
@@ -2604,7 +2603,7 @@
           <a:p>
             <a:fld id="{F63F5758-9E5B-4149-91B8-267E55E5CF63}" type="datetimeFigureOut">
               <a:rPr lang="en-GB" smtClean="0"/>
-              <a:t>01/09/2025</a:t>
+              <a:t>19/10/2026</a:t>
             </a:fld>
             <a:endParaRPr lang="en-GB" dirty="0"/>
           </a:p>
@@ -2872,7 +2871,7 @@
           <a:p>
             <a:fld id="{F63F5758-9E5B-4149-91B8-267E55E5CF63}" type="datetimeFigureOut">
               <a:rPr lang="en-GB" smtClean="0"/>
-              <a:t>01/09/2025</a:t>
+              <a:t>19/10/2026</a:t>
             </a:fld>
             <a:endParaRPr lang="en-GB" dirty="0"/>
           </a:p>
@@ -3287,7 +3286,7 @@
           <a:p>
             <a:fld id="{F63F5758-9E5B-4149-91B8-267E55E5CF63}" type="datetimeFigureOut">
               <a:rPr lang="en-GB" smtClean="0"/>
-              <a:t>01/09/2025</a:t>
+              <a:t>19/10/2026</a:t>
             </a:fld>
             <a:endParaRPr lang="en-GB" dirty="0"/>
           </a:p>
@@ -3429,7 +3428,7 @@
           <a:p>
             <a:fld id="{F63F5758-9E5B-4149-91B8-267E55E5CF63}" type="datetimeFigureOut">
               <a:rPr lang="en-GB" smtClean="0"/>
-              <a:t>01/09/2025</a:t>
+              <a:t>19/10/2026</a:t>
             </a:fld>
             <a:endParaRPr lang="en-GB" dirty="0"/>
           </a:p>
@@ -3542,7 +3541,7 @@
           <a:p>
             <a:fld id="{F63F5758-9E5B-4149-91B8-267E55E5CF63}" type="datetimeFigureOut">
               <a:rPr lang="en-GB" smtClean="0"/>
-              <a:t>01/09/2025</a:t>
+              <a:t>19/10/2026</a:t>
             </a:fld>
             <a:endParaRPr lang="en-GB" dirty="0"/>
           </a:p>
@@ -3855,7 +3854,7 @@
           <a:p>
             <a:fld id="{F63F5758-9E5B-4149-91B8-267E55E5CF63}" type="datetimeFigureOut">
               <a:rPr lang="en-GB" smtClean="0"/>
-              <a:t>01/09/2025</a:t>
+              <a:t>19/10/2026</a:t>
             </a:fld>
             <a:endParaRPr lang="en-GB" dirty="0"/>
           </a:p>
@@ -4144,7 +4143,7 @@
           <a:p>
             <a:fld id="{F63F5758-9E5B-4149-91B8-267E55E5CF63}" type="datetimeFigureOut">
               <a:rPr lang="en-GB" smtClean="0"/>
-              <a:t>01/09/2025</a:t>
+              <a:t>19/10/2026</a:t>
             </a:fld>
             <a:endParaRPr lang="en-GB" dirty="0"/>
           </a:p>
@@ -4396,7 +4395,7 @@
           <a:p>
             <a:fld id="{F63F5758-9E5B-4149-91B8-267E55E5CF63}" type="datetimeFigureOut">
               <a:rPr lang="en-GB" smtClean="0"/>
-              <a:t>01/09/2025</a:t>
+              <a:t>19/10/2026</a:t>
             </a:fld>
             <a:endParaRPr lang="en-GB" dirty="0"/>
           </a:p>
@@ -4924,135 +4923,6 @@
       </p:grpSpPr>
       <p:sp>
         <p:nvSpPr>
-          <p:cNvPr id="2" name="Title 1">
-            <a:extLst>
-              <a:ext uri="{FF2B5EF4-FFF2-40B4-BE49-F238E27FC236}">
-                <a16:creationId xmlns:a16="http://schemas.microsoft.com/office/drawing/2014/main" id="{671327DD-15A0-595C-B46B-6C1683BCF54E}"/>
-              </a:ext>
-            </a:extLst>
-          </p:cNvPr>
-          <p:cNvSpPr>
-            <a:spLocks noGrp="1"/>
-          </p:cNvSpPr>
-          <p:nvPr>
-            <p:ph type="title"/>
-          </p:nvPr>
-        </p:nvSpPr>
-        <p:spPr/>
-        <p:txBody>
-          <a:bodyPr/>
-          <a:lstStyle/>
-          <a:p>
-            <a:r>
-              <a:rPr lang="en-GB" dirty="0"/>
-              <a:t>Overlapping Groups</a:t>
-            </a:r>
-          </a:p>
-        </p:txBody>
-      </p:sp>
-      <p:sp>
-        <p:nvSpPr>
-          <p:cNvPr id="4" name="Content Placeholder 3">
-            <a:extLst>
-              <a:ext uri="{FF2B5EF4-FFF2-40B4-BE49-F238E27FC236}">
-                <a16:creationId xmlns:a16="http://schemas.microsoft.com/office/drawing/2014/main" id="{DCEB2E48-58F6-A2C4-254A-7FE9A98447CB}"/>
-              </a:ext>
-            </a:extLst>
-          </p:cNvPr>
-          <p:cNvSpPr>
-            <a:spLocks noGrp="1"/>
-          </p:cNvSpPr>
-          <p:nvPr>
-            <p:ph sz="half" idx="1"/>
-          </p:nvPr>
-        </p:nvSpPr>
-        <p:spPr/>
-        <p:txBody>
-          <a:bodyPr/>
-          <a:lstStyle/>
-          <a:p>
-            <a:r>
-              <a:rPr lang="en-GB" dirty="0"/>
-              <a:t>If you have overlapping groups</a:t>
-            </a:r>
-          </a:p>
-          <a:p>
-            <a:r>
-              <a:rPr lang="en-GB" dirty="0"/>
-              <a:t>Find the minimum number of largest groups to cover all 1’s (DNF) or 0’s (CNF)</a:t>
-            </a:r>
-          </a:p>
-        </p:txBody>
-      </p:sp>
-      <p:pic>
-        <p:nvPicPr>
-          <p:cNvPr id="6" name="Content Placeholder 5" descr="Diagram a displays the Karnaugh map for the function, F equals A bar B plus B C bar represented using a two dimensional array comprised of 2 rows and 4 columns with 8 squares. The values corresponding to the rows are 0 and 1 that are labeled, A and the column values corresponding to the combinations 0 0, 0 1, 1 1, and 1 0 are labeled, BC. The squares with a value 1 are as follows. (0, 1 1), (0, 1 0), and (1, 1 0). The adjacent pairs of 1is circled forming an overlapping group. Diagram b displays the Karnaugh map for the function, F equals B C bar D plus A C D represented using a two dimensional array comprised of 4 rows and 4 columns with 16 squares. The row values corresponding to the combinations 0 0, 0 1, 1 1, and 1 0 are labeled, AB and the column values corresponding to the combinations 0 0, 0 1, 1 1, and 1 0 are labeled, CD. The squares with a value 1 are as follows. (0 1, 0 1), (1 1, 0 1), (1 1, 1 1), and (1 0, 1 1). The adjacent pairs of 1is circled forming two overlapping groups." title="Two diagrams illustrate the Karnaugh Maps for overlapping groups. ">
-            <a:extLst>
-              <a:ext uri="{FF2B5EF4-FFF2-40B4-BE49-F238E27FC236}">
-                <a16:creationId xmlns:a16="http://schemas.microsoft.com/office/drawing/2014/main" id="{F8ACB1EE-BBA5-7AC6-3B72-518C596BB02B}"/>
-              </a:ext>
-            </a:extLst>
-          </p:cNvPr>
-          <p:cNvPicPr>
-            <a:picLocks noGrp="1" noChangeAspect="1"/>
-          </p:cNvPicPr>
-          <p:nvPr>
-            <p:ph sz="half" idx="2"/>
-          </p:nvPr>
-        </p:nvPicPr>
-        <p:blipFill rotWithShape="1">
-          <a:blip r:embed="rId2">
-            <a:extLst>
-              <a:ext uri="{28A0092B-C50C-407E-A947-70E740481C1C}">
-                <a14:useLocalDpi xmlns:a14="http://schemas.microsoft.com/office/drawing/2010/main" val="0"/>
-              </a:ext>
-            </a:extLst>
-          </a:blip>
-          <a:srcRect l="29290" t="15687" r="43535" b="41147"/>
-          <a:stretch/>
-        </p:blipFill>
-        <p:spPr>
-          <a:xfrm>
-            <a:off x="7704607" y="1825625"/>
-            <a:ext cx="2116785" cy="4351338"/>
-          </a:xfrm>
-          <a:prstGeom prst="rect">
-            <a:avLst/>
-          </a:prstGeom>
-        </p:spPr>
-      </p:pic>
-    </p:spTree>
-    <p:extLst>
-      <p:ext uri="{BB962C8B-B14F-4D97-AF65-F5344CB8AC3E}">
-        <p14:creationId xmlns:p14="http://schemas.microsoft.com/office/powerpoint/2010/main" val="836119605"/>
-      </p:ext>
-    </p:extLst>
-  </p:cSld>
-  <p:clrMapOvr>
-    <a:masterClrMapping/>
-  </p:clrMapOvr>
-</p:sld>
-</file>
-
-<file path=ppt/slides/slide11.xml><?xml version="1.0" encoding="utf-8"?>
-<p:sld xmlns:a="http://schemas.openxmlformats.org/drawingml/2006/main" xmlns:r="http://schemas.openxmlformats.org/officeDocument/2006/relationships" xmlns:p="http://schemas.openxmlformats.org/presentationml/2006/main">
-  <p:cSld>
-    <p:spTree>
-      <p:nvGrpSpPr>
-        <p:cNvPr id="1" name=""/>
-        <p:cNvGrpSpPr/>
-        <p:nvPr/>
-      </p:nvGrpSpPr>
-      <p:grpSpPr>
-        <a:xfrm>
-          <a:off x="0" y="0"/>
-          <a:ext cx="0" cy="0"/>
-          <a:chOff x="0" y="0"/>
-          <a:chExt cx="0" cy="0"/>
-        </a:xfrm>
-      </p:grpSpPr>
-      <p:sp>
-        <p:nvSpPr>
           <p:cNvPr id="7" name="Title 6">
             <a:extLst>
               <a:ext uri="{FF2B5EF4-FFF2-40B4-BE49-F238E27FC236}">
@@ -6211,7 +6081,7 @@
 </p:sld>
 </file>
 
-<file path=ppt/slides/slide12.xml><?xml version="1.0" encoding="utf-8"?>
+<file path=ppt/slides/slide11.xml><?xml version="1.0" encoding="utf-8"?>
 <p:sld xmlns:a="http://schemas.openxmlformats.org/drawingml/2006/main" xmlns:r="http://schemas.openxmlformats.org/officeDocument/2006/relationships" xmlns:p="http://schemas.openxmlformats.org/presentationml/2006/main">
   <p:cSld>
     <p:spTree>
@@ -6256,8 +6126,8 @@
           </a:p>
         </p:txBody>
       </p:sp>
-      <mc:AlternateContent xmlns:mc="http://schemas.openxmlformats.org/markup-compatibility/2006" xmlns:a14="http://schemas.microsoft.com/office/drawing/2010/main">
-        <mc:Choice Requires="a14">
+      <mc:AlternateContent xmlns:mc="http://schemas.openxmlformats.org/markup-compatibility/2006">
+        <mc:Choice xmlns:a14="http://schemas.microsoft.com/office/drawing/2010/main" Requires="a14">
           <p:sp>
             <p:nvSpPr>
               <p:cNvPr id="8" name="Content Placeholder 7">
@@ -6290,6 +6160,19 @@
                   <a:rPr lang="en-GB" dirty="0"/>
                   <a:t>Circle adjacent or single 1’s </a:t>
                 </a:r>
+                <a:r>
+                  <a:rPr lang="zh-CN" altLang="en-US" dirty="0"/>
+                  <a:t>（圈出相邻或单个</a:t>
+                </a:r>
+                <a:r>
+                  <a:rPr lang="en-US" altLang="zh-CN" dirty="0"/>
+                  <a:t>1 </a:t>
+                </a:r>
+                <a:r>
+                  <a:rPr lang="zh-CN" altLang="en-US" dirty="0"/>
+                  <a:t>）</a:t>
+                </a:r>
+                <a:endParaRPr lang="en-GB" dirty="0"/>
               </a:p>
               <a:p>
                 <a:pPr lvl="1"/>
@@ -6332,7 +6215,7 @@
                 <a:pPr lvl="1"/>
                 <a:r>
                   <a:rPr lang="en-GB" dirty="0"/>
-                  <a:t>While we could circle each of the 1’s, we can create three groups of 2.</a:t>
+                  <a:t>we can create three groups of 2.</a:t>
                 </a:r>
               </a:p>
               <a:p>
@@ -6340,13 +6223,35 @@
                   <a:rPr lang="en-GB" dirty="0"/>
                   <a:t>Blue and orange groups cover all 1’s</a:t>
                 </a:r>
+                <a:r>
+                  <a:rPr lang="zh-CN" altLang="en-US" dirty="0"/>
+                  <a:t>（蓝色和橙色组覆盖所有</a:t>
+                </a:r>
+                <a:r>
+                  <a:rPr lang="en-US" altLang="zh-CN" dirty="0"/>
+                  <a:t>1 </a:t>
+                </a:r>
+                <a:r>
+                  <a:rPr lang="zh-CN" altLang="en-US" dirty="0"/>
+                  <a:t>）</a:t>
+                </a:r>
+                <a:endParaRPr lang="en-GB" dirty="0"/>
               </a:p>
               <a:p>
                 <a:pPr lvl="1"/>
                 <a:r>
                   <a:rPr lang="en-GB" dirty="0"/>
-                  <a:t>The green group overlaps blue and green</a:t>
+                  <a:t>The green group overlaps blue and </a:t>
                 </a:r>
+                <a:r>
+                  <a:rPr lang="en-US" altLang="zh-CN" dirty="0"/>
+                  <a:t>orange</a:t>
+                </a:r>
+                <a:r>
+                  <a:rPr lang="zh-CN" altLang="en-US" dirty="0"/>
+                  <a:t>（绿色组与蓝色和橙色重叠）</a:t>
+                </a:r>
+                <a:endParaRPr lang="en-GB" dirty="0"/>
               </a:p>
               <a:p>
                 <a:pPr lvl="1"/>
@@ -6365,7 +6270,7 @@
             </p:txBody>
           </p:sp>
         </mc:Choice>
-        <mc:Fallback xmlns="">
+        <mc:Fallback>
           <p:sp>
             <p:nvSpPr>
               <p:cNvPr id="8" name="Content Placeholder 7">
@@ -6390,7 +6295,7 @@
               <a:blipFill>
                 <a:blip r:embed="rId2"/>
                 <a:stretch>
-                  <a:fillRect l="-986" t="-4946"/>
+                  <a:fillRect l="-986" t="-5161"/>
                 </a:stretch>
               </a:blipFill>
             </p:spPr>
@@ -6399,7 +6304,7 @@
               <a:lstStyle/>
               <a:p>
                 <a:r>
-                  <a:rPr lang="en-GB">
+                  <a:rPr lang="zh-CN" altLang="en-US">
                     <a:noFill/>
                   </a:rPr>
                   <a:t> </a:t>
@@ -7149,7 +7054,7 @@
 </p:sld>
 </file>
 
-<file path=ppt/slides/slide13.xml><?xml version="1.0" encoding="utf-8"?>
+<file path=ppt/slides/slide12.xml><?xml version="1.0" encoding="utf-8"?>
 <p:sld xmlns:a="http://schemas.openxmlformats.org/drawingml/2006/main" xmlns:r="http://schemas.openxmlformats.org/officeDocument/2006/relationships" xmlns:p="http://schemas.openxmlformats.org/presentationml/2006/main">
   <p:cSld>
     <p:spTree>
@@ -7268,8 +7173,8 @@
           </a:p>
         </p:txBody>
       </p:sp>
-      <mc:AlternateContent xmlns:mc="http://schemas.openxmlformats.org/markup-compatibility/2006" xmlns:a14="http://schemas.microsoft.com/office/drawing/2010/main">
-        <mc:Choice Requires="a14">
+      <mc:AlternateContent xmlns:mc="http://schemas.openxmlformats.org/markup-compatibility/2006">
+        <mc:Choice xmlns:a14="http://schemas.microsoft.com/office/drawing/2010/main" Requires="a14">
           <p:sp>
             <p:nvSpPr>
               <p:cNvPr id="4" name="Content Placeholder 3">
@@ -7534,24 +7439,36 @@
                   <m:oMath xmlns:m="http://schemas.openxmlformats.org/officeDocument/2006/math">
                     <m:r>
                       <a:rPr lang="en-GB" i="1" dirty="0" smtClean="0">
+                        <a:solidFill>
+                          <a:schemeClr val="accent2"/>
+                        </a:solidFill>
                         <a:latin typeface="Cambria Math" panose="02040503050406030204" pitchFamily="18" charset="0"/>
                       </a:rPr>
                       <m:t>¬</m:t>
                     </m:r>
                     <m:r>
                       <a:rPr lang="en-GB" i="1" dirty="0" smtClean="0">
+                        <a:solidFill>
+                          <a:schemeClr val="accent2"/>
+                        </a:solidFill>
                         <a:latin typeface="Cambria Math" panose="02040503050406030204" pitchFamily="18" charset="0"/>
                       </a:rPr>
                       <m:t>𝐴</m:t>
                     </m:r>
                     <m:r>
                       <a:rPr lang="en-GB" i="1" dirty="0" smtClean="0">
+                        <a:solidFill>
+                          <a:schemeClr val="accent2"/>
+                        </a:solidFill>
                         <a:latin typeface="Cambria Math" panose="02040503050406030204" pitchFamily="18" charset="0"/>
                       </a:rPr>
                       <m:t>∧</m:t>
                     </m:r>
                     <m:r>
                       <a:rPr lang="en-GB" i="1" dirty="0" smtClean="0">
+                        <a:solidFill>
+                          <a:schemeClr val="accent2"/>
+                        </a:solidFill>
                         <a:latin typeface="Cambria Math" panose="02040503050406030204" pitchFamily="18" charset="0"/>
                       </a:rPr>
                       <m:t>𝐶</m:t>
@@ -7569,7 +7486,7 @@
             </p:txBody>
           </p:sp>
         </mc:Choice>
-        <mc:Fallback xmlns="">
+        <mc:Fallback>
           <p:sp>
             <p:nvSpPr>
               <p:cNvPr id="4" name="Content Placeholder 3">
@@ -7603,7 +7520,7 @@
               <a:lstStyle/>
               <a:p>
                 <a:r>
-                  <a:rPr lang="en-GB">
+                  <a:rPr lang="zh-CN" altLang="en-US">
                     <a:noFill/>
                   </a:rPr>
                   <a:t> </a:t>
@@ -8078,7 +7995,7 @@
 </p:sld>
 </file>
 
-<file path=ppt/slides/slide14.xml><?xml version="1.0" encoding="utf-8"?>
+<file path=ppt/slides/slide13.xml><?xml version="1.0" encoding="utf-8"?>
 <p:sld xmlns:a="http://schemas.openxmlformats.org/drawingml/2006/main" xmlns:r="http://schemas.openxmlformats.org/officeDocument/2006/relationships" xmlns:p="http://schemas.openxmlformats.org/presentationml/2006/main">
   <p:cSld>
     <p:spTree>
@@ -8123,8 +8040,8 @@
           </a:p>
         </p:txBody>
       </p:sp>
-      <mc:AlternateContent xmlns:mc="http://schemas.openxmlformats.org/markup-compatibility/2006" xmlns:a14="http://schemas.microsoft.com/office/drawing/2010/main">
-        <mc:Choice Requires="a14">
+      <mc:AlternateContent xmlns:mc="http://schemas.openxmlformats.org/markup-compatibility/2006">
+        <mc:Choice xmlns:a14="http://schemas.microsoft.com/office/drawing/2010/main" Requires="a14">
           <p:sp>
             <p:nvSpPr>
               <p:cNvPr id="5" name="Content Placeholder 4">
@@ -8148,20 +8065,36 @@
               <a:p>
                 <a:r>
                   <a:rPr lang="en-GB" dirty="0"/>
-                  <a:t>Remember previous method to determine DNF expression</a:t>
+                  <a:t>Remember previous method to determine DNF</a:t>
+                </a:r>
+                <a:r>
+                  <a:rPr lang="en-US" dirty="0"/>
+                  <a:t>(1+1)</a:t>
+                </a:r>
+                <a:r>
+                  <a:rPr lang="en-GB" dirty="0"/>
+                  <a:t> expression</a:t>
                 </a:r>
               </a:p>
               <a:p>
                 <a:pPr lvl="1"/>
                 <a:r>
-                  <a:rPr lang="en-GB" dirty="0"/>
+                  <a:rPr lang="en-GB" dirty="0">
+                    <a:solidFill>
+                      <a:schemeClr val="accent2"/>
+                    </a:solidFill>
+                  </a:rPr>
                   <a:t>Pick out 1s</a:t>
                 </a:r>
               </a:p>
               <a:p>
                 <a:pPr lvl="1"/>
                 <a:r>
-                  <a:rPr lang="en-GB" dirty="0"/>
+                  <a:rPr lang="en-GB" dirty="0">
+                    <a:solidFill>
+                      <a:schemeClr val="accent2"/>
+                    </a:solidFill>
+                  </a:rPr>
                   <a:t>If variable is 1, the use as is, if 0 then invert</a:t>
                 </a:r>
               </a:p>
@@ -8546,7 +8479,7 @@
             </p:txBody>
           </p:sp>
         </mc:Choice>
-        <mc:Fallback xmlns="">
+        <mc:Fallback>
           <p:sp>
             <p:nvSpPr>
               <p:cNvPr id="5" name="Content Placeholder 4">
@@ -8576,7 +8509,7 @@
               <a:lstStyle/>
               <a:p>
                 <a:r>
-                  <a:rPr lang="en-GB">
+                  <a:rPr lang="zh-CN" altLang="en-US">
                     <a:noFill/>
                   </a:rPr>
                   <a:t> </a:t>
@@ -8599,7 +8532,7 @@
 </p:sld>
 </file>
 
-<file path=ppt/slides/slide15.xml><?xml version="1.0" encoding="utf-8"?>
+<file path=ppt/slides/slide14.xml><?xml version="1.0" encoding="utf-8"?>
 <p:sld xmlns:a="http://schemas.openxmlformats.org/drawingml/2006/main" xmlns:r="http://schemas.openxmlformats.org/officeDocument/2006/relationships" xmlns:p="http://schemas.openxmlformats.org/presentationml/2006/main">
   <p:cSld>
     <p:spTree>
@@ -8644,8 +8577,8 @@
           </a:p>
         </p:txBody>
       </p:sp>
-      <mc:AlternateContent xmlns:mc="http://schemas.openxmlformats.org/markup-compatibility/2006" xmlns:a14="http://schemas.microsoft.com/office/drawing/2010/main">
-        <mc:Choice Requires="a14">
+      <mc:AlternateContent xmlns:mc="http://schemas.openxmlformats.org/markup-compatibility/2006">
+        <mc:Choice xmlns:a14="http://schemas.microsoft.com/office/drawing/2010/main" Requires="a14">
           <p:sp>
             <p:nvSpPr>
               <p:cNvPr id="8" name="Content Placeholder 7">
@@ -8704,18 +8637,27 @@
                         <m:sty m:val="p"/>
                       </m:rPr>
                       <a:rPr lang="en-GB" i="1" dirty="0" smtClean="0">
+                        <a:solidFill>
+                          <a:schemeClr val="accent2"/>
+                        </a:solidFill>
                         <a:latin typeface="Cambria Math" panose="02040503050406030204" pitchFamily="18" charset="0"/>
                       </a:rPr>
                       <m:t>A</m:t>
                     </m:r>
                     <m:r>
                       <a:rPr lang="en-GB" b="0" i="1" smtClean="0">
+                        <a:solidFill>
+                          <a:schemeClr val="accent2"/>
+                        </a:solidFill>
                         <a:latin typeface="Cambria Math" panose="02040503050406030204" pitchFamily="18" charset="0"/>
                       </a:rPr>
                       <m:t>∧</m:t>
                     </m:r>
                     <m:r>
                       <a:rPr lang="en-GB" b="0" i="1" smtClean="0">
+                        <a:solidFill>
+                          <a:schemeClr val="accent2"/>
+                        </a:solidFill>
                         <a:latin typeface="Cambria Math" panose="02040503050406030204" pitchFamily="18" charset="0"/>
                       </a:rPr>
                       <m:t>𝐵</m:t>
@@ -8731,7 +8673,7 @@
             </p:txBody>
           </p:sp>
         </mc:Choice>
-        <mc:Fallback xmlns="">
+        <mc:Fallback>
           <p:sp>
             <p:nvSpPr>
               <p:cNvPr id="8" name="Content Placeholder 7">
@@ -8765,7 +8707,7 @@
               <a:lstStyle/>
               <a:p>
                 <a:r>
-                  <a:rPr lang="en-GB">
+                  <a:rPr lang="zh-CN" altLang="en-US">
                     <a:noFill/>
                   </a:rPr>
                   <a:t> </a:t>
@@ -9241,7 +9183,7 @@
 </p:sld>
 </file>
 
-<file path=ppt/slides/slide16.xml><?xml version="1.0" encoding="utf-8"?>
+<file path=ppt/slides/slide15.xml><?xml version="1.0" encoding="utf-8"?>
 <p:sld xmlns:a="http://schemas.openxmlformats.org/drawingml/2006/main" xmlns:r="http://schemas.openxmlformats.org/officeDocument/2006/relationships" xmlns:p="http://schemas.openxmlformats.org/presentationml/2006/main">
   <p:cSld>
     <p:spTree>
@@ -9286,8 +9228,8 @@
           </a:p>
         </p:txBody>
       </p:sp>
-      <mc:AlternateContent xmlns:mc="http://schemas.openxmlformats.org/markup-compatibility/2006" xmlns:a14="http://schemas.microsoft.com/office/drawing/2010/main">
-        <mc:Choice Requires="a14">
+      <mc:AlternateContent xmlns:mc="http://schemas.openxmlformats.org/markup-compatibility/2006">
+        <mc:Choice xmlns:a14="http://schemas.microsoft.com/office/drawing/2010/main" Requires="a14">
           <p:sp>
             <p:nvSpPr>
               <p:cNvPr id="8" name="Content Placeholder 7">
@@ -9336,6 +9278,9 @@
                         <m:dPr>
                           <m:ctrlPr>
                             <a:rPr lang="en-GB" b="0" i="1" smtClean="0">
+                              <a:solidFill>
+                                <a:schemeClr val="accent2"/>
+                              </a:solidFill>
                               <a:latin typeface="Cambria Math" panose="02040503050406030204" pitchFamily="18" charset="0"/>
                             </a:rPr>
                           </m:ctrlPr>
@@ -9343,24 +9288,36 @@
                         <m:e>
                           <m:r>
                             <a:rPr lang="en-GB" b="0" i="1" smtClean="0">
+                              <a:solidFill>
+                                <a:schemeClr val="accent2"/>
+                              </a:solidFill>
                               <a:latin typeface="Cambria Math" panose="02040503050406030204" pitchFamily="18" charset="0"/>
                             </a:rPr>
                             <m:t>¬</m:t>
                           </m:r>
                           <m:r>
                             <a:rPr lang="en-GB" b="0" i="1" smtClean="0">
+                              <a:solidFill>
+                                <a:schemeClr val="accent2"/>
+                              </a:solidFill>
                               <a:latin typeface="Cambria Math" panose="02040503050406030204" pitchFamily="18" charset="0"/>
                             </a:rPr>
                             <m:t>𝐴</m:t>
                           </m:r>
                           <m:r>
                             <a:rPr lang="en-GB" b="0" i="1" smtClean="0">
+                              <a:solidFill>
+                                <a:schemeClr val="accent2"/>
+                              </a:solidFill>
                               <a:latin typeface="Cambria Math" panose="02040503050406030204" pitchFamily="18" charset="0"/>
                             </a:rPr>
                             <m:t>∧</m:t>
                           </m:r>
                           <m:r>
                             <a:rPr lang="en-GB" b="0" i="1" smtClean="0">
+                              <a:solidFill>
+                                <a:schemeClr val="accent2"/>
+                              </a:solidFill>
                               <a:latin typeface="Cambria Math" panose="02040503050406030204" pitchFamily="18" charset="0"/>
                             </a:rPr>
                             <m:t>𝐶</m:t>
@@ -9369,30 +9326,45 @@
                       </m:d>
                       <m:r>
                         <a:rPr lang="en-GB" b="0" i="1" smtClean="0">
+                          <a:solidFill>
+                            <a:schemeClr val="accent2"/>
+                          </a:solidFill>
                           <a:latin typeface="Cambria Math" panose="02040503050406030204" pitchFamily="18" charset="0"/>
                         </a:rPr>
                         <m:t>∨(</m:t>
                       </m:r>
                       <m:r>
                         <a:rPr lang="en-GB" b="0" i="1" smtClean="0">
+                          <a:solidFill>
+                            <a:schemeClr val="accent2"/>
+                          </a:solidFill>
                           <a:latin typeface="Cambria Math" panose="02040503050406030204" pitchFamily="18" charset="0"/>
                         </a:rPr>
                         <m:t>𝐴</m:t>
                       </m:r>
                       <m:r>
                         <a:rPr lang="en-GB" b="0" i="1" smtClean="0">
+                          <a:solidFill>
+                            <a:schemeClr val="accent2"/>
+                          </a:solidFill>
                           <a:latin typeface="Cambria Math" panose="02040503050406030204" pitchFamily="18" charset="0"/>
                         </a:rPr>
                         <m:t>∧</m:t>
                       </m:r>
                       <m:r>
                         <a:rPr lang="en-GB" b="0" i="1" smtClean="0">
+                          <a:solidFill>
+                            <a:schemeClr val="accent2"/>
+                          </a:solidFill>
                           <a:latin typeface="Cambria Math" panose="02040503050406030204" pitchFamily="18" charset="0"/>
                         </a:rPr>
                         <m:t>𝐵</m:t>
                       </m:r>
                       <m:r>
                         <a:rPr lang="en-GB" b="0" i="1" smtClean="0">
+                          <a:solidFill>
+                            <a:schemeClr val="accent2"/>
+                          </a:solidFill>
                           <a:latin typeface="Cambria Math" panose="02040503050406030204" pitchFamily="18" charset="0"/>
                         </a:rPr>
                         <m:t>)</m:t>
@@ -9400,12 +9372,16 @@
                     </m:oMath>
                   </m:oMathPara>
                 </a14:m>
-                <a:endParaRPr lang="en-GB" dirty="0"/>
+                <a:endParaRPr lang="en-GB" dirty="0">
+                  <a:solidFill>
+                    <a:schemeClr val="accent2"/>
+                  </a:solidFill>
+                </a:endParaRPr>
               </a:p>
             </p:txBody>
           </p:sp>
         </mc:Choice>
-        <mc:Fallback xmlns="">
+        <mc:Fallback>
           <p:sp>
             <p:nvSpPr>
               <p:cNvPr id="8" name="Content Placeholder 7">
@@ -9439,7 +9415,7 @@
               <a:lstStyle/>
               <a:p>
                 <a:r>
-                  <a:rPr lang="en-GB">
+                  <a:rPr lang="zh-CN" altLang="en-US">
                     <a:noFill/>
                   </a:rPr>
                   <a:t> </a:t>
@@ -10018,7 +9994,7 @@
 </p:sld>
 </file>
 
-<file path=ppt/slides/slide17.xml><?xml version="1.0" encoding="utf-8"?>
+<file path=ppt/slides/slide16.xml><?xml version="1.0" encoding="utf-8"?>
 <p:sld xmlns:a="http://schemas.openxmlformats.org/drawingml/2006/main" xmlns:r="http://schemas.openxmlformats.org/officeDocument/2006/relationships" xmlns:p="http://schemas.openxmlformats.org/presentationml/2006/main">
   <p:cSld>
     <p:spTree>
@@ -10942,7 +10918,7 @@
 </p:sld>
 </file>
 
-<file path=ppt/slides/slide18.xml><?xml version="1.0" encoding="utf-8"?>
+<file path=ppt/slides/slide17.xml><?xml version="1.0" encoding="utf-8"?>
 <p:sld xmlns:a="http://schemas.openxmlformats.org/drawingml/2006/main" xmlns:r="http://schemas.openxmlformats.org/officeDocument/2006/relationships" xmlns:p="http://schemas.openxmlformats.org/presentationml/2006/main">
   <p:cSld>
     <p:spTree>
@@ -11054,8 +11030,8 @@
           </a:p>
         </p:txBody>
       </p:sp>
-      <mc:AlternateContent xmlns:mc="http://schemas.openxmlformats.org/markup-compatibility/2006" xmlns:a14="http://schemas.microsoft.com/office/drawing/2010/main">
-        <mc:Choice Requires="a14">
+      <mc:AlternateContent xmlns:mc="http://schemas.openxmlformats.org/markup-compatibility/2006">
+        <mc:Choice xmlns:a14="http://schemas.microsoft.com/office/drawing/2010/main" Requires="a14">
           <p:sp>
             <p:nvSpPr>
               <p:cNvPr id="4" name="Content Placeholder 3">
@@ -11092,24 +11068,36 @@
                   <m:oMath xmlns:m="http://schemas.openxmlformats.org/officeDocument/2006/math">
                     <m:r>
                       <a:rPr lang="en-GB" i="1" dirty="0" smtClean="0">
+                        <a:solidFill>
+                          <a:schemeClr val="accent2"/>
+                        </a:solidFill>
                         <a:latin typeface="Cambria Math" panose="02040503050406030204" pitchFamily="18" charset="0"/>
                       </a:rPr>
                       <m:t>¬</m:t>
                     </m:r>
                     <m:r>
                       <a:rPr lang="en-GB" i="1" dirty="0" smtClean="0">
+                        <a:solidFill>
+                          <a:schemeClr val="accent2"/>
+                        </a:solidFill>
                         <a:latin typeface="Cambria Math" panose="02040503050406030204" pitchFamily="18" charset="0"/>
                       </a:rPr>
                       <m:t>𝐴</m:t>
                     </m:r>
                     <m:r>
                       <a:rPr lang="en-GB" i="1" dirty="0" smtClean="0">
+                        <a:solidFill>
+                          <a:schemeClr val="accent2"/>
+                        </a:solidFill>
                         <a:latin typeface="Cambria Math" panose="02040503050406030204" pitchFamily="18" charset="0"/>
                       </a:rPr>
                       <m:t>∧</m:t>
                     </m:r>
                     <m:r>
                       <a:rPr lang="en-GB" b="0" i="1" dirty="0" smtClean="0">
+                        <a:solidFill>
+                          <a:schemeClr val="accent2"/>
+                        </a:solidFill>
                         <a:latin typeface="Cambria Math" panose="02040503050406030204" pitchFamily="18" charset="0"/>
                       </a:rPr>
                       <m:t>𝐵</m:t>
@@ -11117,7 +11105,11 @@
                   </m:oMath>
                 </a14:m>
                 <a:r>
-                  <a:rPr lang="en-GB" dirty="0"/>
+                  <a:rPr lang="en-GB" dirty="0">
+                    <a:solidFill>
+                      <a:schemeClr val="accent2"/>
+                    </a:solidFill>
+                  </a:rPr>
                   <a:t>.</a:t>
                 </a:r>
               </a:p>
@@ -11127,7 +11119,7 @@
             </p:txBody>
           </p:sp>
         </mc:Choice>
-        <mc:Fallback xmlns="">
+        <mc:Fallback>
           <p:sp>
             <p:nvSpPr>
               <p:cNvPr id="4" name="Content Placeholder 3">
@@ -11161,7 +11153,7 @@
               <a:lstStyle/>
               <a:p>
                 <a:r>
-                  <a:rPr lang="en-GB">
+                  <a:rPr lang="zh-CN" altLang="en-US">
                     <a:noFill/>
                   </a:rPr>
                   <a:t> </a:t>
@@ -11636,7 +11628,7 @@
 </p:sld>
 </file>
 
-<file path=ppt/slides/slide19.xml><?xml version="1.0" encoding="utf-8"?>
+<file path=ppt/slides/slide18.xml><?xml version="1.0" encoding="utf-8"?>
 <p:sld xmlns:a="http://schemas.openxmlformats.org/drawingml/2006/main" xmlns:r="http://schemas.openxmlformats.org/officeDocument/2006/relationships" xmlns:p="http://schemas.openxmlformats.org/presentationml/2006/main">
   <p:cSld>
     <p:spTree>
@@ -11681,8 +11673,8 @@
           </a:p>
         </p:txBody>
       </p:sp>
-      <mc:AlternateContent xmlns:mc="http://schemas.openxmlformats.org/markup-compatibility/2006" xmlns:a14="http://schemas.microsoft.com/office/drawing/2010/main">
-        <mc:Choice Requires="a14">
+      <mc:AlternateContent xmlns:mc="http://schemas.openxmlformats.org/markup-compatibility/2006">
+        <mc:Choice xmlns:a14="http://schemas.microsoft.com/office/drawing/2010/main" Requires="a14">
           <p:sp>
             <p:nvSpPr>
               <p:cNvPr id="8" name="Content Placeholder 7">
@@ -11738,18 +11730,27 @@
                   <m:oMath xmlns:m="http://schemas.openxmlformats.org/officeDocument/2006/math">
                     <m:r>
                       <a:rPr lang="en-GB" i="1" dirty="0" smtClean="0">
+                        <a:solidFill>
+                          <a:schemeClr val="accent2"/>
+                        </a:solidFill>
                         <a:latin typeface="Cambria Math" panose="02040503050406030204" pitchFamily="18" charset="0"/>
                       </a:rPr>
                       <m:t>𝐵</m:t>
                     </m:r>
                     <m:r>
                       <a:rPr lang="en-GB" b="0" i="1" smtClean="0">
+                        <a:solidFill>
+                          <a:schemeClr val="accent2"/>
+                        </a:solidFill>
                         <a:latin typeface="Cambria Math" panose="02040503050406030204" pitchFamily="18" charset="0"/>
                       </a:rPr>
                       <m:t>∧¬</m:t>
                     </m:r>
                     <m:r>
                       <a:rPr lang="en-GB" b="0" i="1" smtClean="0">
+                        <a:solidFill>
+                          <a:schemeClr val="accent2"/>
+                        </a:solidFill>
                         <a:latin typeface="Cambria Math" panose="02040503050406030204" pitchFamily="18" charset="0"/>
                       </a:rPr>
                       <m:t>𝐶</m:t>
@@ -11765,7 +11766,7 @@
             </p:txBody>
           </p:sp>
         </mc:Choice>
-        <mc:Fallback xmlns="">
+        <mc:Fallback>
           <p:sp>
             <p:nvSpPr>
               <p:cNvPr id="8" name="Content Placeholder 7">
@@ -11799,7 +11800,7 @@
               <a:lstStyle/>
               <a:p>
                 <a:r>
-                  <a:rPr lang="en-GB">
+                  <a:rPr lang="zh-CN" altLang="en-US">
                     <a:noFill/>
                   </a:rPr>
                   <a:t> </a:t>
@@ -12275,97 +12276,7 @@
 </p:sld>
 </file>
 
-<file path=ppt/slides/slide2.xml><?xml version="1.0" encoding="utf-8"?>
-<p:sld xmlns:a="http://schemas.openxmlformats.org/drawingml/2006/main" xmlns:r="http://schemas.openxmlformats.org/officeDocument/2006/relationships" xmlns:p="http://schemas.openxmlformats.org/presentationml/2006/main">
-  <p:cSld>
-    <p:spTree>
-      <p:nvGrpSpPr>
-        <p:cNvPr id="1" name=""/>
-        <p:cNvGrpSpPr/>
-        <p:nvPr/>
-      </p:nvGrpSpPr>
-      <p:grpSpPr>
-        <a:xfrm>
-          <a:off x="0" y="0"/>
-          <a:ext cx="0" cy="0"/>
-          <a:chOff x="0" y="0"/>
-          <a:chExt cx="0" cy="0"/>
-        </a:xfrm>
-      </p:grpSpPr>
-      <p:sp>
-        <p:nvSpPr>
-          <p:cNvPr id="2" name="Title 1">
-            <a:extLst>
-              <a:ext uri="{FF2B5EF4-FFF2-40B4-BE49-F238E27FC236}">
-                <a16:creationId xmlns:a16="http://schemas.microsoft.com/office/drawing/2014/main" id="{C42543B4-75DA-E45E-2EEB-0E736989F2CA}"/>
-              </a:ext>
-            </a:extLst>
-          </p:cNvPr>
-          <p:cNvSpPr>
-            <a:spLocks noGrp="1"/>
-          </p:cNvSpPr>
-          <p:nvPr>
-            <p:ph type="title"/>
-          </p:nvPr>
-        </p:nvSpPr>
-        <p:spPr/>
-        <p:txBody>
-          <a:bodyPr/>
-          <a:lstStyle/>
-          <a:p>
-            <a:r>
-              <a:rPr lang="en-GB" dirty="0"/>
-              <a:t>Learning Outcomes</a:t>
-            </a:r>
-          </a:p>
-        </p:txBody>
-      </p:sp>
-      <p:sp>
-        <p:nvSpPr>
-          <p:cNvPr id="3" name="Content Placeholder 2">
-            <a:extLst>
-              <a:ext uri="{FF2B5EF4-FFF2-40B4-BE49-F238E27FC236}">
-                <a16:creationId xmlns:a16="http://schemas.microsoft.com/office/drawing/2014/main" id="{7B52E5B8-D68A-6D26-7EFA-3B06D90333C8}"/>
-              </a:ext>
-            </a:extLst>
-          </p:cNvPr>
-          <p:cNvSpPr>
-            <a:spLocks noGrp="1"/>
-          </p:cNvSpPr>
-          <p:nvPr>
-            <p:ph idx="1"/>
-          </p:nvPr>
-        </p:nvSpPr>
-        <p:spPr/>
-        <p:txBody>
-          <a:bodyPr/>
-          <a:lstStyle/>
-          <a:p>
-            <a:pPr marL="514350" indent="-514350">
-              <a:buFont typeface="+mj-lt"/>
-              <a:buAutoNum type="arabicPeriod"/>
-            </a:pPr>
-            <a:r>
-              <a:rPr lang="en-GB" dirty="0"/>
-              <a:t>Apply minimisation of Boolean expressions to simplify logic circuits</a:t>
-            </a:r>
-          </a:p>
-        </p:txBody>
-      </p:sp>
-    </p:spTree>
-    <p:extLst>
-      <p:ext uri="{BB962C8B-B14F-4D97-AF65-F5344CB8AC3E}">
-        <p14:creationId xmlns:p14="http://schemas.microsoft.com/office/powerpoint/2010/main" val="1890761602"/>
-      </p:ext>
-    </p:extLst>
-  </p:cSld>
-  <p:clrMapOvr>
-    <a:masterClrMapping/>
-  </p:clrMapOvr>
-</p:sld>
-</file>
-
-<file path=ppt/slides/slide20.xml><?xml version="1.0" encoding="utf-8"?>
+<file path=ppt/slides/slide19.xml><?xml version="1.0" encoding="utf-8"?>
 <p:sld xmlns:a="http://schemas.openxmlformats.org/drawingml/2006/main" xmlns:r="http://schemas.openxmlformats.org/officeDocument/2006/relationships" xmlns:p="http://schemas.openxmlformats.org/presentationml/2006/main">
   <p:cSld>
     <p:spTree>
@@ -12410,8 +12321,8 @@
           </a:p>
         </p:txBody>
       </p:sp>
-      <mc:AlternateContent xmlns:mc="http://schemas.openxmlformats.org/markup-compatibility/2006" xmlns:a14="http://schemas.microsoft.com/office/drawing/2010/main">
-        <mc:Choice Requires="a14">
+      <mc:AlternateContent xmlns:mc="http://schemas.openxmlformats.org/markup-compatibility/2006">
+        <mc:Choice xmlns:a14="http://schemas.microsoft.com/office/drawing/2010/main" Requires="a14">
           <p:sp>
             <p:nvSpPr>
               <p:cNvPr id="8" name="Content Placeholder 7">
@@ -12460,6 +12371,9 @@
                         <m:dPr>
                           <m:ctrlPr>
                             <a:rPr lang="en-GB" b="0" i="1" smtClean="0">
+                              <a:solidFill>
+                                <a:schemeClr val="accent2"/>
+                              </a:solidFill>
                               <a:latin typeface="Cambria Math" panose="02040503050406030204" pitchFamily="18" charset="0"/>
                             </a:rPr>
                           </m:ctrlPr>
@@ -12467,24 +12381,36 @@
                         <m:e>
                           <m:r>
                             <a:rPr lang="en-GB" b="0" i="1" smtClean="0">
+                              <a:solidFill>
+                                <a:schemeClr val="accent2"/>
+                              </a:solidFill>
                               <a:latin typeface="Cambria Math" panose="02040503050406030204" pitchFamily="18" charset="0"/>
                             </a:rPr>
                             <m:t>¬</m:t>
                           </m:r>
                           <m:r>
                             <a:rPr lang="en-GB" b="0" i="1" smtClean="0">
+                              <a:solidFill>
+                                <a:schemeClr val="accent2"/>
+                              </a:solidFill>
                               <a:latin typeface="Cambria Math" panose="02040503050406030204" pitchFamily="18" charset="0"/>
                             </a:rPr>
                             <m:t>𝐴</m:t>
                           </m:r>
                           <m:r>
                             <a:rPr lang="en-GB" b="0" i="1" smtClean="0">
+                              <a:solidFill>
+                                <a:schemeClr val="accent2"/>
+                              </a:solidFill>
                               <a:latin typeface="Cambria Math" panose="02040503050406030204" pitchFamily="18" charset="0"/>
                             </a:rPr>
                             <m:t>∧</m:t>
                           </m:r>
                           <m:r>
                             <a:rPr lang="en-GB" b="0" i="1" smtClean="0">
+                              <a:solidFill>
+                                <a:schemeClr val="accent2"/>
+                              </a:solidFill>
                               <a:latin typeface="Cambria Math" panose="02040503050406030204" pitchFamily="18" charset="0"/>
                             </a:rPr>
                             <m:t>𝐵</m:t>
@@ -12493,30 +12419,45 @@
                       </m:d>
                       <m:r>
                         <a:rPr lang="en-GB" b="0" i="1" smtClean="0">
+                          <a:solidFill>
+                            <a:schemeClr val="accent2"/>
+                          </a:solidFill>
                           <a:latin typeface="Cambria Math" panose="02040503050406030204" pitchFamily="18" charset="0"/>
                         </a:rPr>
                         <m:t>∨(</m:t>
                       </m:r>
                       <m:r>
                         <a:rPr lang="en-GB" b="0" i="1" smtClean="0">
+                          <a:solidFill>
+                            <a:schemeClr val="accent2"/>
+                          </a:solidFill>
                           <a:latin typeface="Cambria Math" panose="02040503050406030204" pitchFamily="18" charset="0"/>
                         </a:rPr>
                         <m:t>𝐵</m:t>
                       </m:r>
                       <m:r>
                         <a:rPr lang="en-GB" b="0" i="1" smtClean="0">
+                          <a:solidFill>
+                            <a:schemeClr val="accent2"/>
+                          </a:solidFill>
                           <a:latin typeface="Cambria Math" panose="02040503050406030204" pitchFamily="18" charset="0"/>
                         </a:rPr>
                         <m:t>∧¬</m:t>
                       </m:r>
                       <m:r>
                         <a:rPr lang="en-GB" b="0" i="1" smtClean="0">
+                          <a:solidFill>
+                            <a:schemeClr val="accent2"/>
+                          </a:solidFill>
                           <a:latin typeface="Cambria Math" panose="02040503050406030204" pitchFamily="18" charset="0"/>
                         </a:rPr>
                         <m:t>𝐶</m:t>
                       </m:r>
                       <m:r>
                         <a:rPr lang="en-GB" b="0" i="1" smtClean="0">
+                          <a:solidFill>
+                            <a:schemeClr val="accent2"/>
+                          </a:solidFill>
                           <a:latin typeface="Cambria Math" panose="02040503050406030204" pitchFamily="18" charset="0"/>
                         </a:rPr>
                         <m:t>)</m:t>
@@ -12524,12 +12465,16 @@
                     </m:oMath>
                   </m:oMathPara>
                 </a14:m>
-                <a:endParaRPr lang="en-GB" dirty="0"/>
+                <a:endParaRPr lang="en-GB" dirty="0">
+                  <a:solidFill>
+                    <a:schemeClr val="accent2"/>
+                  </a:solidFill>
+                </a:endParaRPr>
               </a:p>
             </p:txBody>
           </p:sp>
         </mc:Choice>
-        <mc:Fallback xmlns="">
+        <mc:Fallback>
           <p:sp>
             <p:nvSpPr>
               <p:cNvPr id="8" name="Content Placeholder 7">
@@ -12563,7 +12508,7 @@
               <a:lstStyle/>
               <a:p>
                 <a:r>
-                  <a:rPr lang="en-GB">
+                  <a:rPr lang="zh-CN" altLang="en-US">
                     <a:noFill/>
                   </a:rPr>
                   <a:t> </a:t>
@@ -13091,7 +13036,97 @@
 </p:sld>
 </file>
 
-<file path=ppt/slides/slide21.xml><?xml version="1.0" encoding="utf-8"?>
+<file path=ppt/slides/slide2.xml><?xml version="1.0" encoding="utf-8"?>
+<p:sld xmlns:a="http://schemas.openxmlformats.org/drawingml/2006/main" xmlns:r="http://schemas.openxmlformats.org/officeDocument/2006/relationships" xmlns:p="http://schemas.openxmlformats.org/presentationml/2006/main">
+  <p:cSld>
+    <p:spTree>
+      <p:nvGrpSpPr>
+        <p:cNvPr id="1" name=""/>
+        <p:cNvGrpSpPr/>
+        <p:nvPr/>
+      </p:nvGrpSpPr>
+      <p:grpSpPr>
+        <a:xfrm>
+          <a:off x="0" y="0"/>
+          <a:ext cx="0" cy="0"/>
+          <a:chOff x="0" y="0"/>
+          <a:chExt cx="0" cy="0"/>
+        </a:xfrm>
+      </p:grpSpPr>
+      <p:sp>
+        <p:nvSpPr>
+          <p:cNvPr id="2" name="Title 1">
+            <a:extLst>
+              <a:ext uri="{FF2B5EF4-FFF2-40B4-BE49-F238E27FC236}">
+                <a16:creationId xmlns:a16="http://schemas.microsoft.com/office/drawing/2014/main" id="{C42543B4-75DA-E45E-2EEB-0E736989F2CA}"/>
+              </a:ext>
+            </a:extLst>
+          </p:cNvPr>
+          <p:cNvSpPr>
+            <a:spLocks noGrp="1"/>
+          </p:cNvSpPr>
+          <p:nvPr>
+            <p:ph type="title"/>
+          </p:nvPr>
+        </p:nvSpPr>
+        <p:spPr/>
+        <p:txBody>
+          <a:bodyPr/>
+          <a:lstStyle/>
+          <a:p>
+            <a:r>
+              <a:rPr lang="en-GB" dirty="0"/>
+              <a:t>Learning Outcomes</a:t>
+            </a:r>
+          </a:p>
+        </p:txBody>
+      </p:sp>
+      <p:sp>
+        <p:nvSpPr>
+          <p:cNvPr id="3" name="Content Placeholder 2">
+            <a:extLst>
+              <a:ext uri="{FF2B5EF4-FFF2-40B4-BE49-F238E27FC236}">
+                <a16:creationId xmlns:a16="http://schemas.microsoft.com/office/drawing/2014/main" id="{7B52E5B8-D68A-6D26-7EFA-3B06D90333C8}"/>
+              </a:ext>
+            </a:extLst>
+          </p:cNvPr>
+          <p:cNvSpPr>
+            <a:spLocks noGrp="1"/>
+          </p:cNvSpPr>
+          <p:nvPr>
+            <p:ph idx="1"/>
+          </p:nvPr>
+        </p:nvSpPr>
+        <p:spPr/>
+        <p:txBody>
+          <a:bodyPr/>
+          <a:lstStyle/>
+          <a:p>
+            <a:pPr marL="514350" indent="-514350">
+              <a:buFont typeface="+mj-lt"/>
+              <a:buAutoNum type="arabicPeriod"/>
+            </a:pPr>
+            <a:r>
+              <a:rPr lang="en-GB" dirty="0"/>
+              <a:t>Apply minimisation of Boolean expressions to simplify logic circuits</a:t>
+            </a:r>
+          </a:p>
+        </p:txBody>
+      </p:sp>
+    </p:spTree>
+    <p:extLst>
+      <p:ext uri="{BB962C8B-B14F-4D97-AF65-F5344CB8AC3E}">
+        <p14:creationId xmlns:p14="http://schemas.microsoft.com/office/powerpoint/2010/main" val="1890761602"/>
+      </p:ext>
+    </p:extLst>
+  </p:cSld>
+  <p:clrMapOvr>
+    <a:masterClrMapping/>
+  </p:clrMapOvr>
+</p:sld>
+</file>
+
+<file path=ppt/slides/slide20.xml><?xml version="1.0" encoding="utf-8"?>
 <p:sld xmlns:a="http://schemas.openxmlformats.org/drawingml/2006/main" xmlns:r="http://schemas.openxmlformats.org/officeDocument/2006/relationships" xmlns:p="http://schemas.openxmlformats.org/presentationml/2006/main">
   <p:cSld>
     <p:spTree>
@@ -13124,14 +13159,29 @@
             <p:ph type="title"/>
           </p:nvPr>
         </p:nvSpPr>
-        <p:spPr/>
+        <p:spPr>
+          <a:xfrm>
+            <a:off x="151002" y="365125"/>
+            <a:ext cx="11202798" cy="1325563"/>
+          </a:xfrm>
+        </p:spPr>
         <p:txBody>
-          <a:bodyPr/>
+          <a:bodyPr>
+            <a:normAutofit fontScale="90000"/>
+          </a:bodyPr>
           <a:lstStyle/>
           <a:p>
             <a:r>
               <a:rPr lang="en-GB" dirty="0"/>
-              <a:t>Why can we use the overlapping one twice in minimisation?</a:t>
+              <a:t>Why can we use the overlapping one twice in minimisation?(</a:t>
+            </a:r>
+            <a:r>
+              <a:rPr lang="zh-CN" altLang="en-US" dirty="0"/>
+              <a:t>为什么可使用两次重叠来最小化？</a:t>
+            </a:r>
+            <a:r>
+              <a:rPr lang="en-GB" dirty="0"/>
+              <a:t>)</a:t>
             </a:r>
           </a:p>
         </p:txBody>
@@ -13841,7 +13891,7 @@
 </p:sld>
 </file>
 
-<file path=ppt/slides/slide22.xml><?xml version="1.0" encoding="utf-8"?>
+<file path=ppt/slides/slide21.xml><?xml version="1.0" encoding="utf-8"?>
 <p:sld xmlns:a="http://schemas.openxmlformats.org/drawingml/2006/main" xmlns:r="http://schemas.openxmlformats.org/officeDocument/2006/relationships" xmlns:p="http://schemas.openxmlformats.org/presentationml/2006/main">
   <p:cSld>
     <p:spTree>
@@ -14626,7 +14676,7 @@
 </p:sld>
 </file>
 
-<file path=ppt/slides/slide23.xml><?xml version="1.0" encoding="utf-8"?>
+<file path=ppt/slides/slide22.xml><?xml version="1.0" encoding="utf-8"?>
 <p:sld xmlns:a="http://schemas.openxmlformats.org/drawingml/2006/main" xmlns:r="http://schemas.openxmlformats.org/officeDocument/2006/relationships" xmlns:p="http://schemas.openxmlformats.org/presentationml/2006/main">
   <p:cSld>
     <p:spTree>
@@ -15812,7 +15862,7 @@
 </p:sld>
 </file>
 
-<file path=ppt/slides/slide24.xml><?xml version="1.0" encoding="utf-8"?>
+<file path=ppt/slides/slide23.xml><?xml version="1.0" encoding="utf-8"?>
 <p:sld xmlns:a="http://schemas.openxmlformats.org/drawingml/2006/main" xmlns:r="http://schemas.openxmlformats.org/officeDocument/2006/relationships" xmlns:p="http://schemas.openxmlformats.org/presentationml/2006/main">
   <p:cSld>
     <p:spTree>
@@ -15857,8 +15907,8 @@
           </a:p>
         </p:txBody>
       </p:sp>
-      <mc:AlternateContent xmlns:mc="http://schemas.openxmlformats.org/markup-compatibility/2006" xmlns:a14="http://schemas.microsoft.com/office/drawing/2010/main">
-        <mc:Choice Requires="a14">
+      <mc:AlternateContent xmlns:mc="http://schemas.openxmlformats.org/markup-compatibility/2006">
+        <mc:Choice xmlns:a14="http://schemas.microsoft.com/office/drawing/2010/main" Requires="a14">
           <p:sp>
             <p:nvSpPr>
               <p:cNvPr id="3" name="Content Placeholder 2">
@@ -15914,30 +15964,45 @@
                   <m:oMath xmlns:m="http://schemas.openxmlformats.org/officeDocument/2006/math">
                     <m:r>
                       <a:rPr lang="en-GB" b="0" i="1" smtClean="0">
+                        <a:solidFill>
+                          <a:schemeClr val="accent2"/>
+                        </a:solidFill>
                         <a:latin typeface="Cambria Math" panose="02040503050406030204" pitchFamily="18" charset="0"/>
                       </a:rPr>
                       <m:t>𝐴</m:t>
                     </m:r>
                     <m:r>
                       <a:rPr lang="en-GB" b="0" i="1" smtClean="0">
+                        <a:solidFill>
+                          <a:schemeClr val="accent2"/>
+                        </a:solidFill>
                         <a:latin typeface="Cambria Math" panose="02040503050406030204" pitchFamily="18" charset="0"/>
                       </a:rPr>
                       <m:t>∧</m:t>
                     </m:r>
                     <m:r>
                       <a:rPr lang="en-GB" b="0" i="1" smtClean="0">
+                        <a:solidFill>
+                          <a:schemeClr val="accent2"/>
+                        </a:solidFill>
                         <a:latin typeface="Cambria Math" panose="02040503050406030204" pitchFamily="18" charset="0"/>
                       </a:rPr>
                       <m:t>𝐵</m:t>
                     </m:r>
                     <m:r>
                       <a:rPr lang="en-GB" b="0" i="1" smtClean="0">
+                        <a:solidFill>
+                          <a:schemeClr val="accent2"/>
+                        </a:solidFill>
                         <a:latin typeface="Cambria Math" panose="02040503050406030204" pitchFamily="18" charset="0"/>
                       </a:rPr>
                       <m:t>∧¬</m:t>
                     </m:r>
                     <m:r>
                       <a:rPr lang="en-GB" b="0" i="1" smtClean="0">
+                        <a:solidFill>
+                          <a:schemeClr val="accent2"/>
+                        </a:solidFill>
                         <a:latin typeface="Cambria Math" panose="02040503050406030204" pitchFamily="18" charset="0"/>
                       </a:rPr>
                       <m:t>𝐷</m:t>
@@ -15949,7 +16014,7 @@
             </p:txBody>
           </p:sp>
         </mc:Choice>
-        <mc:Fallback xmlns="">
+        <mc:Fallback>
           <p:sp>
             <p:nvSpPr>
               <p:cNvPr id="3" name="Content Placeholder 2">
@@ -15983,7 +16048,7 @@
               <a:lstStyle/>
               <a:p>
                 <a:r>
-                  <a:rPr lang="en-GB">
+                  <a:rPr lang="zh-CN" altLang="en-US">
                     <a:noFill/>
                   </a:rPr>
                   <a:t> </a:t>
@@ -16891,7 +16956,7 @@
 </p:sld>
 </file>
 
-<file path=ppt/slides/slide25.xml><?xml version="1.0" encoding="utf-8"?>
+<file path=ppt/slides/slide24.xml><?xml version="1.0" encoding="utf-8"?>
 <p:sld xmlns:a="http://schemas.openxmlformats.org/drawingml/2006/main" xmlns:r="http://schemas.openxmlformats.org/officeDocument/2006/relationships" xmlns:p="http://schemas.openxmlformats.org/presentationml/2006/main">
   <p:cSld>
     <p:spTree>
@@ -16985,7 +17050,15 @@
             <a:pPr lvl="1"/>
             <a:r>
               <a:rPr lang="en-GB" dirty="0"/>
-              <a:t>C=1, so term is C</a:t>
+              <a:t>C=1, so term is </a:t>
+            </a:r>
+            <a:r>
+              <a:rPr lang="en-GB" dirty="0">
+                <a:solidFill>
+                  <a:schemeClr val="accent2"/>
+                </a:solidFill>
+              </a:rPr>
+              <a:t>C</a:t>
             </a:r>
           </a:p>
         </p:txBody>
@@ -17842,7 +17915,7 @@
 </p:sld>
 </file>
 
-<file path=ppt/slides/slide26.xml><?xml version="1.0" encoding="utf-8"?>
+<file path=ppt/slides/slide25.xml><?xml version="1.0" encoding="utf-8"?>
 <p:sld xmlns:a="http://schemas.openxmlformats.org/drawingml/2006/main" xmlns:r="http://schemas.openxmlformats.org/officeDocument/2006/relationships" xmlns:p="http://schemas.openxmlformats.org/presentationml/2006/main">
   <p:cSld>
     <p:spTree>
@@ -17887,8 +17960,8 @@
           </a:p>
         </p:txBody>
       </p:sp>
-      <mc:AlternateContent xmlns:mc="http://schemas.openxmlformats.org/markup-compatibility/2006" xmlns:a14="http://schemas.microsoft.com/office/drawing/2010/main">
-        <mc:Choice Requires="a14">
+      <mc:AlternateContent xmlns:mc="http://schemas.openxmlformats.org/markup-compatibility/2006">
+        <mc:Choice xmlns:a14="http://schemas.microsoft.com/office/drawing/2010/main" Requires="a14">
           <p:sp>
             <p:nvSpPr>
               <p:cNvPr id="3" name="Content Placeholder 2">
@@ -17934,6 +18007,9 @@
                         <m:dPr>
                           <m:ctrlPr>
                             <a:rPr lang="en-GB" b="0" i="1" smtClean="0">
+                              <a:solidFill>
+                                <a:schemeClr val="accent2"/>
+                              </a:solidFill>
                               <a:latin typeface="Cambria Math" panose="02040503050406030204" pitchFamily="18" charset="0"/>
                             </a:rPr>
                           </m:ctrlPr>
@@ -17941,30 +18017,45 @@
                         <m:e>
                           <m:r>
                             <a:rPr lang="en-GB" i="1">
+                              <a:solidFill>
+                                <a:schemeClr val="accent2"/>
+                              </a:solidFill>
                               <a:latin typeface="Cambria Math" panose="02040503050406030204" pitchFamily="18" charset="0"/>
                             </a:rPr>
                             <m:t>𝐴</m:t>
                           </m:r>
                           <m:r>
                             <a:rPr lang="en-GB" i="1">
+                              <a:solidFill>
+                                <a:schemeClr val="accent2"/>
+                              </a:solidFill>
                               <a:latin typeface="Cambria Math" panose="02040503050406030204" pitchFamily="18" charset="0"/>
                             </a:rPr>
                             <m:t>∧</m:t>
                           </m:r>
                           <m:r>
                             <a:rPr lang="en-GB" i="1">
+                              <a:solidFill>
+                                <a:schemeClr val="accent2"/>
+                              </a:solidFill>
                               <a:latin typeface="Cambria Math" panose="02040503050406030204" pitchFamily="18" charset="0"/>
                             </a:rPr>
                             <m:t>𝐵</m:t>
                           </m:r>
                           <m:r>
                             <a:rPr lang="en-GB" i="1">
+                              <a:solidFill>
+                                <a:schemeClr val="accent2"/>
+                              </a:solidFill>
                               <a:latin typeface="Cambria Math" panose="02040503050406030204" pitchFamily="18" charset="0"/>
                             </a:rPr>
                             <m:t>∧¬</m:t>
                           </m:r>
                           <m:r>
                             <a:rPr lang="en-GB" i="1">
+                              <a:solidFill>
+                                <a:schemeClr val="accent2"/>
+                              </a:solidFill>
                               <a:latin typeface="Cambria Math" panose="02040503050406030204" pitchFamily="18" charset="0"/>
                             </a:rPr>
                             <m:t>𝐷</m:t>
@@ -17973,12 +18064,18 @@
                       </m:d>
                       <m:r>
                         <a:rPr lang="en-GB" b="0" i="1" smtClean="0">
+                          <a:solidFill>
+                            <a:schemeClr val="accent2"/>
+                          </a:solidFill>
                           <a:latin typeface="Cambria Math" panose="02040503050406030204" pitchFamily="18" charset="0"/>
                         </a:rPr>
                         <m:t>∨</m:t>
                       </m:r>
                       <m:r>
                         <a:rPr lang="en-GB" b="0" i="1" smtClean="0">
+                          <a:solidFill>
+                            <a:schemeClr val="accent2"/>
+                          </a:solidFill>
                           <a:latin typeface="Cambria Math" panose="02040503050406030204" pitchFamily="18" charset="0"/>
                         </a:rPr>
                         <m:t>𝐶</m:t>
@@ -17986,12 +18083,16 @@
                     </m:oMath>
                   </m:oMathPara>
                 </a14:m>
-                <a:endParaRPr lang="en-GB" b="0" dirty="0"/>
+                <a:endParaRPr lang="en-GB" b="0" dirty="0">
+                  <a:solidFill>
+                    <a:schemeClr val="accent2"/>
+                  </a:solidFill>
+                </a:endParaRPr>
               </a:p>
             </p:txBody>
           </p:sp>
         </mc:Choice>
-        <mc:Fallback xmlns="">
+        <mc:Fallback>
           <p:sp>
             <p:nvSpPr>
               <p:cNvPr id="3" name="Content Placeholder 2">
@@ -18025,7 +18126,7 @@
               <a:lstStyle/>
               <a:p>
                 <a:r>
-                  <a:rPr lang="en-GB">
+                  <a:rPr lang="zh-CN" altLang="en-US">
                     <a:noFill/>
                   </a:rPr>
                   <a:t> </a:t>
@@ -18985,7 +19086,7 @@
 </p:sld>
 </file>
 
-<file path=ppt/slides/slide27.xml><?xml version="1.0" encoding="utf-8"?>
+<file path=ppt/slides/slide26.xml><?xml version="1.0" encoding="utf-8"?>
 <p:sld xmlns:a="http://schemas.openxmlformats.org/drawingml/2006/main" xmlns:r="http://schemas.openxmlformats.org/officeDocument/2006/relationships" xmlns:p="http://schemas.openxmlformats.org/presentationml/2006/main">
   <p:cSld>
     <p:spTree>
@@ -20378,7 +20479,7 @@
 </p:sld>
 </file>
 
-<file path=ppt/slides/slide28.xml><?xml version="1.0" encoding="utf-8"?>
+<file path=ppt/slides/slide27.xml><?xml version="1.0" encoding="utf-8"?>
 <p:sld xmlns:a="http://schemas.openxmlformats.org/drawingml/2006/main" xmlns:r="http://schemas.openxmlformats.org/officeDocument/2006/relationships" xmlns:p="http://schemas.openxmlformats.org/presentationml/2006/main">
   <p:cSld>
     <p:spTree>
@@ -20418,13 +20519,29 @@
           <a:p>
             <a:r>
               <a:rPr lang="en-GB" dirty="0"/>
-              <a:t>Minimising Using Karnaugh Maps (CNF)</a:t>
+              <a:t>Minimising Using Karnaugh Maps (CNF </a:t>
+            </a:r>
+            <a:r>
+              <a:rPr lang="en-US" dirty="0"/>
+              <a:t>0</a:t>
+            </a:r>
+            <a:r>
+              <a:rPr lang="zh-CN" altLang="en-US" dirty="0"/>
+              <a:t>*</a:t>
+            </a:r>
+            <a:r>
+              <a:rPr lang="en-US" altLang="zh-CN" dirty="0"/>
+              <a:t>0</a:t>
+            </a:r>
+            <a:r>
+              <a:rPr lang="en-GB" dirty="0"/>
+              <a:t>)</a:t>
             </a:r>
           </a:p>
         </p:txBody>
       </p:sp>
-      <mc:AlternateContent xmlns:mc="http://schemas.openxmlformats.org/markup-compatibility/2006" xmlns:a14="http://schemas.microsoft.com/office/drawing/2010/main">
-        <mc:Choice Requires="a14">
+      <mc:AlternateContent xmlns:mc="http://schemas.openxmlformats.org/markup-compatibility/2006">
+        <mc:Choice xmlns:a14="http://schemas.microsoft.com/office/drawing/2010/main" Requires="a14">
           <p:sp>
             <p:nvSpPr>
               <p:cNvPr id="3" name="Content Placeholder 2">
@@ -20450,7 +20567,19 @@
               <a:p>
                 <a:r>
                   <a:rPr lang="en-GB" dirty="0"/>
-                  <a:t>Look for adjacent or single 0’s in map</a:t>
+                  <a:t>Look for </a:t>
+                </a:r>
+                <a:r>
+                  <a:rPr lang="en-GB" dirty="0">
+                    <a:solidFill>
+                      <a:schemeClr val="accent2"/>
+                    </a:solidFill>
+                  </a:rPr>
+                  <a:t>adjacent or single 0’s </a:t>
+                </a:r>
+                <a:r>
+                  <a:rPr lang="en-GB" dirty="0"/>
+                  <a:t>in map</a:t>
                 </a:r>
               </a:p>
               <a:p>
@@ -20483,7 +20612,15 @@
               <a:p>
                 <a:r>
                   <a:rPr lang="en-GB" dirty="0"/>
-                  <a:t>For remaining inputs provide an OR term which evaluates to 0</a:t>
+                  <a:t>For remaining </a:t>
+                </a:r>
+                <a:r>
+                  <a:rPr lang="en-GB" dirty="0">
+                    <a:solidFill>
+                      <a:schemeClr val="accent2"/>
+                    </a:solidFill>
+                  </a:rPr>
+                  <a:t>inputs provide an OR term which evaluates to 0</a:t>
                 </a:r>
               </a:p>
               <a:p>
@@ -20650,7 +20787,19 @@
               <a:p>
                 <a:r>
                   <a:rPr lang="en-GB" dirty="0"/>
-                  <a:t>Terms are joined together by AND.</a:t>
+                  <a:t>Terms are </a:t>
+                </a:r>
+                <a:r>
+                  <a:rPr lang="en-GB" dirty="0">
+                    <a:solidFill>
+                      <a:schemeClr val="accent2"/>
+                    </a:solidFill>
+                  </a:rPr>
+                  <a:t>joined together by AND</a:t>
+                </a:r>
+                <a:r>
+                  <a:rPr lang="en-GB" dirty="0"/>
+                  <a:t>.</a:t>
                 </a:r>
               </a:p>
               <a:p>
@@ -20874,7 +21023,7 @@
             </p:txBody>
           </p:sp>
         </mc:Choice>
-        <mc:Fallback xmlns="">
+        <mc:Fallback>
           <p:sp>
             <p:nvSpPr>
               <p:cNvPr id="3" name="Content Placeholder 2">
@@ -20904,7 +21053,7 @@
               <a:lstStyle/>
               <a:p>
                 <a:r>
-                  <a:rPr lang="en-GB">
+                  <a:rPr lang="zh-CN" altLang="en-US">
                     <a:noFill/>
                   </a:rPr>
                   <a:t> </a:t>
@@ -20927,7 +21076,7 @@
 </p:sld>
 </file>
 
-<file path=ppt/slides/slide29.xml><?xml version="1.0" encoding="utf-8"?>
+<file path=ppt/slides/slide28.xml><?xml version="1.0" encoding="utf-8"?>
 <p:sld xmlns:a="http://schemas.openxmlformats.org/drawingml/2006/main" xmlns:r="http://schemas.openxmlformats.org/officeDocument/2006/relationships" xmlns:p="http://schemas.openxmlformats.org/presentationml/2006/main">
   <p:cSld>
     <p:spTree>
@@ -21834,117 +21983,7 @@
 </p:sld>
 </file>
 
-<file path=ppt/slides/slide3.xml><?xml version="1.0" encoding="utf-8"?>
-<p:sld xmlns:a="http://schemas.openxmlformats.org/drawingml/2006/main" xmlns:r="http://schemas.openxmlformats.org/officeDocument/2006/relationships" xmlns:p="http://schemas.openxmlformats.org/presentationml/2006/main">
-  <p:cSld>
-    <p:spTree>
-      <p:nvGrpSpPr>
-        <p:cNvPr id="1" name=""/>
-        <p:cNvGrpSpPr/>
-        <p:nvPr/>
-      </p:nvGrpSpPr>
-      <p:grpSpPr>
-        <a:xfrm>
-          <a:off x="0" y="0"/>
-          <a:ext cx="0" cy="0"/>
-          <a:chOff x="0" y="0"/>
-          <a:chExt cx="0" cy="0"/>
-        </a:xfrm>
-      </p:grpSpPr>
-      <p:sp>
-        <p:nvSpPr>
-          <p:cNvPr id="2" name="Title 1">
-            <a:extLst>
-              <a:ext uri="{FF2B5EF4-FFF2-40B4-BE49-F238E27FC236}">
-                <a16:creationId xmlns:a16="http://schemas.microsoft.com/office/drawing/2014/main" id="{70921253-F723-4782-FA6E-E4EFCFD9AC61}"/>
-              </a:ext>
-            </a:extLst>
-          </p:cNvPr>
-          <p:cNvSpPr>
-            <a:spLocks noGrp="1"/>
-          </p:cNvSpPr>
-          <p:nvPr>
-            <p:ph type="title"/>
-          </p:nvPr>
-        </p:nvSpPr>
-        <p:spPr/>
-        <p:txBody>
-          <a:bodyPr/>
-          <a:lstStyle/>
-          <a:p>
-            <a:r>
-              <a:rPr lang="en-GB" dirty="0"/>
-              <a:t>Text Book</a:t>
-            </a:r>
-          </a:p>
-        </p:txBody>
-      </p:sp>
-      <p:sp>
-        <p:nvSpPr>
-          <p:cNvPr id="3" name="Content Placeholder 2">
-            <a:extLst>
-              <a:ext uri="{FF2B5EF4-FFF2-40B4-BE49-F238E27FC236}">
-                <a16:creationId xmlns:a16="http://schemas.microsoft.com/office/drawing/2014/main" id="{330ABFD0-C792-9EF3-3BED-4AA7BDB2C595}"/>
-              </a:ext>
-            </a:extLst>
-          </p:cNvPr>
-          <p:cNvSpPr>
-            <a:spLocks noGrp="1"/>
-          </p:cNvSpPr>
-          <p:nvPr>
-            <p:ph idx="1"/>
-          </p:nvPr>
-        </p:nvSpPr>
-        <p:spPr/>
-        <p:txBody>
-          <a:bodyPr/>
-          <a:lstStyle/>
-          <a:p>
-            <a:r>
-              <a:rPr lang="en-GB" dirty="0"/>
-              <a:t>This lecture covers material similar to chapter 12 of </a:t>
-            </a:r>
-            <a:r>
-              <a:rPr lang="en-US" sz="2800" b="1" dirty="0"/>
-              <a:t>Stallings. </a:t>
-            </a:r>
-            <a:r>
-              <a:rPr lang="en-US" sz="2800" b="1" i="1" dirty="0"/>
-              <a:t>Computer </a:t>
-            </a:r>
-            <a:r>
-              <a:rPr lang="en-US" sz="2800" b="1" i="1" dirty="0" err="1"/>
-              <a:t>Organisation</a:t>
-            </a:r>
-            <a:r>
-              <a:rPr lang="en-US" sz="2800" b="1" i="1" dirty="0"/>
-              <a:t> &amp; Architecture</a:t>
-            </a:r>
-            <a:endParaRPr lang="en-GB" sz="2800" b="1" i="1" dirty="0"/>
-          </a:p>
-          <a:p>
-            <a:pPr lvl="1"/>
-            <a:r>
-              <a:rPr lang="en-GB" dirty="0"/>
-              <a:t>It covers Karnaugh maps (section 12.3, pages 421 to 425)</a:t>
-            </a:r>
-          </a:p>
-        </p:txBody>
-      </p:sp>
-    </p:spTree>
-    <p:extLst>
-      <p:ext uri="{BB962C8B-B14F-4D97-AF65-F5344CB8AC3E}">
-        <p14:creationId xmlns:p14="http://schemas.microsoft.com/office/powerpoint/2010/main" val="2458435575"/>
-      </p:ext>
-    </p:extLst>
-  </p:cSld>
-  <p:clrMapOvr>
-    <a:masterClrMapping/>
-  </p:clrMapOvr>
-</p:sld>
-</file>
-
-<file path=ppt/slides/slide30.xml><?xml version="1.0" encoding="utf-8"?>
+<file path=ppt/slides/slide29.xml><?xml version="1.0" encoding="utf-8"?>
 <p:sld xmlns:a="http://schemas.openxmlformats.org/drawingml/2006/main" xmlns:r="http://schemas.openxmlformats.org/officeDocument/2006/relationships" xmlns:p="http://schemas.openxmlformats.org/presentationml/2006/main">
   <p:cSld>
     <p:spTree>
@@ -22385,8 +22424,8 @@
           </a:p>
         </p:txBody>
       </p:sp>
-      <mc:AlternateContent xmlns:mc="http://schemas.openxmlformats.org/markup-compatibility/2006" xmlns:a14="http://schemas.microsoft.com/office/drawing/2010/main">
-        <mc:Choice Requires="a14">
+      <mc:AlternateContent xmlns:mc="http://schemas.openxmlformats.org/markup-compatibility/2006">
+        <mc:Choice xmlns:a14="http://schemas.microsoft.com/office/drawing/2010/main" Requires="a14">
           <p:sp>
             <p:nvSpPr>
               <p:cNvPr id="3" name="Content Placeholder 2">
@@ -22737,18 +22776,27 @@
                   <m:oMath xmlns:m="http://schemas.openxmlformats.org/officeDocument/2006/math">
                     <m:r>
                       <a:rPr lang="en-GB" i="1" dirty="0" smtClean="0">
+                        <a:solidFill>
+                          <a:schemeClr val="accent2"/>
+                        </a:solidFill>
                         <a:latin typeface="Cambria Math" panose="02040503050406030204" pitchFamily="18" charset="0"/>
                       </a:rPr>
                       <m:t>𝐴</m:t>
                     </m:r>
                     <m:r>
                       <a:rPr lang="en-GB" b="0" i="1" dirty="0" smtClean="0">
+                        <a:solidFill>
+                          <a:schemeClr val="accent2"/>
+                        </a:solidFill>
                         <a:latin typeface="Cambria Math" panose="02040503050406030204" pitchFamily="18" charset="0"/>
                       </a:rPr>
                       <m:t>∨</m:t>
                     </m:r>
                     <m:r>
                       <a:rPr lang="en-GB" i="1" dirty="0" smtClean="0">
+                        <a:solidFill>
+                          <a:schemeClr val="accent2"/>
+                        </a:solidFill>
                         <a:latin typeface="Cambria Math" panose="02040503050406030204" pitchFamily="18" charset="0"/>
                       </a:rPr>
                       <m:t>𝐶</m:t>
@@ -22757,13 +22805,102 @@
                 </a14:m>
                 <a:r>
                   <a:rPr lang="en-GB" dirty="0"/>
-                  <a:t>.</a:t>
+                  <a:t>. </a:t>
                 </a:r>
+                <a:r>
+                  <a:rPr lang="zh-CN" altLang="en-US" dirty="0"/>
+                  <a:t>（注意：</a:t>
+                </a:r>
+                <a:r>
+                  <a:rPr lang="en-US" altLang="zh-CN" dirty="0">
+                    <a:solidFill>
+                      <a:schemeClr val="accent2"/>
+                    </a:solidFill>
+                  </a:rPr>
+                  <a:t>CNF 0</a:t>
+                </a:r>
+                <a:r>
+                  <a:rPr lang="zh-CN" altLang="en-US" dirty="0">
+                    <a:solidFill>
+                      <a:schemeClr val="accent2"/>
+                    </a:solidFill>
+                  </a:rPr>
+                  <a:t>*</a:t>
+                </a:r>
+                <a:r>
+                  <a:rPr lang="en-US" altLang="zh-CN" dirty="0">
+                    <a:solidFill>
+                      <a:schemeClr val="accent2"/>
+                    </a:solidFill>
+                  </a:rPr>
+                  <a:t>0</a:t>
+                </a:r>
+                <a:r>
+                  <a:rPr lang="zh-CN" altLang="en-US" dirty="0">
+                    <a:solidFill>
+                      <a:schemeClr val="accent2"/>
+                    </a:solidFill>
+                  </a:rPr>
+                  <a:t>：选</a:t>
+                </a:r>
+                <a:r>
+                  <a:rPr lang="en-US" altLang="zh-CN" dirty="0">
+                    <a:solidFill>
+                      <a:schemeClr val="accent2"/>
+                    </a:solidFill>
+                  </a:rPr>
+                  <a:t>0</a:t>
+                </a:r>
+                <a:r>
+                  <a:rPr lang="zh-CN" altLang="en-US" dirty="0">
+                    <a:solidFill>
+                      <a:schemeClr val="accent2"/>
+                    </a:solidFill>
+                  </a:rPr>
+                  <a:t>行；输入是</a:t>
+                </a:r>
+                <a:r>
+                  <a:rPr lang="en-US" altLang="zh-CN" dirty="0">
+                    <a:solidFill>
+                      <a:schemeClr val="accent2"/>
+                    </a:solidFill>
+                  </a:rPr>
+                  <a:t>0</a:t>
+                </a:r>
+                <a:r>
+                  <a:rPr lang="zh-CN" altLang="en-US" dirty="0">
+                    <a:solidFill>
+                      <a:schemeClr val="accent2"/>
+                    </a:solidFill>
+                  </a:rPr>
+                  <a:t>为正，</a:t>
+                </a:r>
+                <a:r>
+                  <a:rPr lang="en-US" altLang="zh-CN" dirty="0">
+                    <a:solidFill>
+                      <a:schemeClr val="accent2"/>
+                    </a:solidFill>
+                  </a:rPr>
+                  <a:t>1</a:t>
+                </a:r>
+                <a:r>
+                  <a:rPr lang="zh-CN" altLang="en-US" dirty="0">
+                    <a:solidFill>
+                      <a:schemeClr val="accent2"/>
+                    </a:solidFill>
+                  </a:rPr>
+                  <a:t>为反</a:t>
+                </a:r>
+                <a:r>
+                  <a:rPr lang="zh-CN" altLang="en-US" dirty="0"/>
+                  <a:t>）</a:t>
+                </a:r>
+                <a:endParaRPr lang="en-GB" dirty="0"/>
               </a:p>
             </p:txBody>
           </p:sp>
         </mc:Choice>
-        <mc:Fallback xmlns="">
+        <mc:Fallback>
           <p:sp>
             <p:nvSpPr>
               <p:cNvPr id="3" name="Content Placeholder 2">
@@ -22788,7 +22925,7 @@
               <a:blipFill>
                 <a:blip r:embed="rId2"/>
                 <a:stretch>
-                  <a:fillRect l="-928" t="-6266" b="-752"/>
+                  <a:fillRect l="-928" t="-6266" r="-3304" b="-1003"/>
                 </a:stretch>
               </a:blipFill>
             </p:spPr>
@@ -22797,7 +22934,7 @@
               <a:lstStyle/>
               <a:p>
                 <a:r>
-                  <a:rPr lang="en-GB">
+                  <a:rPr lang="zh-CN" altLang="en-US">
                     <a:noFill/>
                   </a:rPr>
                   <a:t> </a:t>
@@ -22918,7 +23055,117 @@
 </p:sld>
 </file>
 
-<file path=ppt/slides/slide31.xml><?xml version="1.0" encoding="utf-8"?>
+<file path=ppt/slides/slide3.xml><?xml version="1.0" encoding="utf-8"?>
+<p:sld xmlns:a="http://schemas.openxmlformats.org/drawingml/2006/main" xmlns:r="http://schemas.openxmlformats.org/officeDocument/2006/relationships" xmlns:p="http://schemas.openxmlformats.org/presentationml/2006/main">
+  <p:cSld>
+    <p:spTree>
+      <p:nvGrpSpPr>
+        <p:cNvPr id="1" name=""/>
+        <p:cNvGrpSpPr/>
+        <p:nvPr/>
+      </p:nvGrpSpPr>
+      <p:grpSpPr>
+        <a:xfrm>
+          <a:off x="0" y="0"/>
+          <a:ext cx="0" cy="0"/>
+          <a:chOff x="0" y="0"/>
+          <a:chExt cx="0" cy="0"/>
+        </a:xfrm>
+      </p:grpSpPr>
+      <p:sp>
+        <p:nvSpPr>
+          <p:cNvPr id="2" name="Title 1">
+            <a:extLst>
+              <a:ext uri="{FF2B5EF4-FFF2-40B4-BE49-F238E27FC236}">
+                <a16:creationId xmlns:a16="http://schemas.microsoft.com/office/drawing/2014/main" id="{70921253-F723-4782-FA6E-E4EFCFD9AC61}"/>
+              </a:ext>
+            </a:extLst>
+          </p:cNvPr>
+          <p:cNvSpPr>
+            <a:spLocks noGrp="1"/>
+          </p:cNvSpPr>
+          <p:nvPr>
+            <p:ph type="title"/>
+          </p:nvPr>
+        </p:nvSpPr>
+        <p:spPr/>
+        <p:txBody>
+          <a:bodyPr/>
+          <a:lstStyle/>
+          <a:p>
+            <a:r>
+              <a:rPr lang="en-GB" dirty="0"/>
+              <a:t>Text Book</a:t>
+            </a:r>
+          </a:p>
+        </p:txBody>
+      </p:sp>
+      <p:sp>
+        <p:nvSpPr>
+          <p:cNvPr id="3" name="Content Placeholder 2">
+            <a:extLst>
+              <a:ext uri="{FF2B5EF4-FFF2-40B4-BE49-F238E27FC236}">
+                <a16:creationId xmlns:a16="http://schemas.microsoft.com/office/drawing/2014/main" id="{330ABFD0-C792-9EF3-3BED-4AA7BDB2C595}"/>
+              </a:ext>
+            </a:extLst>
+          </p:cNvPr>
+          <p:cNvSpPr>
+            <a:spLocks noGrp="1"/>
+          </p:cNvSpPr>
+          <p:nvPr>
+            <p:ph idx="1"/>
+          </p:nvPr>
+        </p:nvSpPr>
+        <p:spPr/>
+        <p:txBody>
+          <a:bodyPr/>
+          <a:lstStyle/>
+          <a:p>
+            <a:r>
+              <a:rPr lang="en-GB" dirty="0"/>
+              <a:t>This lecture covers material similar to chapter 12 of </a:t>
+            </a:r>
+            <a:r>
+              <a:rPr lang="en-US" sz="2800" b="1" dirty="0"/>
+              <a:t>Stallings. </a:t>
+            </a:r>
+            <a:r>
+              <a:rPr lang="en-US" sz="2800" b="1" i="1" dirty="0"/>
+              <a:t>Computer </a:t>
+            </a:r>
+            <a:r>
+              <a:rPr lang="en-US" sz="2800" b="1" i="1" dirty="0" err="1"/>
+              <a:t>Organisation</a:t>
+            </a:r>
+            <a:r>
+              <a:rPr lang="en-US" sz="2800" b="1" i="1" dirty="0"/>
+              <a:t> &amp; Architecture</a:t>
+            </a:r>
+            <a:endParaRPr lang="en-GB" sz="2800" b="1" i="1" dirty="0"/>
+          </a:p>
+          <a:p>
+            <a:pPr lvl="1"/>
+            <a:r>
+              <a:rPr lang="en-GB" dirty="0"/>
+              <a:t>It covers Karnaugh maps (section 12.3, pages 421 to 425)</a:t>
+            </a:r>
+          </a:p>
+        </p:txBody>
+      </p:sp>
+    </p:spTree>
+    <p:extLst>
+      <p:ext uri="{BB962C8B-B14F-4D97-AF65-F5344CB8AC3E}">
+        <p14:creationId xmlns:p14="http://schemas.microsoft.com/office/powerpoint/2010/main" val="2458435575"/>
+      </p:ext>
+    </p:extLst>
+  </p:cSld>
+  <p:clrMapOvr>
+    <a:masterClrMapping/>
+  </p:clrMapOvr>
+</p:sld>
+</file>
+
+<file path=ppt/slides/slide30.xml><?xml version="1.0" encoding="utf-8"?>
 <p:sld xmlns:a="http://schemas.openxmlformats.org/drawingml/2006/main" xmlns:r="http://schemas.openxmlformats.org/officeDocument/2006/relationships" xmlns:p="http://schemas.openxmlformats.org/presentationml/2006/main">
   <p:cSld>
     <p:spTree>
@@ -23359,8 +23606,8 @@
           </a:p>
         </p:txBody>
       </p:sp>
-      <mc:AlternateContent xmlns:mc="http://schemas.openxmlformats.org/markup-compatibility/2006" xmlns:a14="http://schemas.microsoft.com/office/drawing/2010/main">
-        <mc:Choice Requires="a14">
+      <mc:AlternateContent xmlns:mc="http://schemas.openxmlformats.org/markup-compatibility/2006">
+        <mc:Choice xmlns:a14="http://schemas.microsoft.com/office/drawing/2010/main" Requires="a14">
           <p:sp>
             <p:nvSpPr>
               <p:cNvPr id="3" name="Content Placeholder 2">
@@ -23752,24 +23999,36 @@
                   <m:oMath xmlns:m="http://schemas.openxmlformats.org/officeDocument/2006/math">
                     <m:r>
                       <a:rPr lang="en-GB" b="0" i="1" smtClean="0">
+                        <a:solidFill>
+                          <a:schemeClr val="accent2"/>
+                        </a:solidFill>
                         <a:latin typeface="Cambria Math" panose="02040503050406030204" pitchFamily="18" charset="0"/>
                       </a:rPr>
                       <m:t>¬</m:t>
                     </m:r>
                     <m:r>
                       <a:rPr lang="en-GB" b="0" i="1" smtClean="0">
+                        <a:solidFill>
+                          <a:schemeClr val="accent2"/>
+                        </a:solidFill>
                         <a:latin typeface="Cambria Math" panose="02040503050406030204" pitchFamily="18" charset="0"/>
                       </a:rPr>
                       <m:t>𝐴</m:t>
                     </m:r>
                     <m:r>
                       <a:rPr lang="en-GB" b="0" i="1" smtClean="0">
+                        <a:solidFill>
+                          <a:schemeClr val="accent2"/>
+                        </a:solidFill>
                         <a:latin typeface="Cambria Math" panose="02040503050406030204" pitchFamily="18" charset="0"/>
                       </a:rPr>
                       <m:t>∨</m:t>
                     </m:r>
                     <m:r>
                       <a:rPr lang="en-GB" b="0" i="1" smtClean="0">
+                        <a:solidFill>
+                          <a:schemeClr val="accent2"/>
+                        </a:solidFill>
                         <a:latin typeface="Cambria Math" panose="02040503050406030204" pitchFamily="18" charset="0"/>
                       </a:rPr>
                       <m:t>𝐵</m:t>
@@ -23784,7 +24043,7 @@
             </p:txBody>
           </p:sp>
         </mc:Choice>
-        <mc:Fallback xmlns="">
+        <mc:Fallback>
           <p:sp>
             <p:nvSpPr>
               <p:cNvPr id="3" name="Content Placeholder 2">
@@ -23818,7 +24077,7 @@
               <a:lstStyle/>
               <a:p>
                 <a:r>
-                  <a:rPr lang="en-GB">
+                  <a:rPr lang="zh-CN" altLang="en-US">
                     <a:noFill/>
                   </a:rPr>
                   <a:t> </a:t>
@@ -23893,7 +24152,7 @@
 </p:sld>
 </file>
 
-<file path=ppt/slides/slide32.xml><?xml version="1.0" encoding="utf-8"?>
+<file path=ppt/slides/slide31.xml><?xml version="1.0" encoding="utf-8"?>
 <p:sld xmlns:a="http://schemas.openxmlformats.org/drawingml/2006/main" xmlns:r="http://schemas.openxmlformats.org/officeDocument/2006/relationships" xmlns:p="http://schemas.openxmlformats.org/presentationml/2006/main">
   <p:cSld>
     <p:spTree>
@@ -24334,8 +24593,8 @@
           </a:p>
         </p:txBody>
       </p:sp>
-      <mc:AlternateContent xmlns:mc="http://schemas.openxmlformats.org/markup-compatibility/2006" xmlns:a14="http://schemas.microsoft.com/office/drawing/2010/main">
-        <mc:Choice Requires="a14">
+      <mc:AlternateContent xmlns:mc="http://schemas.openxmlformats.org/markup-compatibility/2006">
+        <mc:Choice xmlns:a14="http://schemas.microsoft.com/office/drawing/2010/main" Requires="a14">
           <p:sp>
             <p:nvSpPr>
               <p:cNvPr id="3" name="Content Placeholder 2">
@@ -24381,6 +24640,9 @@
                         <m:dPr>
                           <m:ctrlPr>
                             <a:rPr lang="en-GB" b="0" i="1" smtClean="0">
+                              <a:solidFill>
+                                <a:schemeClr val="accent2"/>
+                              </a:solidFill>
                               <a:latin typeface="Cambria Math" panose="02040503050406030204" pitchFamily="18" charset="0"/>
                             </a:rPr>
                           </m:ctrlPr>
@@ -24388,18 +24650,27 @@
                         <m:e>
                           <m:r>
                             <a:rPr lang="en-GB" i="1">
+                              <a:solidFill>
+                                <a:schemeClr val="accent2"/>
+                              </a:solidFill>
                               <a:latin typeface="Cambria Math" panose="02040503050406030204" pitchFamily="18" charset="0"/>
                             </a:rPr>
                             <m:t>𝐴</m:t>
                           </m:r>
                           <m:r>
                             <a:rPr lang="en-GB" i="1">
+                              <a:solidFill>
+                                <a:schemeClr val="accent2"/>
+                              </a:solidFill>
                               <a:latin typeface="Cambria Math" panose="02040503050406030204" pitchFamily="18" charset="0"/>
                             </a:rPr>
                             <m:t>∨</m:t>
                           </m:r>
                           <m:r>
                             <a:rPr lang="en-GB" b="0" i="1" smtClean="0">
+                              <a:solidFill>
+                                <a:schemeClr val="accent2"/>
+                              </a:solidFill>
                               <a:latin typeface="Cambria Math" panose="02040503050406030204" pitchFamily="18" charset="0"/>
                             </a:rPr>
                             <m:t>𝐶</m:t>
@@ -24408,30 +24679,45 @@
                       </m:d>
                       <m:r>
                         <a:rPr lang="en-GB" b="0" i="1" smtClean="0">
+                          <a:solidFill>
+                            <a:schemeClr val="accent2"/>
+                          </a:solidFill>
                           <a:latin typeface="Cambria Math" panose="02040503050406030204" pitchFamily="18" charset="0"/>
                         </a:rPr>
                         <m:t>∧(¬</m:t>
                       </m:r>
                       <m:r>
                         <a:rPr lang="en-GB" b="0" i="1" smtClean="0">
+                          <a:solidFill>
+                            <a:schemeClr val="accent2"/>
+                          </a:solidFill>
                           <a:latin typeface="Cambria Math" panose="02040503050406030204" pitchFamily="18" charset="0"/>
                         </a:rPr>
                         <m:t>𝐴</m:t>
                       </m:r>
                       <m:r>
                         <a:rPr lang="en-GB" b="0" i="1" smtClean="0">
+                          <a:solidFill>
+                            <a:schemeClr val="accent2"/>
+                          </a:solidFill>
                           <a:latin typeface="Cambria Math" panose="02040503050406030204" pitchFamily="18" charset="0"/>
                         </a:rPr>
                         <m:t>∨</m:t>
                       </m:r>
                       <m:r>
                         <a:rPr lang="en-GB" b="0" i="1" smtClean="0">
+                          <a:solidFill>
+                            <a:schemeClr val="accent2"/>
+                          </a:solidFill>
                           <a:latin typeface="Cambria Math" panose="02040503050406030204" pitchFamily="18" charset="0"/>
                         </a:rPr>
                         <m:t>𝐵</m:t>
                       </m:r>
                       <m:r>
                         <a:rPr lang="en-GB" b="0" i="1" smtClean="0">
+                          <a:solidFill>
+                            <a:schemeClr val="accent2"/>
+                          </a:solidFill>
                           <a:latin typeface="Cambria Math" panose="02040503050406030204" pitchFamily="18" charset="0"/>
                         </a:rPr>
                         <m:t>)</m:t>
@@ -24439,12 +24725,16 @@
                     </m:oMath>
                   </m:oMathPara>
                 </a14:m>
-                <a:endParaRPr lang="en-GB" dirty="0"/>
+                <a:endParaRPr lang="en-GB" dirty="0">
+                  <a:solidFill>
+                    <a:schemeClr val="accent2"/>
+                  </a:solidFill>
+                </a:endParaRPr>
               </a:p>
             </p:txBody>
           </p:sp>
         </mc:Choice>
-        <mc:Fallback xmlns="">
+        <mc:Fallback>
           <p:sp>
             <p:nvSpPr>
               <p:cNvPr id="3" name="Content Placeholder 2">
@@ -24478,7 +24768,7 @@
               <a:lstStyle/>
               <a:p>
                 <a:r>
-                  <a:rPr lang="en-GB">
+                  <a:rPr lang="zh-CN" altLang="en-US">
                     <a:noFill/>
                   </a:rPr>
                   <a:t> </a:t>
@@ -24703,7 +24993,7 @@
 </p:sld>
 </file>
 
-<file path=ppt/slides/slide33.xml><?xml version="1.0" encoding="utf-8"?>
+<file path=ppt/slides/slide32.xml><?xml version="1.0" encoding="utf-8"?>
 <p:sld xmlns:a="http://schemas.openxmlformats.org/drawingml/2006/main" xmlns:r="http://schemas.openxmlformats.org/officeDocument/2006/relationships" xmlns:p="http://schemas.openxmlformats.org/presentationml/2006/main">
   <p:cSld>
     <p:spTree>
@@ -25544,7 +25834,7 @@
 </p:sld>
 </file>
 
-<file path=ppt/slides/slide34.xml><?xml version="1.0" encoding="utf-8"?>
+<file path=ppt/slides/slide33.xml><?xml version="1.0" encoding="utf-8"?>
 <p:sld xmlns:a="http://schemas.openxmlformats.org/drawingml/2006/main" xmlns:r="http://schemas.openxmlformats.org/officeDocument/2006/relationships" xmlns:p="http://schemas.openxmlformats.org/presentationml/2006/main">
   <p:cSld>
     <p:spTree>
@@ -25589,8 +25879,8 @@
           </a:p>
         </p:txBody>
       </p:sp>
-      <mc:AlternateContent xmlns:mc="http://schemas.openxmlformats.org/markup-compatibility/2006" xmlns:a14="http://schemas.microsoft.com/office/drawing/2010/main">
-        <mc:Choice Requires="a14">
+      <mc:AlternateContent xmlns:mc="http://schemas.openxmlformats.org/markup-compatibility/2006">
+        <mc:Choice xmlns:a14="http://schemas.microsoft.com/office/drawing/2010/main" Requires="a14">
           <p:sp>
             <p:nvSpPr>
               <p:cNvPr id="3" name="Content Placeholder 2">
@@ -25731,6 +26021,9 @@
                   <m:oMath xmlns:m="http://schemas.openxmlformats.org/officeDocument/2006/math">
                     <m:r>
                       <a:rPr lang="en-GB" i="1" dirty="0" smtClean="0">
+                        <a:solidFill>
+                          <a:schemeClr val="accent2"/>
+                        </a:solidFill>
                         <a:latin typeface="Cambria Math" panose="02040503050406030204" pitchFamily="18" charset="0"/>
                       </a:rPr>
                       <m:t>𝐵</m:t>
@@ -25745,7 +26038,7 @@
             </p:txBody>
           </p:sp>
         </mc:Choice>
-        <mc:Fallback xmlns="">
+        <mc:Fallback>
           <p:sp>
             <p:nvSpPr>
               <p:cNvPr id="3" name="Content Placeholder 2">
@@ -25779,7 +26072,7 @@
               <a:lstStyle/>
               <a:p>
                 <a:r>
-                  <a:rPr lang="en-GB">
+                  <a:rPr lang="zh-CN" altLang="en-US">
                     <a:noFill/>
                   </a:rPr>
                   <a:t> </a:t>
@@ -26250,7 +26543,7 @@
 </p:sld>
 </file>
 
-<file path=ppt/slides/slide35.xml><?xml version="1.0" encoding="utf-8"?>
+<file path=ppt/slides/slide34.xml><?xml version="1.0" encoding="utf-8"?>
 <p:sld xmlns:a="http://schemas.openxmlformats.org/drawingml/2006/main" xmlns:r="http://schemas.openxmlformats.org/officeDocument/2006/relationships" xmlns:p="http://schemas.openxmlformats.org/presentationml/2006/main">
   <p:cSld>
     <p:spTree>
@@ -26295,8 +26588,8 @@
           </a:p>
         </p:txBody>
       </p:sp>
-      <mc:AlternateContent xmlns:mc="http://schemas.openxmlformats.org/markup-compatibility/2006" xmlns:a14="http://schemas.microsoft.com/office/drawing/2010/main">
-        <mc:Choice Requires="a14">
+      <mc:AlternateContent xmlns:mc="http://schemas.openxmlformats.org/markup-compatibility/2006">
+        <mc:Choice xmlns:a14="http://schemas.microsoft.com/office/drawing/2010/main" Requires="a14">
           <p:sp>
             <p:nvSpPr>
               <p:cNvPr id="3" name="Content Placeholder 2">
@@ -26696,24 +26989,36 @@
                   <m:oMath xmlns:m="http://schemas.openxmlformats.org/officeDocument/2006/math">
                     <m:r>
                       <a:rPr lang="en-GB" b="0" i="1" smtClean="0">
+                        <a:solidFill>
+                          <a:schemeClr val="accent2"/>
+                        </a:solidFill>
                         <a:latin typeface="Cambria Math" panose="02040503050406030204" pitchFamily="18" charset="0"/>
                       </a:rPr>
                       <m:t>¬</m:t>
                     </m:r>
                     <m:r>
                       <a:rPr lang="en-GB" b="0" i="1" smtClean="0">
+                        <a:solidFill>
+                          <a:schemeClr val="accent2"/>
+                        </a:solidFill>
                         <a:latin typeface="Cambria Math" panose="02040503050406030204" pitchFamily="18" charset="0"/>
                       </a:rPr>
                       <m:t>𝐴</m:t>
                     </m:r>
                     <m:r>
                       <a:rPr lang="en-GB" b="0" i="1" smtClean="0">
+                        <a:solidFill>
+                          <a:schemeClr val="accent2"/>
+                        </a:solidFill>
                         <a:latin typeface="Cambria Math" panose="02040503050406030204" pitchFamily="18" charset="0"/>
                       </a:rPr>
                       <m:t>∨¬</m:t>
                     </m:r>
                     <m:r>
                       <a:rPr lang="en-GB" b="0" i="1" smtClean="0">
+                        <a:solidFill>
+                          <a:schemeClr val="accent2"/>
+                        </a:solidFill>
                         <a:latin typeface="Cambria Math" panose="02040503050406030204" pitchFamily="18" charset="0"/>
                       </a:rPr>
                       <m:t>𝐶</m:t>
@@ -26721,14 +27026,19 @@
                   </m:oMath>
                 </a14:m>
                 <a:r>
-                  <a:rPr lang="en-GB" dirty="0"/>
+                  <a:rPr lang="en-GB" dirty="0">
+                    <a:solidFill>
+                      <a:schemeClr val="accent2"/>
+                    </a:solidFill>
+                  </a:rPr>
                   <a:t>.</a:t>
                 </a:r>
+                <a:endParaRPr lang="en-GB" dirty="0"/>
               </a:p>
             </p:txBody>
           </p:sp>
         </mc:Choice>
-        <mc:Fallback xmlns="">
+        <mc:Fallback>
           <p:sp>
             <p:nvSpPr>
               <p:cNvPr id="3" name="Content Placeholder 2">
@@ -26762,7 +27072,7 @@
               <a:lstStyle/>
               <a:p>
                 <a:r>
-                  <a:rPr lang="en-GB">
+                  <a:rPr lang="zh-CN" altLang="en-US">
                     <a:noFill/>
                   </a:rPr>
                   <a:t> </a:t>
@@ -27233,7 +27543,7 @@
 </p:sld>
 </file>
 
-<file path=ppt/slides/slide36.xml><?xml version="1.0" encoding="utf-8"?>
+<file path=ppt/slides/slide35.xml><?xml version="1.0" encoding="utf-8"?>
 <p:sld xmlns:a="http://schemas.openxmlformats.org/drawingml/2006/main" xmlns:r="http://schemas.openxmlformats.org/officeDocument/2006/relationships" xmlns:p="http://schemas.openxmlformats.org/presentationml/2006/main">
   <p:cSld>
     <p:spTree>
@@ -27278,8 +27588,8 @@
           </a:p>
         </p:txBody>
       </p:sp>
-      <mc:AlternateContent xmlns:mc="http://schemas.openxmlformats.org/markup-compatibility/2006" xmlns:a14="http://schemas.microsoft.com/office/drawing/2010/main">
-        <mc:Choice Requires="a14">
+      <mc:AlternateContent xmlns:mc="http://schemas.openxmlformats.org/markup-compatibility/2006">
+        <mc:Choice xmlns:a14="http://schemas.microsoft.com/office/drawing/2010/main" Requires="a14">
           <p:sp>
             <p:nvSpPr>
               <p:cNvPr id="3" name="Content Placeholder 2">
@@ -27323,36 +27633,54 @@
                     <m:oMath xmlns:m="http://schemas.openxmlformats.org/officeDocument/2006/math">
                       <m:r>
                         <a:rPr lang="en-GB" b="0" i="1" smtClean="0">
+                          <a:solidFill>
+                            <a:schemeClr val="accent2"/>
+                          </a:solidFill>
                           <a:latin typeface="Cambria Math" panose="02040503050406030204" pitchFamily="18" charset="0"/>
                         </a:rPr>
                         <m:t>𝐵</m:t>
                       </m:r>
                       <m:r>
                         <a:rPr lang="en-GB" b="0" i="1" smtClean="0">
+                          <a:solidFill>
+                            <a:schemeClr val="accent2"/>
+                          </a:solidFill>
                           <a:latin typeface="Cambria Math" panose="02040503050406030204" pitchFamily="18" charset="0"/>
                         </a:rPr>
                         <m:t>∧(¬</m:t>
                       </m:r>
                       <m:r>
                         <a:rPr lang="en-GB" b="0" i="1" smtClean="0">
+                          <a:solidFill>
+                            <a:schemeClr val="accent2"/>
+                          </a:solidFill>
                           <a:latin typeface="Cambria Math" panose="02040503050406030204" pitchFamily="18" charset="0"/>
                         </a:rPr>
                         <m:t>𝐴</m:t>
                       </m:r>
                       <m:r>
                         <a:rPr lang="en-GB" b="0" i="1" smtClean="0">
+                          <a:solidFill>
+                            <a:schemeClr val="accent2"/>
+                          </a:solidFill>
                           <a:latin typeface="Cambria Math" panose="02040503050406030204" pitchFamily="18" charset="0"/>
                         </a:rPr>
                         <m:t>∨¬</m:t>
                       </m:r>
                       <m:r>
                         <a:rPr lang="en-GB" b="0" i="1" smtClean="0">
+                          <a:solidFill>
+                            <a:schemeClr val="accent2"/>
+                          </a:solidFill>
                           <a:latin typeface="Cambria Math" panose="02040503050406030204" pitchFamily="18" charset="0"/>
                         </a:rPr>
                         <m:t>𝐶</m:t>
                       </m:r>
                       <m:r>
                         <a:rPr lang="en-GB" b="0" i="1" smtClean="0">
+                          <a:solidFill>
+                            <a:schemeClr val="accent2"/>
+                          </a:solidFill>
                           <a:latin typeface="Cambria Math" panose="02040503050406030204" pitchFamily="18" charset="0"/>
                         </a:rPr>
                         <m:t>)</m:t>
@@ -27360,12 +27688,16 @@
                     </m:oMath>
                   </m:oMathPara>
                 </a14:m>
-                <a:endParaRPr lang="en-GB" dirty="0"/>
+                <a:endParaRPr lang="en-GB" dirty="0">
+                  <a:solidFill>
+                    <a:schemeClr val="accent2"/>
+                  </a:solidFill>
+                </a:endParaRPr>
               </a:p>
             </p:txBody>
           </p:sp>
         </mc:Choice>
-        <mc:Fallback xmlns="">
+        <mc:Fallback>
           <p:sp>
             <p:nvSpPr>
               <p:cNvPr id="3" name="Content Placeholder 2">
@@ -27399,7 +27731,7 @@
               <a:lstStyle/>
               <a:p>
                 <a:r>
-                  <a:rPr lang="en-GB">
+                  <a:rPr lang="zh-CN" altLang="en-US">
                     <a:noFill/>
                   </a:rPr>
                   <a:t> </a:t>
@@ -27922,7 +28254,7 @@
 </p:sld>
 </file>
 
-<file path=ppt/slides/slide37.xml><?xml version="1.0" encoding="utf-8"?>
+<file path=ppt/slides/slide36.xml><?xml version="1.0" encoding="utf-8"?>
 <p:sld xmlns:a="http://schemas.openxmlformats.org/drawingml/2006/main" xmlns:r="http://schemas.openxmlformats.org/officeDocument/2006/relationships" xmlns:p="http://schemas.openxmlformats.org/presentationml/2006/main">
   <p:cSld>
     <p:spTree>
@@ -29203,7 +29535,7 @@
 </p:sld>
 </file>
 
-<file path=ppt/slides/slide38.xml><?xml version="1.0" encoding="utf-8"?>
+<file path=ppt/slides/slide37.xml><?xml version="1.0" encoding="utf-8"?>
 <p:sld xmlns:a="http://schemas.openxmlformats.org/drawingml/2006/main" xmlns:r="http://schemas.openxmlformats.org/officeDocument/2006/relationships" xmlns:p="http://schemas.openxmlformats.org/presentationml/2006/main">
   <p:cSld>
     <p:spTree>
@@ -29248,8 +29580,8 @@
           </a:p>
         </p:txBody>
       </p:sp>
-      <mc:AlternateContent xmlns:mc="http://schemas.openxmlformats.org/markup-compatibility/2006" xmlns:a14="http://schemas.microsoft.com/office/drawing/2010/main">
-        <mc:Choice Requires="a14">
+      <mc:AlternateContent xmlns:mc="http://schemas.openxmlformats.org/markup-compatibility/2006">
+        <mc:Choice xmlns:a14="http://schemas.microsoft.com/office/drawing/2010/main" Requires="a14">
           <p:sp>
             <p:nvSpPr>
               <p:cNvPr id="3" name="Content Placeholder 2">
@@ -29298,18 +29630,27 @@
                   <m:oMath xmlns:m="http://schemas.openxmlformats.org/officeDocument/2006/math">
                     <m:r>
                       <a:rPr lang="en-GB" b="0" i="1" smtClean="0">
+                        <a:solidFill>
+                          <a:schemeClr val="accent2"/>
+                        </a:solidFill>
                         <a:latin typeface="Cambria Math" panose="02040503050406030204" pitchFamily="18" charset="0"/>
                       </a:rPr>
                       <m:t>𝐴</m:t>
                     </m:r>
                     <m:r>
                       <a:rPr lang="en-GB" b="0" i="1" smtClean="0">
+                        <a:solidFill>
+                          <a:schemeClr val="accent2"/>
+                        </a:solidFill>
                         <a:latin typeface="Cambria Math" panose="02040503050406030204" pitchFamily="18" charset="0"/>
                       </a:rPr>
                       <m:t>∨</m:t>
                     </m:r>
                     <m:r>
                       <a:rPr lang="en-GB" b="0" i="1" smtClean="0">
+                        <a:solidFill>
+                          <a:schemeClr val="accent2"/>
+                        </a:solidFill>
                         <a:latin typeface="Cambria Math" panose="02040503050406030204" pitchFamily="18" charset="0"/>
                       </a:rPr>
                       <m:t>𝐶</m:t>
@@ -29321,7 +29662,7 @@
             </p:txBody>
           </p:sp>
         </mc:Choice>
-        <mc:Fallback xmlns="">
+        <mc:Fallback>
           <p:sp>
             <p:nvSpPr>
               <p:cNvPr id="3" name="Content Placeholder 2">
@@ -29355,7 +29696,7 @@
               <a:lstStyle/>
               <a:p>
                 <a:r>
-                  <a:rPr lang="en-GB">
+                  <a:rPr lang="zh-CN" altLang="en-US">
                     <a:noFill/>
                   </a:rPr>
                   <a:t> </a:t>
@@ -30212,7 +30553,7 @@
 </p:sld>
 </file>
 
-<file path=ppt/slides/slide39.xml><?xml version="1.0" encoding="utf-8"?>
+<file path=ppt/slides/slide38.xml><?xml version="1.0" encoding="utf-8"?>
 <p:sld xmlns:a="http://schemas.openxmlformats.org/drawingml/2006/main" xmlns:r="http://schemas.openxmlformats.org/officeDocument/2006/relationships" xmlns:p="http://schemas.openxmlformats.org/presentationml/2006/main">
   <p:cSld>
     <p:spTree>
@@ -30257,8 +30598,8 @@
           </a:p>
         </p:txBody>
       </p:sp>
-      <mc:AlternateContent xmlns:mc="http://schemas.openxmlformats.org/markup-compatibility/2006" xmlns:a14="http://schemas.microsoft.com/office/drawing/2010/main">
-        <mc:Choice Requires="a14">
+      <mc:AlternateContent xmlns:mc="http://schemas.openxmlformats.org/markup-compatibility/2006">
+        <mc:Choice xmlns:a14="http://schemas.microsoft.com/office/drawing/2010/main" Requires="a14">
           <p:sp>
             <p:nvSpPr>
               <p:cNvPr id="3" name="Content Placeholder 2">
@@ -30307,18 +30648,27 @@
                   <m:oMath xmlns:m="http://schemas.openxmlformats.org/officeDocument/2006/math">
                     <m:r>
                       <a:rPr lang="en-GB" b="0" i="1" smtClean="0">
+                        <a:solidFill>
+                          <a:schemeClr val="accent2"/>
+                        </a:solidFill>
                         <a:latin typeface="Cambria Math" panose="02040503050406030204" pitchFamily="18" charset="0"/>
                       </a:rPr>
                       <m:t>𝐶</m:t>
                     </m:r>
                     <m:r>
                       <a:rPr lang="en-GB" b="0" i="1" smtClean="0">
+                        <a:solidFill>
+                          <a:schemeClr val="accent2"/>
+                        </a:solidFill>
                         <a:latin typeface="Cambria Math" panose="02040503050406030204" pitchFamily="18" charset="0"/>
                       </a:rPr>
                       <m:t>∨¬</m:t>
                     </m:r>
                     <m:r>
                       <a:rPr lang="en-GB" b="0" i="1" smtClean="0">
+                        <a:solidFill>
+                          <a:schemeClr val="accent2"/>
+                        </a:solidFill>
                         <a:latin typeface="Cambria Math" panose="02040503050406030204" pitchFamily="18" charset="0"/>
                       </a:rPr>
                       <m:t>𝐷</m:t>
@@ -30330,7 +30680,7 @@
             </p:txBody>
           </p:sp>
         </mc:Choice>
-        <mc:Fallback xmlns="">
+        <mc:Fallback>
           <p:sp>
             <p:nvSpPr>
               <p:cNvPr id="3" name="Content Placeholder 2">
@@ -30364,7 +30714,7 @@
               <a:lstStyle/>
               <a:p>
                 <a:r>
-                  <a:rPr lang="en-GB">
+                  <a:rPr lang="zh-CN" altLang="en-US">
                     <a:noFill/>
                   </a:rPr>
                   <a:t> </a:t>
@@ -31221,93 +31571,7 @@
 </p:sld>
 </file>
 
-<file path=ppt/slides/slide4.xml><?xml version="1.0" encoding="utf-8"?>
-<p:sld xmlns:a="http://schemas.openxmlformats.org/drawingml/2006/main" xmlns:r="http://schemas.openxmlformats.org/officeDocument/2006/relationships" xmlns:p="http://schemas.openxmlformats.org/presentationml/2006/main">
-  <p:cSld>
-    <p:spTree>
-      <p:nvGrpSpPr>
-        <p:cNvPr id="1" name=""/>
-        <p:cNvGrpSpPr/>
-        <p:nvPr/>
-      </p:nvGrpSpPr>
-      <p:grpSpPr>
-        <a:xfrm>
-          <a:off x="0" y="0"/>
-          <a:ext cx="0" cy="0"/>
-          <a:chOff x="0" y="0"/>
-          <a:chExt cx="0" cy="0"/>
-        </a:xfrm>
-      </p:grpSpPr>
-      <p:sp>
-        <p:nvSpPr>
-          <p:cNvPr id="2" name="Title 1">
-            <a:extLst>
-              <a:ext uri="{FF2B5EF4-FFF2-40B4-BE49-F238E27FC236}">
-                <a16:creationId xmlns:a16="http://schemas.microsoft.com/office/drawing/2014/main" id="{CCAE0FA2-EC25-0983-344F-A72AB2B2732E}"/>
-              </a:ext>
-            </a:extLst>
-          </p:cNvPr>
-          <p:cNvSpPr>
-            <a:spLocks noGrp="1"/>
-          </p:cNvSpPr>
-          <p:nvPr>
-            <p:ph type="title"/>
-          </p:nvPr>
-        </p:nvSpPr>
-        <p:spPr/>
-        <p:txBody>
-          <a:bodyPr/>
-          <a:lstStyle/>
-          <a:p>
-            <a:r>
-              <a:rPr lang="en-GB" dirty="0"/>
-              <a:t>Overview</a:t>
-            </a:r>
-          </a:p>
-        </p:txBody>
-      </p:sp>
-      <p:sp>
-        <p:nvSpPr>
-          <p:cNvPr id="3" name="Content Placeholder 2">
-            <a:extLst>
-              <a:ext uri="{FF2B5EF4-FFF2-40B4-BE49-F238E27FC236}">
-                <a16:creationId xmlns:a16="http://schemas.microsoft.com/office/drawing/2014/main" id="{6D851E3D-67B0-E64B-9E1F-AAE4210871AC}"/>
-              </a:ext>
-            </a:extLst>
-          </p:cNvPr>
-          <p:cNvSpPr>
-            <a:spLocks noGrp="1"/>
-          </p:cNvSpPr>
-          <p:nvPr>
-            <p:ph idx="1"/>
-          </p:nvPr>
-        </p:nvSpPr>
-        <p:spPr/>
-        <p:txBody>
-          <a:bodyPr/>
-          <a:lstStyle/>
-          <a:p>
-            <a:r>
-              <a:rPr lang="en-GB" dirty="0"/>
-              <a:t>Karnaugh Maps</a:t>
-            </a:r>
-          </a:p>
-        </p:txBody>
-      </p:sp>
-    </p:spTree>
-    <p:extLst>
-      <p:ext uri="{BB962C8B-B14F-4D97-AF65-F5344CB8AC3E}">
-        <p14:creationId xmlns:p14="http://schemas.microsoft.com/office/powerpoint/2010/main" val="757110763"/>
-      </p:ext>
-    </p:extLst>
-  </p:cSld>
-  <p:clrMapOvr>
-    <a:masterClrMapping/>
-  </p:clrMapOvr>
-</p:sld>
-</file>
-
-<file path=ppt/slides/slide40.xml><?xml version="1.0" encoding="utf-8"?>
+<file path=ppt/slides/slide39.xml><?xml version="1.0" encoding="utf-8"?>
 <p:sld xmlns:a="http://schemas.openxmlformats.org/drawingml/2006/main" xmlns:r="http://schemas.openxmlformats.org/officeDocument/2006/relationships" xmlns:p="http://schemas.openxmlformats.org/presentationml/2006/main">
   <p:cSld>
     <p:spTree>
@@ -32134,8 +32398,8 @@
           </a:p>
         </p:txBody>
       </p:sp>
-      <mc:AlternateContent xmlns:mc="http://schemas.openxmlformats.org/markup-compatibility/2006" xmlns:a14="http://schemas.microsoft.com/office/drawing/2010/main">
-        <mc:Choice Requires="a14">
+      <mc:AlternateContent xmlns:mc="http://schemas.openxmlformats.org/markup-compatibility/2006">
+        <mc:Choice xmlns:a14="http://schemas.microsoft.com/office/drawing/2010/main" Requires="a14">
           <p:sp>
             <p:nvSpPr>
               <p:cNvPr id="3" name="Content Placeholder 2">
@@ -32184,18 +32448,27 @@
                   <m:oMath xmlns:m="http://schemas.openxmlformats.org/officeDocument/2006/math">
                     <m:r>
                       <a:rPr lang="en-GB" b="0" i="1" smtClean="0">
+                        <a:solidFill>
+                          <a:schemeClr val="accent2"/>
+                        </a:solidFill>
                         <a:latin typeface="Cambria Math" panose="02040503050406030204" pitchFamily="18" charset="0"/>
                       </a:rPr>
                       <m:t>𝐵</m:t>
                     </m:r>
                     <m:r>
                       <a:rPr lang="en-GB" b="0" i="1" smtClean="0">
+                        <a:solidFill>
+                          <a:schemeClr val="accent2"/>
+                        </a:solidFill>
                         <a:latin typeface="Cambria Math" panose="02040503050406030204" pitchFamily="18" charset="0"/>
                       </a:rPr>
                       <m:t>∨</m:t>
                     </m:r>
                     <m:r>
                       <a:rPr lang="en-GB" b="0" i="1" smtClean="0">
+                        <a:solidFill>
+                          <a:schemeClr val="accent2"/>
+                        </a:solidFill>
                         <a:latin typeface="Cambria Math" panose="02040503050406030204" pitchFamily="18" charset="0"/>
                       </a:rPr>
                       <m:t>𝐶</m:t>
@@ -32207,7 +32480,7 @@
             </p:txBody>
           </p:sp>
         </mc:Choice>
-        <mc:Fallback xmlns="">
+        <mc:Fallback>
           <p:sp>
             <p:nvSpPr>
               <p:cNvPr id="3" name="Content Placeholder 2">
@@ -32241,7 +32514,7 @@
               <a:lstStyle/>
               <a:p>
                 <a:r>
-                  <a:rPr lang="en-GB">
+                  <a:rPr lang="zh-CN" altLang="en-US">
                     <a:noFill/>
                   </a:rPr>
                   <a:t> </a:t>
@@ -32370,7 +32643,99 @@
 </p:sld>
 </file>
 
-<file path=ppt/slides/slide41.xml><?xml version="1.0" encoding="utf-8"?>
+<file path=ppt/slides/slide4.xml><?xml version="1.0" encoding="utf-8"?>
+<p:sld xmlns:a="http://schemas.openxmlformats.org/drawingml/2006/main" xmlns:r="http://schemas.openxmlformats.org/officeDocument/2006/relationships" xmlns:p="http://schemas.openxmlformats.org/presentationml/2006/main">
+  <p:cSld>
+    <p:spTree>
+      <p:nvGrpSpPr>
+        <p:cNvPr id="1" name=""/>
+        <p:cNvGrpSpPr/>
+        <p:nvPr/>
+      </p:nvGrpSpPr>
+      <p:grpSpPr>
+        <a:xfrm>
+          <a:off x="0" y="0"/>
+          <a:ext cx="0" cy="0"/>
+          <a:chOff x="0" y="0"/>
+          <a:chExt cx="0" cy="0"/>
+        </a:xfrm>
+      </p:grpSpPr>
+      <p:sp>
+        <p:nvSpPr>
+          <p:cNvPr id="2" name="Title 1">
+            <a:extLst>
+              <a:ext uri="{FF2B5EF4-FFF2-40B4-BE49-F238E27FC236}">
+                <a16:creationId xmlns:a16="http://schemas.microsoft.com/office/drawing/2014/main" id="{30C204C0-99CA-7A76-3BF0-751D278E195A}"/>
+              </a:ext>
+            </a:extLst>
+          </p:cNvPr>
+          <p:cNvSpPr>
+            <a:spLocks noGrp="1"/>
+          </p:cNvSpPr>
+          <p:nvPr>
+            <p:ph type="title"/>
+          </p:nvPr>
+        </p:nvSpPr>
+        <p:spPr/>
+        <p:txBody>
+          <a:bodyPr/>
+          <a:lstStyle/>
+          <a:p>
+            <a:r>
+              <a:rPr lang="en-GB" dirty="0"/>
+              <a:t>Minimising Circuits</a:t>
+            </a:r>
+          </a:p>
+        </p:txBody>
+      </p:sp>
+      <p:sp>
+        <p:nvSpPr>
+          <p:cNvPr id="3" name="Content Placeholder 2">
+            <a:extLst>
+              <a:ext uri="{FF2B5EF4-FFF2-40B4-BE49-F238E27FC236}">
+                <a16:creationId xmlns:a16="http://schemas.microsoft.com/office/drawing/2014/main" id="{96EB671A-F2B7-CC36-0E15-057883196750}"/>
+              </a:ext>
+            </a:extLst>
+          </p:cNvPr>
+          <p:cNvSpPr>
+            <a:spLocks noGrp="1"/>
+          </p:cNvSpPr>
+          <p:nvPr>
+            <p:ph idx="1"/>
+          </p:nvPr>
+        </p:nvSpPr>
+        <p:spPr/>
+        <p:txBody>
+          <a:bodyPr/>
+          <a:lstStyle/>
+          <a:p>
+            <a:r>
+              <a:rPr lang="en-GB" dirty="0"/>
+              <a:t>To reduce the number of components</a:t>
+            </a:r>
+          </a:p>
+          <a:p>
+            <a:r>
+              <a:rPr lang="en-GB" dirty="0"/>
+              <a:t>Same as minimising logical function</a:t>
+            </a:r>
+          </a:p>
+        </p:txBody>
+      </p:sp>
+    </p:spTree>
+    <p:extLst>
+      <p:ext uri="{BB962C8B-B14F-4D97-AF65-F5344CB8AC3E}">
+        <p14:creationId xmlns:p14="http://schemas.microsoft.com/office/powerpoint/2010/main" val="666191990"/>
+      </p:ext>
+    </p:extLst>
+  </p:cSld>
+  <p:clrMapOvr>
+    <a:masterClrMapping/>
+  </p:clrMapOvr>
+</p:sld>
+</file>
+
+<file path=ppt/slides/slide40.xml><?xml version="1.0" encoding="utf-8"?>
 <p:sld xmlns:a="http://schemas.openxmlformats.org/drawingml/2006/main" xmlns:r="http://schemas.openxmlformats.org/officeDocument/2006/relationships" xmlns:p="http://schemas.openxmlformats.org/presentationml/2006/main">
   <p:cSld>
     <p:spTree>
@@ -32415,8 +32780,8 @@
           </a:p>
         </p:txBody>
       </p:sp>
-      <mc:AlternateContent xmlns:mc="http://schemas.openxmlformats.org/markup-compatibility/2006" xmlns:a14="http://schemas.microsoft.com/office/drawing/2010/main">
-        <mc:Choice Requires="a14">
+      <mc:AlternateContent xmlns:mc="http://schemas.openxmlformats.org/markup-compatibility/2006">
+        <mc:Choice xmlns:a14="http://schemas.microsoft.com/office/drawing/2010/main" Requires="a14">
           <p:sp>
             <p:nvSpPr>
               <p:cNvPr id="3" name="Content Placeholder 2">
@@ -32462,6 +32827,9 @@
                         <m:dPr>
                           <m:ctrlPr>
                             <a:rPr lang="en-GB" b="0" i="1" smtClean="0">
+                              <a:solidFill>
+                                <a:schemeClr val="accent2"/>
+                              </a:solidFill>
                               <a:latin typeface="Cambria Math" panose="02040503050406030204" pitchFamily="18" charset="0"/>
                             </a:rPr>
                           </m:ctrlPr>
@@ -32469,18 +32837,27 @@
                         <m:e>
                           <m:r>
                             <a:rPr lang="en-GB" i="1">
+                              <a:solidFill>
+                                <a:schemeClr val="accent2"/>
+                              </a:solidFill>
                               <a:latin typeface="Cambria Math" panose="02040503050406030204" pitchFamily="18" charset="0"/>
                             </a:rPr>
                             <m:t>𝐴</m:t>
                           </m:r>
                           <m:r>
                             <a:rPr lang="en-GB" i="1">
+                              <a:solidFill>
+                                <a:schemeClr val="accent2"/>
+                              </a:solidFill>
                               <a:latin typeface="Cambria Math" panose="02040503050406030204" pitchFamily="18" charset="0"/>
                             </a:rPr>
                             <m:t>∨</m:t>
                           </m:r>
                           <m:r>
                             <a:rPr lang="en-GB" i="1">
+                              <a:solidFill>
+                                <a:schemeClr val="accent2"/>
+                              </a:solidFill>
                               <a:latin typeface="Cambria Math" panose="02040503050406030204" pitchFamily="18" charset="0"/>
                             </a:rPr>
                             <m:t>𝐶</m:t>
@@ -32489,6 +32866,9 @@
                       </m:d>
                       <m:r>
                         <a:rPr lang="en-GB" b="0" i="1" smtClean="0">
+                          <a:solidFill>
+                            <a:schemeClr val="accent2"/>
+                          </a:solidFill>
                           <a:latin typeface="Cambria Math" panose="02040503050406030204" pitchFamily="18" charset="0"/>
                         </a:rPr>
                         <m:t>∧</m:t>
@@ -32497,6 +32877,9 @@
                         <m:dPr>
                           <m:ctrlPr>
                             <a:rPr lang="en-GB" b="0" i="1" smtClean="0">
+                              <a:solidFill>
+                                <a:schemeClr val="accent2"/>
+                              </a:solidFill>
                               <a:latin typeface="Cambria Math" panose="02040503050406030204" pitchFamily="18" charset="0"/>
                             </a:rPr>
                           </m:ctrlPr>
@@ -32504,18 +32887,27 @@
                         <m:e>
                           <m:r>
                             <a:rPr lang="en-GB" i="1">
+                              <a:solidFill>
+                                <a:schemeClr val="accent2"/>
+                              </a:solidFill>
                               <a:latin typeface="Cambria Math" panose="02040503050406030204" pitchFamily="18" charset="0"/>
                             </a:rPr>
                             <m:t>𝐶</m:t>
                           </m:r>
                           <m:r>
                             <a:rPr lang="en-GB" i="1">
+                              <a:solidFill>
+                                <a:schemeClr val="accent2"/>
+                              </a:solidFill>
                               <a:latin typeface="Cambria Math" panose="02040503050406030204" pitchFamily="18" charset="0"/>
                             </a:rPr>
                             <m:t>∨¬</m:t>
                           </m:r>
                           <m:r>
                             <a:rPr lang="en-GB" i="1">
+                              <a:solidFill>
+                                <a:schemeClr val="accent2"/>
+                              </a:solidFill>
                               <a:latin typeface="Cambria Math" panose="02040503050406030204" pitchFamily="18" charset="0"/>
                             </a:rPr>
                             <m:t>𝐷</m:t>
@@ -32524,6 +32916,9 @@
                       </m:d>
                       <m:r>
                         <a:rPr lang="en-GB" b="0" i="1" smtClean="0">
+                          <a:solidFill>
+                            <a:schemeClr val="accent2"/>
+                          </a:solidFill>
                           <a:latin typeface="Cambria Math" panose="02040503050406030204" pitchFamily="18" charset="0"/>
                         </a:rPr>
                         <m:t>∧</m:t>
@@ -32532,6 +32927,9 @@
                         <m:dPr>
                           <m:ctrlPr>
                             <a:rPr lang="en-GB" b="0" i="1" smtClean="0">
+                              <a:solidFill>
+                                <a:schemeClr val="accent2"/>
+                              </a:solidFill>
                               <a:latin typeface="Cambria Math" panose="02040503050406030204" pitchFamily="18" charset="0"/>
                             </a:rPr>
                           </m:ctrlPr>
@@ -32539,18 +32937,27 @@
                         <m:e>
                           <m:r>
                             <a:rPr lang="en-GB" i="1">
+                              <a:solidFill>
+                                <a:schemeClr val="accent2"/>
+                              </a:solidFill>
                               <a:latin typeface="Cambria Math" panose="02040503050406030204" pitchFamily="18" charset="0"/>
                             </a:rPr>
                             <m:t>𝐵</m:t>
                           </m:r>
                           <m:r>
                             <a:rPr lang="en-GB" i="1">
+                              <a:solidFill>
+                                <a:schemeClr val="accent2"/>
+                              </a:solidFill>
                               <a:latin typeface="Cambria Math" panose="02040503050406030204" pitchFamily="18" charset="0"/>
                             </a:rPr>
                             <m:t>∨</m:t>
                           </m:r>
                           <m:r>
                             <a:rPr lang="en-GB" i="1">
+                              <a:solidFill>
+                                <a:schemeClr val="accent2"/>
+                              </a:solidFill>
                               <a:latin typeface="Cambria Math" panose="02040503050406030204" pitchFamily="18" charset="0"/>
                             </a:rPr>
                             <m:t>𝐶</m:t>
@@ -32560,12 +32967,16 @@
                     </m:oMath>
                   </m:oMathPara>
                 </a14:m>
-                <a:endParaRPr lang="en-GB" b="0" dirty="0"/>
+                <a:endParaRPr lang="en-GB" b="0" dirty="0">
+                  <a:solidFill>
+                    <a:schemeClr val="accent2"/>
+                  </a:solidFill>
+                </a:endParaRPr>
               </a:p>
             </p:txBody>
           </p:sp>
         </mc:Choice>
-        <mc:Fallback xmlns="">
+        <mc:Fallback>
           <p:sp>
             <p:nvSpPr>
               <p:cNvPr id="3" name="Content Placeholder 2">
@@ -32599,7 +33010,7 @@
               <a:lstStyle/>
               <a:p>
                 <a:r>
-                  <a:rPr lang="en-GB">
+                  <a:rPr lang="zh-CN" altLang="en-US">
                     <a:noFill/>
                   </a:rPr>
                   <a:t> </a:t>
@@ -33614,7 +34025,7 @@
 </p:sld>
 </file>
 
-<file path=ppt/slides/slide42.xml><?xml version="1.0" encoding="utf-8"?>
+<file path=ppt/slides/slide41.xml><?xml version="1.0" encoding="utf-8"?>
 <p:sld xmlns:a="http://schemas.openxmlformats.org/drawingml/2006/main" xmlns:r="http://schemas.openxmlformats.org/officeDocument/2006/relationships" xmlns:p="http://schemas.openxmlformats.org/presentationml/2006/main">
   <p:cSld>
     <p:spTree>
@@ -34995,7 +35406,7 @@
 </p:sld>
 </file>
 
-<file path=ppt/slides/slide43.xml><?xml version="1.0" encoding="utf-8"?>
+<file path=ppt/slides/slide42.xml><?xml version="1.0" encoding="utf-8"?>
 <p:sld xmlns:a="http://schemas.openxmlformats.org/drawingml/2006/main" xmlns:r="http://schemas.openxmlformats.org/officeDocument/2006/relationships" xmlns:p="http://schemas.openxmlformats.org/presentationml/2006/main">
   <p:cSld>
     <p:spTree>
@@ -35107,98 +35518,6 @@
           <p:cNvPr id="2" name="Title 1">
             <a:extLst>
               <a:ext uri="{FF2B5EF4-FFF2-40B4-BE49-F238E27FC236}">
-                <a16:creationId xmlns:a16="http://schemas.microsoft.com/office/drawing/2014/main" id="{30C204C0-99CA-7A76-3BF0-751D278E195A}"/>
-              </a:ext>
-            </a:extLst>
-          </p:cNvPr>
-          <p:cNvSpPr>
-            <a:spLocks noGrp="1"/>
-          </p:cNvSpPr>
-          <p:nvPr>
-            <p:ph type="title"/>
-          </p:nvPr>
-        </p:nvSpPr>
-        <p:spPr/>
-        <p:txBody>
-          <a:bodyPr/>
-          <a:lstStyle/>
-          <a:p>
-            <a:r>
-              <a:rPr lang="en-GB" dirty="0"/>
-              <a:t>Minimising Circuits</a:t>
-            </a:r>
-          </a:p>
-        </p:txBody>
-      </p:sp>
-      <p:sp>
-        <p:nvSpPr>
-          <p:cNvPr id="3" name="Content Placeholder 2">
-            <a:extLst>
-              <a:ext uri="{FF2B5EF4-FFF2-40B4-BE49-F238E27FC236}">
-                <a16:creationId xmlns:a16="http://schemas.microsoft.com/office/drawing/2014/main" id="{96EB671A-F2B7-CC36-0E15-057883196750}"/>
-              </a:ext>
-            </a:extLst>
-          </p:cNvPr>
-          <p:cNvSpPr>
-            <a:spLocks noGrp="1"/>
-          </p:cNvSpPr>
-          <p:nvPr>
-            <p:ph idx="1"/>
-          </p:nvPr>
-        </p:nvSpPr>
-        <p:spPr/>
-        <p:txBody>
-          <a:bodyPr/>
-          <a:lstStyle/>
-          <a:p>
-            <a:r>
-              <a:rPr lang="en-GB" dirty="0"/>
-              <a:t>To reduce the number of components</a:t>
-            </a:r>
-          </a:p>
-          <a:p>
-            <a:r>
-              <a:rPr lang="en-GB" dirty="0"/>
-              <a:t>Same as minimising logical function</a:t>
-            </a:r>
-          </a:p>
-        </p:txBody>
-      </p:sp>
-    </p:spTree>
-    <p:extLst>
-      <p:ext uri="{BB962C8B-B14F-4D97-AF65-F5344CB8AC3E}">
-        <p14:creationId xmlns:p14="http://schemas.microsoft.com/office/powerpoint/2010/main" val="666191990"/>
-      </p:ext>
-    </p:extLst>
-  </p:cSld>
-  <p:clrMapOvr>
-    <a:masterClrMapping/>
-  </p:clrMapOvr>
-</p:sld>
-</file>
-
-<file path=ppt/slides/slide6.xml><?xml version="1.0" encoding="utf-8"?>
-<p:sld xmlns:a="http://schemas.openxmlformats.org/drawingml/2006/main" xmlns:r="http://schemas.openxmlformats.org/officeDocument/2006/relationships" xmlns:p="http://schemas.openxmlformats.org/presentationml/2006/main">
-  <p:cSld>
-    <p:spTree>
-      <p:nvGrpSpPr>
-        <p:cNvPr id="1" name=""/>
-        <p:cNvGrpSpPr/>
-        <p:nvPr/>
-      </p:nvGrpSpPr>
-      <p:grpSpPr>
-        <a:xfrm>
-          <a:off x="0" y="0"/>
-          <a:ext cx="0" cy="0"/>
-          <a:chOff x="0" y="0"/>
-          <a:chExt cx="0" cy="0"/>
-        </a:xfrm>
-      </p:grpSpPr>
-      <p:sp>
-        <p:nvSpPr>
-          <p:cNvPr id="2" name="Title 1">
-            <a:extLst>
-              <a:ext uri="{FF2B5EF4-FFF2-40B4-BE49-F238E27FC236}">
                 <a16:creationId xmlns:a16="http://schemas.microsoft.com/office/drawing/2014/main" id="{2C47F529-BB14-A670-D00C-2FC387C8E4BC}"/>
               </a:ext>
             </a:extLst>
@@ -35217,13 +35536,18 @@
           <a:p>
             <a:r>
               <a:rPr lang="en-GB" dirty="0"/>
-              <a:t>Karnaugh Maps</a:t>
+              <a:t>Karnaugh Maps(K-M</a:t>
             </a:r>
+            <a:r>
+              <a:rPr lang="en-US" altLang="zh-CN" dirty="0"/>
+              <a:t>ap)</a:t>
+            </a:r>
+            <a:endParaRPr lang="en-GB" dirty="0"/>
           </a:p>
         </p:txBody>
       </p:sp>
-      <mc:AlternateContent xmlns:mc="http://schemas.openxmlformats.org/markup-compatibility/2006" xmlns:a14="http://schemas.microsoft.com/office/drawing/2010/main">
-        <mc:Choice Requires="a14">
+      <mc:AlternateContent xmlns:mc="http://schemas.openxmlformats.org/markup-compatibility/2006">
+        <mc:Choice xmlns:a14="http://schemas.microsoft.com/office/drawing/2010/main" Requires="a14">
           <p:sp>
             <p:nvSpPr>
               <p:cNvPr id="3" name="Content Placeholder 2">
@@ -35258,13 +35582,20 @@
               </a:p>
               <a:p>
                 <a:r>
-                  <a:rPr lang="en-GB" dirty="0"/>
+                  <a:rPr lang="en-GB" dirty="0">
+                    <a:solidFill>
+                      <a:schemeClr val="accent2"/>
+                    </a:solidFill>
+                  </a:rPr>
                   <a:t>For </a:t>
                 </a:r>
                 <a14:m>
                   <m:oMath xmlns:m="http://schemas.openxmlformats.org/officeDocument/2006/math">
                     <m:r>
                       <a:rPr lang="en-GB" i="1" dirty="0" smtClean="0">
+                        <a:solidFill>
+                          <a:schemeClr val="accent2"/>
+                        </a:solidFill>
                         <a:latin typeface="Cambria Math" panose="02040503050406030204" pitchFamily="18" charset="0"/>
                       </a:rPr>
                       <m:t>𝑛</m:t>
@@ -35272,7 +35603,11 @@
                   </m:oMath>
                 </a14:m>
                 <a:r>
-                  <a:rPr lang="en-GB" dirty="0"/>
+                  <a:rPr lang="en-GB" dirty="0">
+                    <a:solidFill>
+                      <a:schemeClr val="accent2"/>
+                    </a:solidFill>
+                  </a:rPr>
                   <a:t> variables, map has </a:t>
                 </a:r>
                 <a14:m>
@@ -35281,6 +35616,9 @@
                       <m:sSupPr>
                         <m:ctrlPr>
                           <a:rPr lang="en-GB" b="0" i="1" dirty="0" smtClean="0">
+                            <a:solidFill>
+                              <a:schemeClr val="accent2"/>
+                            </a:solidFill>
                             <a:latin typeface="Cambria Math" panose="02040503050406030204" pitchFamily="18" charset="0"/>
                           </a:rPr>
                         </m:ctrlPr>
@@ -35288,6 +35626,9 @@
                       <m:e>
                         <m:r>
                           <a:rPr lang="en-GB" i="1" dirty="0" smtClean="0">
+                            <a:solidFill>
+                              <a:schemeClr val="accent2"/>
+                            </a:solidFill>
                             <a:latin typeface="Cambria Math" panose="02040503050406030204" pitchFamily="18" charset="0"/>
                           </a:rPr>
                           <m:t>2</m:t>
@@ -35296,6 +35637,9 @@
                       <m:sup>
                         <m:r>
                           <a:rPr lang="en-GB" i="1" dirty="0" smtClean="0">
+                            <a:solidFill>
+                              <a:schemeClr val="accent2"/>
+                            </a:solidFill>
                             <a:latin typeface="Cambria Math" panose="02040503050406030204" pitchFamily="18" charset="0"/>
                           </a:rPr>
                           <m:t>𝑛</m:t>
@@ -35305,14 +35649,30 @@
                   </m:oMath>
                 </a14:m>
                 <a:r>
-                  <a:rPr lang="en-GB" dirty="0"/>
+                  <a:rPr lang="en-GB" dirty="0">
+                    <a:solidFill>
+                      <a:schemeClr val="accent2"/>
+                    </a:solidFill>
+                  </a:rPr>
                   <a:t> squares</a:t>
                 </a:r>
               </a:p>
               <a:p>
                 <a:r>
                   <a:rPr lang="en-GB" dirty="0"/>
-                  <a:t>Note the labelling: 00, 01, 11, 10</a:t>
+                  <a:t>Note the labelling: 00, 01, </a:t>
+                </a:r>
+                <a:r>
+                  <a:rPr lang="en-GB" dirty="0">
+                    <a:solidFill>
+                      <a:schemeClr val="accent2"/>
+                    </a:solidFill>
+                  </a:rPr>
+                  <a:t>11</a:t>
+                </a:r>
+                <a:r>
+                  <a:rPr lang="en-GB" dirty="0"/>
+                  <a:t>, 10</a:t>
                 </a:r>
               </a:p>
               <a:p>
@@ -35334,7 +35694,7 @@
             </p:txBody>
           </p:sp>
         </mc:Choice>
-        <mc:Fallback xmlns="">
+        <mc:Fallback>
           <p:sp>
             <p:nvSpPr>
               <p:cNvPr id="3" name="Content Placeholder 2">
@@ -35364,7 +35724,7 @@
               <a:lstStyle/>
               <a:p>
                 <a:r>
-                  <a:rPr lang="en-GB">
+                  <a:rPr lang="zh-CN" altLang="en-US">
                     <a:noFill/>
                   </a:rPr>
                   <a:t> </a:t>
@@ -35436,7 +35796,7 @@
 </p:sld>
 </file>
 
-<file path=ppt/slides/slide7.xml><?xml version="1.0" encoding="utf-8"?>
+<file path=ppt/slides/slide6.xml><?xml version="1.0" encoding="utf-8"?>
 <p:sld xmlns:a="http://schemas.openxmlformats.org/drawingml/2006/main" xmlns:r="http://schemas.openxmlformats.org/officeDocument/2006/relationships" xmlns:p="http://schemas.openxmlformats.org/presentationml/2006/main">
   <p:cSld>
     <p:spTree>
@@ -35532,15 +35892,31 @@
           <a:p>
             <a:pPr lvl="1"/>
             <a:r>
+              <a:rPr lang="en-GB" dirty="0">
+                <a:solidFill>
+                  <a:schemeClr val="accent2"/>
+                </a:solidFill>
+              </a:rPr>
+              <a:t>Rows are the two values </a:t>
+            </a:r>
+            <a:r>
               <a:rPr lang="en-GB" dirty="0"/>
-              <a:t>Rows are the two values of variable A</a:t>
+              <a:t>of variable A</a:t>
             </a:r>
           </a:p>
           <a:p>
             <a:pPr lvl="1"/>
             <a:r>
+              <a:rPr lang="en-GB" dirty="0">
+                <a:solidFill>
+                  <a:schemeClr val="accent2"/>
+                </a:solidFill>
+              </a:rPr>
+              <a:t>Columns are the four possible values </a:t>
+            </a:r>
+            <a:r>
               <a:rPr lang="en-GB" dirty="0"/>
-              <a:t>Columns are the four possible values of B &amp; C</a:t>
+              <a:t>of B &amp; C</a:t>
             </a:r>
           </a:p>
           <a:p>
@@ -35552,21 +35928,49 @@
           <a:p>
             <a:pPr lvl="1"/>
             <a:r>
+              <a:rPr lang="en-GB" dirty="0">
+                <a:solidFill>
+                  <a:schemeClr val="accent2"/>
+                </a:solidFill>
+              </a:rPr>
+              <a:t>Rows are the four possible values </a:t>
+            </a:r>
+            <a:r>
               <a:rPr lang="en-GB" dirty="0"/>
-              <a:t>Rows are the four possible values of A &amp; B</a:t>
+              <a:t>of A &amp; B</a:t>
             </a:r>
           </a:p>
           <a:p>
             <a:pPr lvl="1"/>
             <a:r>
+              <a:rPr lang="en-GB" dirty="0">
+                <a:solidFill>
+                  <a:schemeClr val="accent2"/>
+                </a:solidFill>
+              </a:rPr>
+              <a:t>Columns are the four possible values </a:t>
+            </a:r>
+            <a:r>
               <a:rPr lang="en-GB" dirty="0"/>
-              <a:t>Columns are the four possible values of C &amp; D</a:t>
+              <a:t>of C &amp; D</a:t>
             </a:r>
           </a:p>
           <a:p>
             <a:r>
               <a:rPr lang="en-GB" dirty="0"/>
-              <a:t>Note that we use the sequence 00, 01 11, 10 for 2 values</a:t>
+              <a:t>Note that we use the sequence 00, 01 </a:t>
+            </a:r>
+            <a:r>
+              <a:rPr lang="en-GB" dirty="0">
+                <a:solidFill>
+                  <a:schemeClr val="accent2"/>
+                </a:solidFill>
+              </a:rPr>
+              <a:t>11</a:t>
+            </a:r>
+            <a:r>
+              <a:rPr lang="en-GB" dirty="0"/>
+              <a:t>, 10 for 2 values</a:t>
             </a:r>
           </a:p>
         </p:txBody>
@@ -35621,7 +36025,7 @@
 </p:sld>
 </file>
 
-<file path=ppt/slides/slide8.xml><?xml version="1.0" encoding="utf-8"?>
+<file path=ppt/slides/slide7.xml><?xml version="1.0" encoding="utf-8"?>
 <p:sld xmlns:a="http://schemas.openxmlformats.org/drawingml/2006/main" xmlns:r="http://schemas.openxmlformats.org/officeDocument/2006/relationships" xmlns:p="http://schemas.openxmlformats.org/presentationml/2006/main">
   <p:cSld>
     <p:spTree>
@@ -35682,16 +36086,33 @@
             <p:ph sz="half" idx="1"/>
           </p:nvPr>
         </p:nvSpPr>
-        <p:spPr/>
+        <p:spPr>
+          <a:xfrm>
+            <a:off x="201336" y="1825625"/>
+            <a:ext cx="5818464" cy="4351338"/>
+          </a:xfrm>
+        </p:spPr>
         <p:txBody>
           <a:bodyPr>
-            <a:normAutofit lnSpcReduction="10000"/>
+            <a:normAutofit fontScale="92500"/>
           </a:bodyPr>
           <a:lstStyle/>
           <a:p>
             <a:r>
               <a:rPr lang="en-GB" dirty="0"/>
-              <a:t>Look for groups of adjacent 1’s in map</a:t>
+              <a:t>Look for groups of </a:t>
+            </a:r>
+            <a:r>
+              <a:rPr lang="en-GB" dirty="0">
+                <a:solidFill>
+                  <a:schemeClr val="accent2"/>
+                </a:solidFill>
+              </a:rPr>
+              <a:t>adjacent 1’s </a:t>
+            </a:r>
+            <a:r>
+              <a:rPr lang="en-GB" dirty="0"/>
+              <a:t>in map</a:t>
             </a:r>
           </a:p>
           <a:p>
@@ -35704,52 +36125,243 @@
           <a:p>
             <a:pPr lvl="1"/>
             <a:r>
-              <a:rPr lang="en-GB" dirty="0"/>
-              <a:t>Lines of 1’s</a:t>
+              <a:rPr lang="en-GB" dirty="0" err="1">
+                <a:solidFill>
+                  <a:schemeClr val="accent2"/>
+                </a:solidFill>
+              </a:rPr>
+              <a:t>Lines,Squares</a:t>
             </a:r>
+            <a:r>
+              <a:rPr lang="en-GB" dirty="0">
+                <a:solidFill>
+                  <a:schemeClr val="accent2"/>
+                </a:solidFill>
+              </a:rPr>
+              <a:t> or rectangles of 1’s</a:t>
+            </a:r>
+          </a:p>
+          <a:p>
+            <a:pPr marL="457200" lvl="1" indent="0">
+              <a:lnSpc>
+                <a:spcPct val="100000"/>
+              </a:lnSpc>
+              <a:buNone/>
+            </a:pPr>
+            <a:r>
+              <a:rPr lang="en-GB" dirty="0">
+                <a:solidFill>
+                  <a:schemeClr val="bg2">
+                    <a:lumMod val="75000"/>
+                  </a:schemeClr>
+                </a:solidFill>
+              </a:rPr>
+              <a:t>    </a:t>
+            </a:r>
+            <a:r>
+              <a:rPr lang="en-US" dirty="0">
+                <a:solidFill>
+                  <a:schemeClr val="bg2">
+                    <a:lumMod val="75000"/>
+                  </a:schemeClr>
+                </a:solidFill>
+              </a:rPr>
+              <a:t>(</a:t>
+            </a:r>
+            <a:r>
+              <a:rPr lang="zh-CN" altLang="en-US" dirty="0">
+                <a:solidFill>
+                  <a:schemeClr val="bg2">
+                    <a:lumMod val="75000"/>
+                  </a:schemeClr>
+                </a:solidFill>
+              </a:rPr>
+              <a:t>水平垂直单行、正方形或矩形）</a:t>
+            </a:r>
+            <a:endParaRPr lang="en-GB" dirty="0">
+              <a:solidFill>
+                <a:schemeClr val="bg2">
+                  <a:lumMod val="75000"/>
+                </a:schemeClr>
+              </a:solidFill>
+            </a:endParaRPr>
           </a:p>
           <a:p>
             <a:pPr lvl="1"/>
             <a:r>
+              <a:rPr lang="en-GB" dirty="0">
+                <a:solidFill>
+                  <a:schemeClr val="accent2"/>
+                </a:solidFill>
+              </a:rPr>
+              <a:t>Groups of size 2</a:t>
+            </a:r>
+            <a:r>
+              <a:rPr lang="en-GB" baseline="30000" dirty="0">
+                <a:solidFill>
+                  <a:schemeClr val="accent2"/>
+                </a:solidFill>
+              </a:rPr>
+              <a:t>n</a:t>
+            </a:r>
+            <a:r>
+              <a:rPr lang="en-GB" dirty="0">
+                <a:solidFill>
+                  <a:schemeClr val="accent2"/>
+                </a:solidFill>
+              </a:rPr>
+              <a:t> only</a:t>
+            </a:r>
+            <a:r>
               <a:rPr lang="en-GB" dirty="0"/>
-              <a:t>Squares or rectangles of 1’s</a:t>
+              <a:t>: 1, 2, 4, 8, …</a:t>
             </a:r>
+          </a:p>
+          <a:p>
+            <a:pPr marL="457200" lvl="1" indent="0">
+              <a:lnSpc>
+                <a:spcPct val="110000"/>
+              </a:lnSpc>
+              <a:buNone/>
+            </a:pPr>
+            <a:r>
+              <a:rPr lang="en-GB" dirty="0">
+                <a:solidFill>
+                  <a:schemeClr val="bg2">
+                    <a:lumMod val="75000"/>
+                  </a:schemeClr>
+                </a:solidFill>
+              </a:rPr>
+              <a:t>   (</a:t>
+            </a:r>
+            <a:r>
+              <a:rPr lang="zh-CN" altLang="en-US" dirty="0">
+                <a:solidFill>
+                  <a:schemeClr val="bg2">
+                    <a:lumMod val="75000"/>
+                  </a:schemeClr>
+                </a:solidFill>
+              </a:rPr>
+              <a:t>组大小只能是</a:t>
+            </a:r>
+            <a:r>
+              <a:rPr lang="en-GB" dirty="0">
+                <a:solidFill>
+                  <a:schemeClr val="bg2">
+                    <a:lumMod val="75000"/>
+                  </a:schemeClr>
+                </a:solidFill>
+              </a:rPr>
+              <a:t>2</a:t>
+            </a:r>
+            <a:r>
+              <a:rPr lang="zh-CN" altLang="en-US" dirty="0">
+                <a:solidFill>
+                  <a:schemeClr val="bg2">
+                    <a:lumMod val="75000"/>
+                  </a:schemeClr>
+                </a:solidFill>
+              </a:rPr>
+              <a:t>的指数）</a:t>
+            </a:r>
+            <a:endParaRPr lang="en-GB" dirty="0">
+              <a:solidFill>
+                <a:schemeClr val="bg2">
+                  <a:lumMod val="75000"/>
+                </a:schemeClr>
+              </a:solidFill>
+            </a:endParaRPr>
           </a:p>
           <a:p>
             <a:pPr lvl="1"/>
             <a:r>
-              <a:rPr lang="en-GB" dirty="0"/>
-              <a:t>Groups of size 2</a:t>
-            </a:r>
-            <a:r>
-              <a:rPr lang="en-GB" baseline="30000" dirty="0"/>
-              <a:t>n</a:t>
+              <a:rPr lang="en-GB" dirty="0">
+                <a:solidFill>
+                  <a:schemeClr val="accent2"/>
+                </a:solidFill>
+              </a:rPr>
+              <a:t>Top/bottom, left/right sides wrap around </a:t>
             </a:r>
             <a:r>
               <a:rPr lang="en-GB" dirty="0"/>
-              <a:t> only: 1, 2, 4, 8, …</a:t>
-            </a:r>
-          </a:p>
-          <a:p>
-            <a:pPr lvl="1"/>
-            <a:r>
-              <a:rPr lang="en-GB" dirty="0"/>
-              <a:t>Top/bottom, left/right sides wrap around (see figures b, c</a:t>
+              <a:t>(see figures </a:t>
             </a:r>
             <a:r>
-              <a:rPr lang="en-GB"/>
-              <a:t>, f, </a:t>
+              <a:rPr lang="en-GB" dirty="0">
+                <a:solidFill>
+                  <a:schemeClr val="accent2"/>
+                </a:solidFill>
+              </a:rPr>
+              <a:t>b, c, f, h</a:t>
             </a:r>
             <a:r>
               <a:rPr lang="en-GB" dirty="0"/>
-              <a:t>h) when creating groups</a:t>
+              <a:t>) when creating groups</a:t>
             </a:r>
           </a:p>
           <a:p>
             <a:r>
               <a:rPr lang="en-GB" dirty="0"/>
-              <a:t>Try to make groups as large as possible</a:t>
+              <a:t>Try to make groups </a:t>
             </a:r>
+            <a:r>
+              <a:rPr lang="en-GB" dirty="0">
+                <a:solidFill>
+                  <a:schemeClr val="accent2"/>
+                </a:solidFill>
+              </a:rPr>
+              <a:t>as large as possible</a:t>
+            </a:r>
+          </a:p>
+          <a:p>
+            <a:pPr marL="0" indent="0">
+              <a:buNone/>
+            </a:pPr>
+            <a:r>
+              <a:rPr lang="en-GB" sz="2400" dirty="0">
+                <a:solidFill>
+                  <a:schemeClr val="accent2"/>
+                </a:solidFill>
+              </a:rPr>
+              <a:t>           </a:t>
+            </a:r>
+            <a:r>
+              <a:rPr lang="en-GB" sz="2400" dirty="0">
+                <a:solidFill>
+                  <a:schemeClr val="bg2">
+                    <a:lumMod val="75000"/>
+                  </a:schemeClr>
+                </a:solidFill>
+              </a:rPr>
+              <a:t>(</a:t>
+            </a:r>
+            <a:r>
+              <a:rPr lang="zh-CN" altLang="en-US" sz="2400" dirty="0">
+                <a:solidFill>
+                  <a:schemeClr val="bg2">
+                    <a:lumMod val="75000"/>
+                  </a:schemeClr>
+                </a:solidFill>
+              </a:rPr>
+              <a:t>搜索尽可能大的组</a:t>
+            </a:r>
+            <a:r>
+              <a:rPr lang="en-US" altLang="zh-CN" sz="2400" dirty="0">
+                <a:solidFill>
+                  <a:schemeClr val="bg2">
+                    <a:lumMod val="75000"/>
+                  </a:schemeClr>
+                </a:solidFill>
+              </a:rPr>
+              <a:t>)</a:t>
+            </a:r>
+            <a:endParaRPr lang="en-GB" sz="2400" dirty="0">
+              <a:solidFill>
+                <a:schemeClr val="bg2">
+                  <a:lumMod val="75000"/>
+                </a:schemeClr>
+              </a:solidFill>
+            </a:endParaRPr>
           </a:p>
           <a:p>
             <a:endParaRPr lang="en-GB" dirty="0"/>
@@ -35806,7 +36418,7 @@
 </p:sld>
 </file>
 
-<file path=ppt/slides/slide9.xml><?xml version="1.0" encoding="utf-8"?>
+<file path=ppt/slides/slide8.xml><?xml version="1.0" encoding="utf-8"?>
 <p:sld xmlns:a="http://schemas.openxmlformats.org/drawingml/2006/main" xmlns:r="http://schemas.openxmlformats.org/officeDocument/2006/relationships" xmlns:p="http://schemas.openxmlformats.org/presentationml/2006/main">
   <p:cSld>
     <p:spTree>
@@ -35846,13 +36458,33 @@
           <a:p>
             <a:r>
               <a:rPr lang="en-GB" dirty="0"/>
-              <a:t>Minimising Using Karnaugh Maps (DNF)</a:t>
+              <a:t>Minimising Using Karnaugh Maps (</a:t>
+            </a:r>
+            <a:r>
+              <a:rPr lang="en-GB" dirty="0">
+                <a:solidFill>
+                  <a:schemeClr val="accent2"/>
+                </a:solidFill>
+              </a:rPr>
+              <a:t>DNF 1</a:t>
+            </a:r>
+            <a:r>
+              <a:rPr lang="en-US" altLang="zh-CN" dirty="0">
+                <a:solidFill>
+                  <a:schemeClr val="accent2"/>
+                </a:solidFill>
+              </a:rPr>
+              <a:t>+1</a:t>
+            </a:r>
+            <a:r>
+              <a:rPr lang="en-GB" dirty="0"/>
+              <a:t>)</a:t>
             </a:r>
           </a:p>
         </p:txBody>
       </p:sp>
-      <mc:AlternateContent xmlns:mc="http://schemas.openxmlformats.org/markup-compatibility/2006" xmlns:a14="http://schemas.microsoft.com/office/drawing/2010/main">
-        <mc:Choice Requires="a14">
+      <mc:AlternateContent xmlns:mc="http://schemas.openxmlformats.org/markup-compatibility/2006">
+        <mc:Choice xmlns:a14="http://schemas.microsoft.com/office/drawing/2010/main" Requires="a14">
           <p:sp>
             <p:nvSpPr>
               <p:cNvPr id="3" name="Content Placeholder 2">
@@ -35898,7 +36530,15 @@
               <a:p>
                 <a:r>
                   <a:rPr lang="en-GB" dirty="0"/>
-                  <a:t>For remaining inputs create an AND term which evaluates to 1</a:t>
+                  <a:t>For remaining inputs </a:t>
+                </a:r>
+                <a:r>
+                  <a:rPr lang="en-GB" dirty="0">
+                    <a:solidFill>
+                      <a:schemeClr val="accent2"/>
+                    </a:solidFill>
+                  </a:rPr>
+                  <a:t>create an AND term which evaluates to 1</a:t>
                 </a:r>
               </a:p>
               <a:p>
@@ -36067,8 +36707,16 @@
               </a:p>
               <a:p>
                 <a:r>
+                  <a:rPr lang="en-GB" dirty="0">
+                    <a:solidFill>
+                      <a:schemeClr val="accent2"/>
+                    </a:solidFill>
+                  </a:rPr>
+                  <a:t>Terms are joined together by OR</a:t>
+                </a:r>
+                <a:r>
                   <a:rPr lang="en-GB" dirty="0"/>
-                  <a:t>Terms are joined together by OR.</a:t>
+                  <a:t>.</a:t>
                 </a:r>
               </a:p>
               <a:p>
@@ -36296,7 +36944,7 @@
             </p:txBody>
           </p:sp>
         </mc:Choice>
-        <mc:Fallback xmlns="">
+        <mc:Fallback>
           <p:sp>
             <p:nvSpPr>
               <p:cNvPr id="3" name="Content Placeholder 2">
@@ -36326,7 +36974,7 @@
               <a:lstStyle/>
               <a:p>
                 <a:r>
-                  <a:rPr lang="en-GB">
+                  <a:rPr lang="zh-CN" altLang="en-US">
                     <a:noFill/>
                   </a:rPr>
                   <a:t> </a:t>
@@ -36340,6 +36988,148 @@
     <p:extLst>
       <p:ext uri="{BB962C8B-B14F-4D97-AF65-F5344CB8AC3E}">
         <p14:creationId xmlns:p14="http://schemas.microsoft.com/office/powerpoint/2010/main" val="3428931588"/>
+      </p:ext>
+    </p:extLst>
+  </p:cSld>
+  <p:clrMapOvr>
+    <a:masterClrMapping/>
+  </p:clrMapOvr>
+</p:sld>
+</file>
+
+<file path=ppt/slides/slide9.xml><?xml version="1.0" encoding="utf-8"?>
+<p:sld xmlns:a="http://schemas.openxmlformats.org/drawingml/2006/main" xmlns:r="http://schemas.openxmlformats.org/officeDocument/2006/relationships" xmlns:p="http://schemas.openxmlformats.org/presentationml/2006/main">
+  <p:cSld>
+    <p:spTree>
+      <p:nvGrpSpPr>
+        <p:cNvPr id="1" name=""/>
+        <p:cNvGrpSpPr/>
+        <p:nvPr/>
+      </p:nvGrpSpPr>
+      <p:grpSpPr>
+        <a:xfrm>
+          <a:off x="0" y="0"/>
+          <a:ext cx="0" cy="0"/>
+          <a:chOff x="0" y="0"/>
+          <a:chExt cx="0" cy="0"/>
+        </a:xfrm>
+      </p:grpSpPr>
+      <p:sp>
+        <p:nvSpPr>
+          <p:cNvPr id="2" name="Title 1">
+            <a:extLst>
+              <a:ext uri="{FF2B5EF4-FFF2-40B4-BE49-F238E27FC236}">
+                <a16:creationId xmlns:a16="http://schemas.microsoft.com/office/drawing/2014/main" id="{671327DD-15A0-595C-B46B-6C1683BCF54E}"/>
+              </a:ext>
+            </a:extLst>
+          </p:cNvPr>
+          <p:cNvSpPr>
+            <a:spLocks noGrp="1"/>
+          </p:cNvSpPr>
+          <p:nvPr>
+            <p:ph type="title"/>
+          </p:nvPr>
+        </p:nvSpPr>
+        <p:spPr/>
+        <p:txBody>
+          <a:bodyPr/>
+          <a:lstStyle/>
+          <a:p>
+            <a:r>
+              <a:rPr lang="en-GB" dirty="0"/>
+              <a:t>Overlapping Groups(</a:t>
+            </a:r>
+            <a:r>
+              <a:rPr lang="zh-CN" altLang="en-US" dirty="0"/>
+              <a:t>覆盖组）</a:t>
+            </a:r>
+            <a:endParaRPr lang="en-GB" dirty="0"/>
+          </a:p>
+        </p:txBody>
+      </p:sp>
+      <p:sp>
+        <p:nvSpPr>
+          <p:cNvPr id="4" name="Content Placeholder 3">
+            <a:extLst>
+              <a:ext uri="{FF2B5EF4-FFF2-40B4-BE49-F238E27FC236}">
+                <a16:creationId xmlns:a16="http://schemas.microsoft.com/office/drawing/2014/main" id="{DCEB2E48-58F6-A2C4-254A-7FE9A98447CB}"/>
+              </a:ext>
+            </a:extLst>
+          </p:cNvPr>
+          <p:cNvSpPr>
+            <a:spLocks noGrp="1"/>
+          </p:cNvSpPr>
+          <p:nvPr>
+            <p:ph sz="half" idx="1"/>
+          </p:nvPr>
+        </p:nvSpPr>
+        <p:spPr/>
+        <p:txBody>
+          <a:bodyPr/>
+          <a:lstStyle/>
+          <a:p>
+            <a:r>
+              <a:rPr lang="en-GB" dirty="0"/>
+              <a:t>If you have overlapping groups</a:t>
+            </a:r>
+          </a:p>
+          <a:p>
+            <a:r>
+              <a:rPr lang="en-GB" dirty="0">
+                <a:solidFill>
+                  <a:schemeClr val="accent2"/>
+                </a:solidFill>
+              </a:rPr>
+              <a:t>Find the minimum number of largest groups to cover all 1’s </a:t>
+            </a:r>
+            <a:r>
+              <a:rPr lang="en-GB" dirty="0"/>
+              <a:t>(DNF) or 0’s (CNF)</a:t>
+            </a:r>
+          </a:p>
+        </p:txBody>
+      </p:sp>
+      <p:pic>
+        <p:nvPicPr>
+          <p:cNvPr id="6" name="Content Placeholder 5" descr="Diagram a displays the Karnaugh map for the function, F equals A bar B plus B C bar represented using a two dimensional array comprised of 2 rows and 4 columns with 8 squares. The values corresponding to the rows are 0 and 1 that are labeled, A and the column values corresponding to the combinations 0 0, 0 1, 1 1, and 1 0 are labeled, BC. The squares with a value 1 are as follows. (0, 1 1), (0, 1 0), and (1, 1 0). The adjacent pairs of 1is circled forming an overlapping group. Diagram b displays the Karnaugh map for the function, F equals B C bar D plus A C D represented using a two dimensional array comprised of 4 rows and 4 columns with 16 squares. The row values corresponding to the combinations 0 0, 0 1, 1 1, and 1 0 are labeled, AB and the column values corresponding to the combinations 0 0, 0 1, 1 1, and 1 0 are labeled, CD. The squares with a value 1 are as follows. (0 1, 0 1), (1 1, 0 1), (1 1, 1 1), and (1 0, 1 1). The adjacent pairs of 1is circled forming two overlapping groups." title="Two diagrams illustrate the Karnaugh Maps for overlapping groups. ">
+            <a:extLst>
+              <a:ext uri="{FF2B5EF4-FFF2-40B4-BE49-F238E27FC236}">
+                <a16:creationId xmlns:a16="http://schemas.microsoft.com/office/drawing/2014/main" id="{F8ACB1EE-BBA5-7AC6-3B72-518C596BB02B}"/>
+              </a:ext>
+            </a:extLst>
+          </p:cNvPr>
+          <p:cNvPicPr>
+            <a:picLocks noGrp="1" noChangeAspect="1"/>
+          </p:cNvPicPr>
+          <p:nvPr>
+            <p:ph sz="half" idx="2"/>
+          </p:nvPr>
+        </p:nvPicPr>
+        <p:blipFill rotWithShape="1">
+          <a:blip r:embed="rId2">
+            <a:extLst>
+              <a:ext uri="{28A0092B-C50C-407E-A947-70E740481C1C}">
+                <a14:useLocalDpi xmlns:a14="http://schemas.microsoft.com/office/drawing/2010/main" val="0"/>
+              </a:ext>
+            </a:extLst>
+          </a:blip>
+          <a:srcRect l="29290" t="15687" r="43535" b="41147"/>
+          <a:stretch/>
+        </p:blipFill>
+        <p:spPr>
+          <a:xfrm>
+            <a:off x="7704607" y="1825625"/>
+            <a:ext cx="2116785" cy="4351338"/>
+          </a:xfrm>
+          <a:prstGeom prst="rect">
+            <a:avLst/>
+          </a:prstGeom>
+        </p:spPr>
+      </p:pic>
+    </p:spTree>
+    <p:extLst>
+      <p:ext uri="{BB962C8B-B14F-4D97-AF65-F5344CB8AC3E}">
+        <p14:creationId xmlns:p14="http://schemas.microsoft.com/office/powerpoint/2010/main" val="836119605"/>
       </p:ext>
     </p:extLst>
   </p:cSld>

--- a/26fall/1860/Lecture/Week1.4/Lecture 1.4.2.pptx
+++ b/26fall/1860/Lecture/Week1.4/Lecture 1.4.2.pptx
@@ -46,7 +46,6 @@
     <p:sldId id="311" r:id="rId40"/>
     <p:sldId id="312" r:id="rId41"/>
     <p:sldId id="358" r:id="rId42"/>
-    <p:sldId id="259" r:id="rId43"/>
   </p:sldIdLst>
   <p:sldSz cx="12192000" cy="6858000"/>
   <p:notesSz cx="6858000" cy="9144000"/>
@@ -35406,96 +35405,6 @@
 </p:sld>
 </file>
 
-<file path=ppt/slides/slide42.xml><?xml version="1.0" encoding="utf-8"?>
-<p:sld xmlns:a="http://schemas.openxmlformats.org/drawingml/2006/main" xmlns:r="http://schemas.openxmlformats.org/officeDocument/2006/relationships" xmlns:p="http://schemas.openxmlformats.org/presentationml/2006/main">
-  <p:cSld>
-    <p:spTree>
-      <p:nvGrpSpPr>
-        <p:cNvPr id="1" name=""/>
-        <p:cNvGrpSpPr/>
-        <p:nvPr/>
-      </p:nvGrpSpPr>
-      <p:grpSpPr>
-        <a:xfrm>
-          <a:off x="0" y="0"/>
-          <a:ext cx="0" cy="0"/>
-          <a:chOff x="0" y="0"/>
-          <a:chExt cx="0" cy="0"/>
-        </a:xfrm>
-      </p:grpSpPr>
-      <p:sp>
-        <p:nvSpPr>
-          <p:cNvPr id="2" name="Title 1">
-            <a:extLst>
-              <a:ext uri="{FF2B5EF4-FFF2-40B4-BE49-F238E27FC236}">
-                <a16:creationId xmlns:a16="http://schemas.microsoft.com/office/drawing/2014/main" id="{F488A905-6317-3093-C51C-A73D2370E313}"/>
-              </a:ext>
-            </a:extLst>
-          </p:cNvPr>
-          <p:cNvSpPr>
-            <a:spLocks noGrp="1"/>
-          </p:cNvSpPr>
-          <p:nvPr>
-            <p:ph type="title"/>
-          </p:nvPr>
-        </p:nvSpPr>
-        <p:spPr/>
-        <p:txBody>
-          <a:bodyPr/>
-          <a:lstStyle/>
-          <a:p>
-            <a:r>
-              <a:rPr lang="en-GB" dirty="0"/>
-              <a:t>Summary</a:t>
-            </a:r>
-          </a:p>
-        </p:txBody>
-      </p:sp>
-      <p:sp>
-        <p:nvSpPr>
-          <p:cNvPr id="6" name="Content Placeholder 5">
-            <a:extLst>
-              <a:ext uri="{FF2B5EF4-FFF2-40B4-BE49-F238E27FC236}">
-                <a16:creationId xmlns:a16="http://schemas.microsoft.com/office/drawing/2014/main" id="{FDAEEB91-7A96-06FA-8C6E-C189F4CE309E}"/>
-              </a:ext>
-            </a:extLst>
-          </p:cNvPr>
-          <p:cNvSpPr>
-            <a:spLocks noGrp="1"/>
-          </p:cNvSpPr>
-          <p:nvPr>
-            <p:ph idx="1"/>
-          </p:nvPr>
-        </p:nvSpPr>
-        <p:spPr/>
-        <p:txBody>
-          <a:bodyPr/>
-          <a:lstStyle/>
-          <a:p>
-            <a:r>
-              <a:rPr lang="en-GB"/>
-              <a:t>Karnaugh </a:t>
-            </a:r>
-            <a:r>
-              <a:rPr lang="en-GB" dirty="0"/>
-              <a:t>Maps</a:t>
-            </a:r>
-          </a:p>
-        </p:txBody>
-      </p:sp>
-    </p:spTree>
-    <p:extLst>
-      <p:ext uri="{BB962C8B-B14F-4D97-AF65-F5344CB8AC3E}">
-        <p14:creationId xmlns:p14="http://schemas.microsoft.com/office/powerpoint/2010/main" val="506699912"/>
-      </p:ext>
-    </p:extLst>
-  </p:cSld>
-  <p:clrMapOvr>
-    <a:masterClrMapping/>
-  </p:clrMapOvr>
-</p:sld>
-</file>
-
 <file path=ppt/slides/slide5.xml><?xml version="1.0" encoding="utf-8"?>
 <p:sld xmlns:a="http://schemas.openxmlformats.org/drawingml/2006/main" xmlns:r="http://schemas.openxmlformats.org/officeDocument/2006/relationships" xmlns:p="http://schemas.openxmlformats.org/presentationml/2006/main">
   <p:cSld>

--- a/26fall/1860/Lecture/Week1.4/Lecture 1.4.2.pptx
+++ b/26fall/1860/Lecture/Week1.4/Lecture 1.4.2.pptx
@@ -10,42 +10,43 @@
     <p:sldId id="339" r:id="rId4"/>
     <p:sldId id="261" r:id="rId5"/>
     <p:sldId id="279" r:id="rId6"/>
-    <p:sldId id="295" r:id="rId7"/>
-    <p:sldId id="303" r:id="rId8"/>
-    <p:sldId id="340" r:id="rId9"/>
-    <p:sldId id="315" r:id="rId10"/>
-    <p:sldId id="288" r:id="rId11"/>
-    <p:sldId id="289" r:id="rId12"/>
-    <p:sldId id="341" r:id="rId13"/>
-    <p:sldId id="342" r:id="rId14"/>
-    <p:sldId id="293" r:id="rId15"/>
-    <p:sldId id="294" r:id="rId16"/>
-    <p:sldId id="344" r:id="rId17"/>
-    <p:sldId id="345" r:id="rId18"/>
-    <p:sldId id="347" r:id="rId19"/>
-    <p:sldId id="348" r:id="rId20"/>
-    <p:sldId id="346" r:id="rId21"/>
-    <p:sldId id="353" r:id="rId22"/>
-    <p:sldId id="301" r:id="rId23"/>
-    <p:sldId id="305" r:id="rId24"/>
-    <p:sldId id="306" r:id="rId25"/>
-    <p:sldId id="307" r:id="rId26"/>
-    <p:sldId id="313" r:id="rId27"/>
-    <p:sldId id="304" r:id="rId28"/>
-    <p:sldId id="296" r:id="rId29"/>
-    <p:sldId id="297" r:id="rId30"/>
-    <p:sldId id="299" r:id="rId31"/>
-    <p:sldId id="314" r:id="rId32"/>
-    <p:sldId id="349" r:id="rId33"/>
-    <p:sldId id="350" r:id="rId34"/>
-    <p:sldId id="351" r:id="rId35"/>
-    <p:sldId id="352" r:id="rId36"/>
-    <p:sldId id="308" r:id="rId37"/>
-    <p:sldId id="309" r:id="rId38"/>
-    <p:sldId id="310" r:id="rId39"/>
-    <p:sldId id="311" r:id="rId40"/>
-    <p:sldId id="312" r:id="rId41"/>
-    <p:sldId id="358" r:id="rId42"/>
+    <p:sldId id="359" r:id="rId7"/>
+    <p:sldId id="295" r:id="rId8"/>
+    <p:sldId id="303" r:id="rId9"/>
+    <p:sldId id="340" r:id="rId10"/>
+    <p:sldId id="315" r:id="rId11"/>
+    <p:sldId id="288" r:id="rId12"/>
+    <p:sldId id="289" r:id="rId13"/>
+    <p:sldId id="341" r:id="rId14"/>
+    <p:sldId id="342" r:id="rId15"/>
+    <p:sldId id="293" r:id="rId16"/>
+    <p:sldId id="294" r:id="rId17"/>
+    <p:sldId id="344" r:id="rId18"/>
+    <p:sldId id="345" r:id="rId19"/>
+    <p:sldId id="347" r:id="rId20"/>
+    <p:sldId id="348" r:id="rId21"/>
+    <p:sldId id="346" r:id="rId22"/>
+    <p:sldId id="353" r:id="rId23"/>
+    <p:sldId id="301" r:id="rId24"/>
+    <p:sldId id="305" r:id="rId25"/>
+    <p:sldId id="306" r:id="rId26"/>
+    <p:sldId id="307" r:id="rId27"/>
+    <p:sldId id="313" r:id="rId28"/>
+    <p:sldId id="304" r:id="rId29"/>
+    <p:sldId id="296" r:id="rId30"/>
+    <p:sldId id="297" r:id="rId31"/>
+    <p:sldId id="299" r:id="rId32"/>
+    <p:sldId id="314" r:id="rId33"/>
+    <p:sldId id="349" r:id="rId34"/>
+    <p:sldId id="350" r:id="rId35"/>
+    <p:sldId id="351" r:id="rId36"/>
+    <p:sldId id="352" r:id="rId37"/>
+    <p:sldId id="308" r:id="rId38"/>
+    <p:sldId id="309" r:id="rId39"/>
+    <p:sldId id="310" r:id="rId40"/>
+    <p:sldId id="311" r:id="rId41"/>
+    <p:sldId id="312" r:id="rId42"/>
+    <p:sldId id="358" r:id="rId43"/>
   </p:sldIdLst>
   <p:sldSz cx="12192000" cy="6858000"/>
   <p:notesSz cx="6858000" cy="9144000"/>
@@ -1716,7 +1717,7 @@
           <a:p>
             <a:fld id="{F63F5758-9E5B-4149-91B8-267E55E5CF63}" type="datetimeFigureOut">
               <a:rPr lang="en-GB" smtClean="0"/>
-              <a:t>19/10/2026</a:t>
+              <a:t>21/10/2026</a:t>
             </a:fld>
             <a:endParaRPr lang="en-GB" dirty="0"/>
           </a:p>
@@ -1916,7 +1917,7 @@
           <a:p>
             <a:fld id="{F63F5758-9E5B-4149-91B8-267E55E5CF63}" type="datetimeFigureOut">
               <a:rPr lang="en-GB" smtClean="0"/>
-              <a:t>19/10/2026</a:t>
+              <a:t>21/10/2026</a:t>
             </a:fld>
             <a:endParaRPr lang="en-GB" dirty="0"/>
           </a:p>
@@ -2126,7 +2127,7 @@
           <a:p>
             <a:fld id="{F63F5758-9E5B-4149-91B8-267E55E5CF63}" type="datetimeFigureOut">
               <a:rPr lang="en-GB" smtClean="0"/>
-              <a:t>19/10/2026</a:t>
+              <a:t>21/10/2026</a:t>
             </a:fld>
             <a:endParaRPr lang="en-GB" dirty="0"/>
           </a:p>
@@ -2326,7 +2327,7 @@
           <a:p>
             <a:fld id="{F63F5758-9E5B-4149-91B8-267E55E5CF63}" type="datetimeFigureOut">
               <a:rPr lang="en-GB" smtClean="0"/>
-              <a:t>19/10/2026</a:t>
+              <a:t>21/10/2026</a:t>
             </a:fld>
             <a:endParaRPr lang="en-GB" dirty="0"/>
           </a:p>
@@ -2602,7 +2603,7 @@
           <a:p>
             <a:fld id="{F63F5758-9E5B-4149-91B8-267E55E5CF63}" type="datetimeFigureOut">
               <a:rPr lang="en-GB" smtClean="0"/>
-              <a:t>19/10/2026</a:t>
+              <a:t>21/10/2026</a:t>
             </a:fld>
             <a:endParaRPr lang="en-GB" dirty="0"/>
           </a:p>
@@ -2870,7 +2871,7 @@
           <a:p>
             <a:fld id="{F63F5758-9E5B-4149-91B8-267E55E5CF63}" type="datetimeFigureOut">
               <a:rPr lang="en-GB" smtClean="0"/>
-              <a:t>19/10/2026</a:t>
+              <a:t>21/10/2026</a:t>
             </a:fld>
             <a:endParaRPr lang="en-GB" dirty="0"/>
           </a:p>
@@ -3285,7 +3286,7 @@
           <a:p>
             <a:fld id="{F63F5758-9E5B-4149-91B8-267E55E5CF63}" type="datetimeFigureOut">
               <a:rPr lang="en-GB" smtClean="0"/>
-              <a:t>19/10/2026</a:t>
+              <a:t>21/10/2026</a:t>
             </a:fld>
             <a:endParaRPr lang="en-GB" dirty="0"/>
           </a:p>
@@ -3427,7 +3428,7 @@
           <a:p>
             <a:fld id="{F63F5758-9E5B-4149-91B8-267E55E5CF63}" type="datetimeFigureOut">
               <a:rPr lang="en-GB" smtClean="0"/>
-              <a:t>19/10/2026</a:t>
+              <a:t>21/10/2026</a:t>
             </a:fld>
             <a:endParaRPr lang="en-GB" dirty="0"/>
           </a:p>
@@ -3540,7 +3541,7 @@
           <a:p>
             <a:fld id="{F63F5758-9E5B-4149-91B8-267E55E5CF63}" type="datetimeFigureOut">
               <a:rPr lang="en-GB" smtClean="0"/>
-              <a:t>19/10/2026</a:t>
+              <a:t>21/10/2026</a:t>
             </a:fld>
             <a:endParaRPr lang="en-GB" dirty="0"/>
           </a:p>
@@ -3853,7 +3854,7 @@
           <a:p>
             <a:fld id="{F63F5758-9E5B-4149-91B8-267E55E5CF63}" type="datetimeFigureOut">
               <a:rPr lang="en-GB" smtClean="0"/>
-              <a:t>19/10/2026</a:t>
+              <a:t>21/10/2026</a:t>
             </a:fld>
             <a:endParaRPr lang="en-GB" dirty="0"/>
           </a:p>
@@ -4142,7 +4143,7 @@
           <a:p>
             <a:fld id="{F63F5758-9E5B-4149-91B8-267E55E5CF63}" type="datetimeFigureOut">
               <a:rPr lang="en-GB" smtClean="0"/>
-              <a:t>19/10/2026</a:t>
+              <a:t>21/10/2026</a:t>
             </a:fld>
             <a:endParaRPr lang="en-GB" dirty="0"/>
           </a:p>
@@ -4394,7 +4395,7 @@
           <a:p>
             <a:fld id="{F63F5758-9E5B-4149-91B8-267E55E5CF63}" type="datetimeFigureOut">
               <a:rPr lang="en-GB" smtClean="0"/>
-              <a:t>19/10/2026</a:t>
+              <a:t>21/10/2026</a:t>
             </a:fld>
             <a:endParaRPr lang="en-GB" dirty="0"/>
           </a:p>
@@ -4922,6 +4923,148 @@
       </p:grpSpPr>
       <p:sp>
         <p:nvSpPr>
+          <p:cNvPr id="2" name="Title 1">
+            <a:extLst>
+              <a:ext uri="{FF2B5EF4-FFF2-40B4-BE49-F238E27FC236}">
+                <a16:creationId xmlns:a16="http://schemas.microsoft.com/office/drawing/2014/main" id="{671327DD-15A0-595C-B46B-6C1683BCF54E}"/>
+              </a:ext>
+            </a:extLst>
+          </p:cNvPr>
+          <p:cNvSpPr>
+            <a:spLocks noGrp="1"/>
+          </p:cNvSpPr>
+          <p:nvPr>
+            <p:ph type="title"/>
+          </p:nvPr>
+        </p:nvSpPr>
+        <p:spPr/>
+        <p:txBody>
+          <a:bodyPr/>
+          <a:lstStyle/>
+          <a:p>
+            <a:r>
+              <a:rPr lang="en-GB" dirty="0"/>
+              <a:t>Overlapping Groups(</a:t>
+            </a:r>
+            <a:r>
+              <a:rPr lang="zh-CN" altLang="en-US" dirty="0"/>
+              <a:t>覆盖组）</a:t>
+            </a:r>
+            <a:endParaRPr lang="en-GB" dirty="0"/>
+          </a:p>
+        </p:txBody>
+      </p:sp>
+      <p:sp>
+        <p:nvSpPr>
+          <p:cNvPr id="4" name="Content Placeholder 3">
+            <a:extLst>
+              <a:ext uri="{FF2B5EF4-FFF2-40B4-BE49-F238E27FC236}">
+                <a16:creationId xmlns:a16="http://schemas.microsoft.com/office/drawing/2014/main" id="{DCEB2E48-58F6-A2C4-254A-7FE9A98447CB}"/>
+              </a:ext>
+            </a:extLst>
+          </p:cNvPr>
+          <p:cNvSpPr>
+            <a:spLocks noGrp="1"/>
+          </p:cNvSpPr>
+          <p:nvPr>
+            <p:ph sz="half" idx="1"/>
+          </p:nvPr>
+        </p:nvSpPr>
+        <p:spPr/>
+        <p:txBody>
+          <a:bodyPr/>
+          <a:lstStyle/>
+          <a:p>
+            <a:r>
+              <a:rPr lang="en-GB" dirty="0"/>
+              <a:t>If you have overlapping groups</a:t>
+            </a:r>
+          </a:p>
+          <a:p>
+            <a:r>
+              <a:rPr lang="en-GB" dirty="0">
+                <a:solidFill>
+                  <a:schemeClr val="accent2"/>
+                </a:solidFill>
+              </a:rPr>
+              <a:t>Find the minimum number of largest groups to cover all 1’s </a:t>
+            </a:r>
+            <a:r>
+              <a:rPr lang="en-GB" dirty="0"/>
+              <a:t>(DNF) or 0’s (CNF)</a:t>
+            </a:r>
+          </a:p>
+        </p:txBody>
+      </p:sp>
+      <p:pic>
+        <p:nvPicPr>
+          <p:cNvPr id="6" name="Content Placeholder 5" descr="Diagram a displays the Karnaugh map for the function, F equals A bar B plus B C bar represented using a two dimensional array comprised of 2 rows and 4 columns with 8 squares. The values corresponding to the rows are 0 and 1 that are labeled, A and the column values corresponding to the combinations 0 0, 0 1, 1 1, and 1 0 are labeled, BC. The squares with a value 1 are as follows. (0, 1 1), (0, 1 0), and (1, 1 0). The adjacent pairs of 1is circled forming an overlapping group. Diagram b displays the Karnaugh map for the function, F equals B C bar D plus A C D represented using a two dimensional array comprised of 4 rows and 4 columns with 16 squares. The row values corresponding to the combinations 0 0, 0 1, 1 1, and 1 0 are labeled, AB and the column values corresponding to the combinations 0 0, 0 1, 1 1, and 1 0 are labeled, CD. The squares with a value 1 are as follows. (0 1, 0 1), (1 1, 0 1), (1 1, 1 1), and (1 0, 1 1). The adjacent pairs of 1is circled forming two overlapping groups." title="Two diagrams illustrate the Karnaugh Maps for overlapping groups. ">
+            <a:extLst>
+              <a:ext uri="{FF2B5EF4-FFF2-40B4-BE49-F238E27FC236}">
+                <a16:creationId xmlns:a16="http://schemas.microsoft.com/office/drawing/2014/main" id="{F8ACB1EE-BBA5-7AC6-3B72-518C596BB02B}"/>
+              </a:ext>
+            </a:extLst>
+          </p:cNvPr>
+          <p:cNvPicPr>
+            <a:picLocks noGrp="1" noChangeAspect="1"/>
+          </p:cNvPicPr>
+          <p:nvPr>
+            <p:ph sz="half" idx="2"/>
+          </p:nvPr>
+        </p:nvPicPr>
+        <p:blipFill rotWithShape="1">
+          <a:blip r:embed="rId2">
+            <a:extLst>
+              <a:ext uri="{28A0092B-C50C-407E-A947-70E740481C1C}">
+                <a14:useLocalDpi xmlns:a14="http://schemas.microsoft.com/office/drawing/2010/main" val="0"/>
+              </a:ext>
+            </a:extLst>
+          </a:blip>
+          <a:srcRect l="29290" t="15687" r="43535" b="41147"/>
+          <a:stretch/>
+        </p:blipFill>
+        <p:spPr>
+          <a:xfrm>
+            <a:off x="7704607" y="1825625"/>
+            <a:ext cx="2116785" cy="4351338"/>
+          </a:xfrm>
+          <a:prstGeom prst="rect">
+            <a:avLst/>
+          </a:prstGeom>
+        </p:spPr>
+      </p:pic>
+    </p:spTree>
+    <p:extLst>
+      <p:ext uri="{BB962C8B-B14F-4D97-AF65-F5344CB8AC3E}">
+        <p14:creationId xmlns:p14="http://schemas.microsoft.com/office/powerpoint/2010/main" val="836119605"/>
+      </p:ext>
+    </p:extLst>
+  </p:cSld>
+  <p:clrMapOvr>
+    <a:masterClrMapping/>
+  </p:clrMapOvr>
+</p:sld>
+</file>
+
+<file path=ppt/slides/slide11.xml><?xml version="1.0" encoding="utf-8"?>
+<p:sld xmlns:a="http://schemas.openxmlformats.org/drawingml/2006/main" xmlns:r="http://schemas.openxmlformats.org/officeDocument/2006/relationships" xmlns:p="http://schemas.openxmlformats.org/presentationml/2006/main">
+  <p:cSld>
+    <p:spTree>
+      <p:nvGrpSpPr>
+        <p:cNvPr id="1" name=""/>
+        <p:cNvGrpSpPr/>
+        <p:nvPr/>
+      </p:nvGrpSpPr>
+      <p:grpSpPr>
+        <a:xfrm>
+          <a:off x="0" y="0"/>
+          <a:ext cx="0" cy="0"/>
+          <a:chOff x="0" y="0"/>
+          <a:chExt cx="0" cy="0"/>
+        </a:xfrm>
+      </p:grpSpPr>
+      <p:sp>
+        <p:nvSpPr>
           <p:cNvPr id="7" name="Title 6">
             <a:extLst>
               <a:ext uri="{FF2B5EF4-FFF2-40B4-BE49-F238E27FC236}">
@@ -6080,7 +6223,7 @@
 </p:sld>
 </file>
 
-<file path=ppt/slides/slide11.xml><?xml version="1.0" encoding="utf-8"?>
+<file path=ppt/slides/slide12.xml><?xml version="1.0" encoding="utf-8"?>
 <p:sld xmlns:a="http://schemas.openxmlformats.org/drawingml/2006/main" xmlns:r="http://schemas.openxmlformats.org/officeDocument/2006/relationships" xmlns:p="http://schemas.openxmlformats.org/presentationml/2006/main">
   <p:cSld>
     <p:spTree>
@@ -6125,8 +6268,8 @@
           </a:p>
         </p:txBody>
       </p:sp>
-      <mc:AlternateContent xmlns:mc="http://schemas.openxmlformats.org/markup-compatibility/2006">
-        <mc:Choice xmlns:a14="http://schemas.microsoft.com/office/drawing/2010/main" Requires="a14">
+      <mc:AlternateContent xmlns:mc="http://schemas.openxmlformats.org/markup-compatibility/2006" xmlns:a14="http://schemas.microsoft.com/office/drawing/2010/main">
+        <mc:Choice Requires="a14">
           <p:sp>
             <p:nvSpPr>
               <p:cNvPr id="8" name="Content Placeholder 7">
@@ -6269,7 +6412,7 @@
             </p:txBody>
           </p:sp>
         </mc:Choice>
-        <mc:Fallback>
+        <mc:Fallback xmlns="">
           <p:sp>
             <p:nvSpPr>
               <p:cNvPr id="8" name="Content Placeholder 7">
@@ -7053,7 +7196,7 @@
 </p:sld>
 </file>
 
-<file path=ppt/slides/slide12.xml><?xml version="1.0" encoding="utf-8"?>
+<file path=ppt/slides/slide13.xml><?xml version="1.0" encoding="utf-8"?>
 <p:sld xmlns:a="http://schemas.openxmlformats.org/drawingml/2006/main" xmlns:r="http://schemas.openxmlformats.org/officeDocument/2006/relationships" xmlns:p="http://schemas.openxmlformats.org/presentationml/2006/main">
   <p:cSld>
     <p:spTree>
@@ -7172,8 +7315,8 @@
           </a:p>
         </p:txBody>
       </p:sp>
-      <mc:AlternateContent xmlns:mc="http://schemas.openxmlformats.org/markup-compatibility/2006">
-        <mc:Choice xmlns:a14="http://schemas.microsoft.com/office/drawing/2010/main" Requires="a14">
+      <mc:AlternateContent xmlns:mc="http://schemas.openxmlformats.org/markup-compatibility/2006" xmlns:a14="http://schemas.microsoft.com/office/drawing/2010/main">
+        <mc:Choice Requires="a14">
           <p:sp>
             <p:nvSpPr>
               <p:cNvPr id="4" name="Content Placeholder 3">
@@ -7485,7 +7628,7 @@
             </p:txBody>
           </p:sp>
         </mc:Choice>
-        <mc:Fallback>
+        <mc:Fallback xmlns="">
           <p:sp>
             <p:nvSpPr>
               <p:cNvPr id="4" name="Content Placeholder 3">
@@ -7994,7 +8137,7 @@
 </p:sld>
 </file>
 
-<file path=ppt/slides/slide13.xml><?xml version="1.0" encoding="utf-8"?>
+<file path=ppt/slides/slide14.xml><?xml version="1.0" encoding="utf-8"?>
 <p:sld xmlns:a="http://schemas.openxmlformats.org/drawingml/2006/main" xmlns:r="http://schemas.openxmlformats.org/officeDocument/2006/relationships" xmlns:p="http://schemas.openxmlformats.org/presentationml/2006/main">
   <p:cSld>
     <p:spTree>
@@ -8039,8 +8182,8 @@
           </a:p>
         </p:txBody>
       </p:sp>
-      <mc:AlternateContent xmlns:mc="http://schemas.openxmlformats.org/markup-compatibility/2006">
-        <mc:Choice xmlns:a14="http://schemas.microsoft.com/office/drawing/2010/main" Requires="a14">
+      <mc:AlternateContent xmlns:mc="http://schemas.openxmlformats.org/markup-compatibility/2006" xmlns:a14="http://schemas.microsoft.com/office/drawing/2010/main">
+        <mc:Choice Requires="a14">
           <p:sp>
             <p:nvSpPr>
               <p:cNvPr id="5" name="Content Placeholder 4">
@@ -8478,7 +8621,7 @@
             </p:txBody>
           </p:sp>
         </mc:Choice>
-        <mc:Fallback>
+        <mc:Fallback xmlns="">
           <p:sp>
             <p:nvSpPr>
               <p:cNvPr id="5" name="Content Placeholder 4">
@@ -8531,7 +8674,7 @@
 </p:sld>
 </file>
 
-<file path=ppt/slides/slide14.xml><?xml version="1.0" encoding="utf-8"?>
+<file path=ppt/slides/slide15.xml><?xml version="1.0" encoding="utf-8"?>
 <p:sld xmlns:a="http://schemas.openxmlformats.org/drawingml/2006/main" xmlns:r="http://schemas.openxmlformats.org/officeDocument/2006/relationships" xmlns:p="http://schemas.openxmlformats.org/presentationml/2006/main">
   <p:cSld>
     <p:spTree>
@@ -8576,8 +8719,8 @@
           </a:p>
         </p:txBody>
       </p:sp>
-      <mc:AlternateContent xmlns:mc="http://schemas.openxmlformats.org/markup-compatibility/2006">
-        <mc:Choice xmlns:a14="http://schemas.microsoft.com/office/drawing/2010/main" Requires="a14">
+      <mc:AlternateContent xmlns:mc="http://schemas.openxmlformats.org/markup-compatibility/2006" xmlns:a14="http://schemas.microsoft.com/office/drawing/2010/main">
+        <mc:Choice Requires="a14">
           <p:sp>
             <p:nvSpPr>
               <p:cNvPr id="8" name="Content Placeholder 7">
@@ -8672,7 +8815,7 @@
             </p:txBody>
           </p:sp>
         </mc:Choice>
-        <mc:Fallback>
+        <mc:Fallback xmlns="">
           <p:sp>
             <p:nvSpPr>
               <p:cNvPr id="8" name="Content Placeholder 7">
@@ -9182,7 +9325,7 @@
 </p:sld>
 </file>
 
-<file path=ppt/slides/slide15.xml><?xml version="1.0" encoding="utf-8"?>
+<file path=ppt/slides/slide16.xml><?xml version="1.0" encoding="utf-8"?>
 <p:sld xmlns:a="http://schemas.openxmlformats.org/drawingml/2006/main" xmlns:r="http://schemas.openxmlformats.org/officeDocument/2006/relationships" xmlns:p="http://schemas.openxmlformats.org/presentationml/2006/main">
   <p:cSld>
     <p:spTree>
@@ -9227,8 +9370,8 @@
           </a:p>
         </p:txBody>
       </p:sp>
-      <mc:AlternateContent xmlns:mc="http://schemas.openxmlformats.org/markup-compatibility/2006">
-        <mc:Choice xmlns:a14="http://schemas.microsoft.com/office/drawing/2010/main" Requires="a14">
+      <mc:AlternateContent xmlns:mc="http://schemas.openxmlformats.org/markup-compatibility/2006" xmlns:a14="http://schemas.microsoft.com/office/drawing/2010/main">
+        <mc:Choice Requires="a14">
           <p:sp>
             <p:nvSpPr>
               <p:cNvPr id="8" name="Content Placeholder 7">
@@ -9380,7 +9523,7 @@
             </p:txBody>
           </p:sp>
         </mc:Choice>
-        <mc:Fallback>
+        <mc:Fallback xmlns="">
           <p:sp>
             <p:nvSpPr>
               <p:cNvPr id="8" name="Content Placeholder 7">
@@ -9993,7 +10136,7 @@
 </p:sld>
 </file>
 
-<file path=ppt/slides/slide16.xml><?xml version="1.0" encoding="utf-8"?>
+<file path=ppt/slides/slide17.xml><?xml version="1.0" encoding="utf-8"?>
 <p:sld xmlns:a="http://schemas.openxmlformats.org/drawingml/2006/main" xmlns:r="http://schemas.openxmlformats.org/officeDocument/2006/relationships" xmlns:p="http://schemas.openxmlformats.org/presentationml/2006/main">
   <p:cSld>
     <p:spTree>
@@ -10917,7 +11060,7 @@
 </p:sld>
 </file>
 
-<file path=ppt/slides/slide17.xml><?xml version="1.0" encoding="utf-8"?>
+<file path=ppt/slides/slide18.xml><?xml version="1.0" encoding="utf-8"?>
 <p:sld xmlns:a="http://schemas.openxmlformats.org/drawingml/2006/main" xmlns:r="http://schemas.openxmlformats.org/officeDocument/2006/relationships" xmlns:p="http://schemas.openxmlformats.org/presentationml/2006/main">
   <p:cSld>
     <p:spTree>
@@ -11029,8 +11172,8 @@
           </a:p>
         </p:txBody>
       </p:sp>
-      <mc:AlternateContent xmlns:mc="http://schemas.openxmlformats.org/markup-compatibility/2006">
-        <mc:Choice xmlns:a14="http://schemas.microsoft.com/office/drawing/2010/main" Requires="a14">
+      <mc:AlternateContent xmlns:mc="http://schemas.openxmlformats.org/markup-compatibility/2006" xmlns:a14="http://schemas.microsoft.com/office/drawing/2010/main">
+        <mc:Choice Requires="a14">
           <p:sp>
             <p:nvSpPr>
               <p:cNvPr id="4" name="Content Placeholder 3">
@@ -11118,7 +11261,7 @@
             </p:txBody>
           </p:sp>
         </mc:Choice>
-        <mc:Fallback>
+        <mc:Fallback xmlns="">
           <p:sp>
             <p:nvSpPr>
               <p:cNvPr id="4" name="Content Placeholder 3">
@@ -11627,7 +11770,7 @@
 </p:sld>
 </file>
 
-<file path=ppt/slides/slide18.xml><?xml version="1.0" encoding="utf-8"?>
+<file path=ppt/slides/slide19.xml><?xml version="1.0" encoding="utf-8"?>
 <p:sld xmlns:a="http://schemas.openxmlformats.org/drawingml/2006/main" xmlns:r="http://schemas.openxmlformats.org/officeDocument/2006/relationships" xmlns:p="http://schemas.openxmlformats.org/presentationml/2006/main">
   <p:cSld>
     <p:spTree>
@@ -11672,8 +11815,8 @@
           </a:p>
         </p:txBody>
       </p:sp>
-      <mc:AlternateContent xmlns:mc="http://schemas.openxmlformats.org/markup-compatibility/2006">
-        <mc:Choice xmlns:a14="http://schemas.microsoft.com/office/drawing/2010/main" Requires="a14">
+      <mc:AlternateContent xmlns:mc="http://schemas.openxmlformats.org/markup-compatibility/2006" xmlns:a14="http://schemas.microsoft.com/office/drawing/2010/main">
+        <mc:Choice Requires="a14">
           <p:sp>
             <p:nvSpPr>
               <p:cNvPr id="8" name="Content Placeholder 7">
@@ -11765,7 +11908,7 @@
             </p:txBody>
           </p:sp>
         </mc:Choice>
-        <mc:Fallback>
+        <mc:Fallback xmlns="">
           <p:sp>
             <p:nvSpPr>
               <p:cNvPr id="8" name="Content Placeholder 7">
@@ -12275,7 +12418,97 @@
 </p:sld>
 </file>
 
-<file path=ppt/slides/slide19.xml><?xml version="1.0" encoding="utf-8"?>
+<file path=ppt/slides/slide2.xml><?xml version="1.0" encoding="utf-8"?>
+<p:sld xmlns:a="http://schemas.openxmlformats.org/drawingml/2006/main" xmlns:r="http://schemas.openxmlformats.org/officeDocument/2006/relationships" xmlns:p="http://schemas.openxmlformats.org/presentationml/2006/main">
+  <p:cSld>
+    <p:spTree>
+      <p:nvGrpSpPr>
+        <p:cNvPr id="1" name=""/>
+        <p:cNvGrpSpPr/>
+        <p:nvPr/>
+      </p:nvGrpSpPr>
+      <p:grpSpPr>
+        <a:xfrm>
+          <a:off x="0" y="0"/>
+          <a:ext cx="0" cy="0"/>
+          <a:chOff x="0" y="0"/>
+          <a:chExt cx="0" cy="0"/>
+        </a:xfrm>
+      </p:grpSpPr>
+      <p:sp>
+        <p:nvSpPr>
+          <p:cNvPr id="2" name="Title 1">
+            <a:extLst>
+              <a:ext uri="{FF2B5EF4-FFF2-40B4-BE49-F238E27FC236}">
+                <a16:creationId xmlns:a16="http://schemas.microsoft.com/office/drawing/2014/main" id="{C42543B4-75DA-E45E-2EEB-0E736989F2CA}"/>
+              </a:ext>
+            </a:extLst>
+          </p:cNvPr>
+          <p:cNvSpPr>
+            <a:spLocks noGrp="1"/>
+          </p:cNvSpPr>
+          <p:nvPr>
+            <p:ph type="title"/>
+          </p:nvPr>
+        </p:nvSpPr>
+        <p:spPr/>
+        <p:txBody>
+          <a:bodyPr/>
+          <a:lstStyle/>
+          <a:p>
+            <a:r>
+              <a:rPr lang="en-GB" dirty="0"/>
+              <a:t>Learning Outcomes</a:t>
+            </a:r>
+          </a:p>
+        </p:txBody>
+      </p:sp>
+      <p:sp>
+        <p:nvSpPr>
+          <p:cNvPr id="3" name="Content Placeholder 2">
+            <a:extLst>
+              <a:ext uri="{FF2B5EF4-FFF2-40B4-BE49-F238E27FC236}">
+                <a16:creationId xmlns:a16="http://schemas.microsoft.com/office/drawing/2014/main" id="{7B52E5B8-D68A-6D26-7EFA-3B06D90333C8}"/>
+              </a:ext>
+            </a:extLst>
+          </p:cNvPr>
+          <p:cNvSpPr>
+            <a:spLocks noGrp="1"/>
+          </p:cNvSpPr>
+          <p:nvPr>
+            <p:ph idx="1"/>
+          </p:nvPr>
+        </p:nvSpPr>
+        <p:spPr/>
+        <p:txBody>
+          <a:bodyPr/>
+          <a:lstStyle/>
+          <a:p>
+            <a:pPr marL="514350" indent="-514350">
+              <a:buFont typeface="+mj-lt"/>
+              <a:buAutoNum type="arabicPeriod"/>
+            </a:pPr>
+            <a:r>
+              <a:rPr lang="en-GB" dirty="0"/>
+              <a:t>Apply minimisation of Boolean expressions to simplify logic circuits</a:t>
+            </a:r>
+          </a:p>
+        </p:txBody>
+      </p:sp>
+    </p:spTree>
+    <p:extLst>
+      <p:ext uri="{BB962C8B-B14F-4D97-AF65-F5344CB8AC3E}">
+        <p14:creationId xmlns:p14="http://schemas.microsoft.com/office/powerpoint/2010/main" val="1890761602"/>
+      </p:ext>
+    </p:extLst>
+  </p:cSld>
+  <p:clrMapOvr>
+    <a:masterClrMapping/>
+  </p:clrMapOvr>
+</p:sld>
+</file>
+
+<file path=ppt/slides/slide20.xml><?xml version="1.0" encoding="utf-8"?>
 <p:sld xmlns:a="http://schemas.openxmlformats.org/drawingml/2006/main" xmlns:r="http://schemas.openxmlformats.org/officeDocument/2006/relationships" xmlns:p="http://schemas.openxmlformats.org/presentationml/2006/main">
   <p:cSld>
     <p:spTree>
@@ -12320,8 +12553,8 @@
           </a:p>
         </p:txBody>
       </p:sp>
-      <mc:AlternateContent xmlns:mc="http://schemas.openxmlformats.org/markup-compatibility/2006">
-        <mc:Choice xmlns:a14="http://schemas.microsoft.com/office/drawing/2010/main" Requires="a14">
+      <mc:AlternateContent xmlns:mc="http://schemas.openxmlformats.org/markup-compatibility/2006" xmlns:a14="http://schemas.microsoft.com/office/drawing/2010/main">
+        <mc:Choice Requires="a14">
           <p:sp>
             <p:nvSpPr>
               <p:cNvPr id="8" name="Content Placeholder 7">
@@ -12473,7 +12706,7 @@
             </p:txBody>
           </p:sp>
         </mc:Choice>
-        <mc:Fallback>
+        <mc:Fallback xmlns="">
           <p:sp>
             <p:nvSpPr>
               <p:cNvPr id="8" name="Content Placeholder 7">
@@ -13035,97 +13268,7 @@
 </p:sld>
 </file>
 
-<file path=ppt/slides/slide2.xml><?xml version="1.0" encoding="utf-8"?>
-<p:sld xmlns:a="http://schemas.openxmlformats.org/drawingml/2006/main" xmlns:r="http://schemas.openxmlformats.org/officeDocument/2006/relationships" xmlns:p="http://schemas.openxmlformats.org/presentationml/2006/main">
-  <p:cSld>
-    <p:spTree>
-      <p:nvGrpSpPr>
-        <p:cNvPr id="1" name=""/>
-        <p:cNvGrpSpPr/>
-        <p:nvPr/>
-      </p:nvGrpSpPr>
-      <p:grpSpPr>
-        <a:xfrm>
-          <a:off x="0" y="0"/>
-          <a:ext cx="0" cy="0"/>
-          <a:chOff x="0" y="0"/>
-          <a:chExt cx="0" cy="0"/>
-        </a:xfrm>
-      </p:grpSpPr>
-      <p:sp>
-        <p:nvSpPr>
-          <p:cNvPr id="2" name="Title 1">
-            <a:extLst>
-              <a:ext uri="{FF2B5EF4-FFF2-40B4-BE49-F238E27FC236}">
-                <a16:creationId xmlns:a16="http://schemas.microsoft.com/office/drawing/2014/main" id="{C42543B4-75DA-E45E-2EEB-0E736989F2CA}"/>
-              </a:ext>
-            </a:extLst>
-          </p:cNvPr>
-          <p:cNvSpPr>
-            <a:spLocks noGrp="1"/>
-          </p:cNvSpPr>
-          <p:nvPr>
-            <p:ph type="title"/>
-          </p:nvPr>
-        </p:nvSpPr>
-        <p:spPr/>
-        <p:txBody>
-          <a:bodyPr/>
-          <a:lstStyle/>
-          <a:p>
-            <a:r>
-              <a:rPr lang="en-GB" dirty="0"/>
-              <a:t>Learning Outcomes</a:t>
-            </a:r>
-          </a:p>
-        </p:txBody>
-      </p:sp>
-      <p:sp>
-        <p:nvSpPr>
-          <p:cNvPr id="3" name="Content Placeholder 2">
-            <a:extLst>
-              <a:ext uri="{FF2B5EF4-FFF2-40B4-BE49-F238E27FC236}">
-                <a16:creationId xmlns:a16="http://schemas.microsoft.com/office/drawing/2014/main" id="{7B52E5B8-D68A-6D26-7EFA-3B06D90333C8}"/>
-              </a:ext>
-            </a:extLst>
-          </p:cNvPr>
-          <p:cNvSpPr>
-            <a:spLocks noGrp="1"/>
-          </p:cNvSpPr>
-          <p:nvPr>
-            <p:ph idx="1"/>
-          </p:nvPr>
-        </p:nvSpPr>
-        <p:spPr/>
-        <p:txBody>
-          <a:bodyPr/>
-          <a:lstStyle/>
-          <a:p>
-            <a:pPr marL="514350" indent="-514350">
-              <a:buFont typeface="+mj-lt"/>
-              <a:buAutoNum type="arabicPeriod"/>
-            </a:pPr>
-            <a:r>
-              <a:rPr lang="en-GB" dirty="0"/>
-              <a:t>Apply minimisation of Boolean expressions to simplify logic circuits</a:t>
-            </a:r>
-          </a:p>
-        </p:txBody>
-      </p:sp>
-    </p:spTree>
-    <p:extLst>
-      <p:ext uri="{BB962C8B-B14F-4D97-AF65-F5344CB8AC3E}">
-        <p14:creationId xmlns:p14="http://schemas.microsoft.com/office/powerpoint/2010/main" val="1890761602"/>
-      </p:ext>
-    </p:extLst>
-  </p:cSld>
-  <p:clrMapOvr>
-    <a:masterClrMapping/>
-  </p:clrMapOvr>
-</p:sld>
-</file>
-
-<file path=ppt/slides/slide20.xml><?xml version="1.0" encoding="utf-8"?>
+<file path=ppt/slides/slide21.xml><?xml version="1.0" encoding="utf-8"?>
 <p:sld xmlns:a="http://schemas.openxmlformats.org/drawingml/2006/main" xmlns:r="http://schemas.openxmlformats.org/officeDocument/2006/relationships" xmlns:p="http://schemas.openxmlformats.org/presentationml/2006/main">
   <p:cSld>
     <p:spTree>
@@ -13890,7 +14033,7 @@
 </p:sld>
 </file>
 
-<file path=ppt/slides/slide21.xml><?xml version="1.0" encoding="utf-8"?>
+<file path=ppt/slides/slide22.xml><?xml version="1.0" encoding="utf-8"?>
 <p:sld xmlns:a="http://schemas.openxmlformats.org/drawingml/2006/main" xmlns:r="http://schemas.openxmlformats.org/officeDocument/2006/relationships" xmlns:p="http://schemas.openxmlformats.org/presentationml/2006/main">
   <p:cSld>
     <p:spTree>
@@ -14675,7 +14818,7 @@
 </p:sld>
 </file>
 
-<file path=ppt/slides/slide22.xml><?xml version="1.0" encoding="utf-8"?>
+<file path=ppt/slides/slide23.xml><?xml version="1.0" encoding="utf-8"?>
 <p:sld xmlns:a="http://schemas.openxmlformats.org/drawingml/2006/main" xmlns:r="http://schemas.openxmlformats.org/officeDocument/2006/relationships" xmlns:p="http://schemas.openxmlformats.org/presentationml/2006/main">
   <p:cSld>
     <p:spTree>
@@ -15861,7 +16004,7 @@
 </p:sld>
 </file>
 
-<file path=ppt/slides/slide23.xml><?xml version="1.0" encoding="utf-8"?>
+<file path=ppt/slides/slide24.xml><?xml version="1.0" encoding="utf-8"?>
 <p:sld xmlns:a="http://schemas.openxmlformats.org/drawingml/2006/main" xmlns:r="http://schemas.openxmlformats.org/officeDocument/2006/relationships" xmlns:p="http://schemas.openxmlformats.org/presentationml/2006/main">
   <p:cSld>
     <p:spTree>
@@ -15906,8 +16049,8 @@
           </a:p>
         </p:txBody>
       </p:sp>
-      <mc:AlternateContent xmlns:mc="http://schemas.openxmlformats.org/markup-compatibility/2006">
-        <mc:Choice xmlns:a14="http://schemas.microsoft.com/office/drawing/2010/main" Requires="a14">
+      <mc:AlternateContent xmlns:mc="http://schemas.openxmlformats.org/markup-compatibility/2006" xmlns:a14="http://schemas.microsoft.com/office/drawing/2010/main">
+        <mc:Choice Requires="a14">
           <p:sp>
             <p:nvSpPr>
               <p:cNvPr id="3" name="Content Placeholder 2">
@@ -16013,7 +16156,7 @@
             </p:txBody>
           </p:sp>
         </mc:Choice>
-        <mc:Fallback>
+        <mc:Fallback xmlns="">
           <p:sp>
             <p:nvSpPr>
               <p:cNvPr id="3" name="Content Placeholder 2">
@@ -16955,7 +17098,7 @@
 </p:sld>
 </file>
 
-<file path=ppt/slides/slide24.xml><?xml version="1.0" encoding="utf-8"?>
+<file path=ppt/slides/slide25.xml><?xml version="1.0" encoding="utf-8"?>
 <p:sld xmlns:a="http://schemas.openxmlformats.org/drawingml/2006/main" xmlns:r="http://schemas.openxmlformats.org/officeDocument/2006/relationships" xmlns:p="http://schemas.openxmlformats.org/presentationml/2006/main">
   <p:cSld>
     <p:spTree>
@@ -17914,7 +18057,7 @@
 </p:sld>
 </file>
 
-<file path=ppt/slides/slide25.xml><?xml version="1.0" encoding="utf-8"?>
+<file path=ppt/slides/slide26.xml><?xml version="1.0" encoding="utf-8"?>
 <p:sld xmlns:a="http://schemas.openxmlformats.org/drawingml/2006/main" xmlns:r="http://schemas.openxmlformats.org/officeDocument/2006/relationships" xmlns:p="http://schemas.openxmlformats.org/presentationml/2006/main">
   <p:cSld>
     <p:spTree>
@@ -17959,8 +18102,8 @@
           </a:p>
         </p:txBody>
       </p:sp>
-      <mc:AlternateContent xmlns:mc="http://schemas.openxmlformats.org/markup-compatibility/2006">
-        <mc:Choice xmlns:a14="http://schemas.microsoft.com/office/drawing/2010/main" Requires="a14">
+      <mc:AlternateContent xmlns:mc="http://schemas.openxmlformats.org/markup-compatibility/2006" xmlns:a14="http://schemas.microsoft.com/office/drawing/2010/main">
+        <mc:Choice Requires="a14">
           <p:sp>
             <p:nvSpPr>
               <p:cNvPr id="3" name="Content Placeholder 2">
@@ -18091,7 +18234,7 @@
             </p:txBody>
           </p:sp>
         </mc:Choice>
-        <mc:Fallback>
+        <mc:Fallback xmlns="">
           <p:sp>
             <p:nvSpPr>
               <p:cNvPr id="3" name="Content Placeholder 2">
@@ -19085,7 +19228,7 @@
 </p:sld>
 </file>
 
-<file path=ppt/slides/slide26.xml><?xml version="1.0" encoding="utf-8"?>
+<file path=ppt/slides/slide27.xml><?xml version="1.0" encoding="utf-8"?>
 <p:sld xmlns:a="http://schemas.openxmlformats.org/drawingml/2006/main" xmlns:r="http://schemas.openxmlformats.org/officeDocument/2006/relationships" xmlns:p="http://schemas.openxmlformats.org/presentationml/2006/main">
   <p:cSld>
     <p:spTree>
@@ -20478,7 +20621,7 @@
 </p:sld>
 </file>
 
-<file path=ppt/slides/slide27.xml><?xml version="1.0" encoding="utf-8"?>
+<file path=ppt/slides/slide28.xml><?xml version="1.0" encoding="utf-8"?>
 <p:sld xmlns:a="http://schemas.openxmlformats.org/drawingml/2006/main" xmlns:r="http://schemas.openxmlformats.org/officeDocument/2006/relationships" xmlns:p="http://schemas.openxmlformats.org/presentationml/2006/main">
   <p:cSld>
     <p:spTree>
@@ -20539,8 +20682,8 @@
           </a:p>
         </p:txBody>
       </p:sp>
-      <mc:AlternateContent xmlns:mc="http://schemas.openxmlformats.org/markup-compatibility/2006">
-        <mc:Choice xmlns:a14="http://schemas.microsoft.com/office/drawing/2010/main" Requires="a14">
+      <mc:AlternateContent xmlns:mc="http://schemas.openxmlformats.org/markup-compatibility/2006" xmlns:a14="http://schemas.microsoft.com/office/drawing/2010/main">
+        <mc:Choice Requires="a14">
           <p:sp>
             <p:nvSpPr>
               <p:cNvPr id="3" name="Content Placeholder 2">
@@ -21022,7 +21165,7 @@
             </p:txBody>
           </p:sp>
         </mc:Choice>
-        <mc:Fallback>
+        <mc:Fallback xmlns="">
           <p:sp>
             <p:nvSpPr>
               <p:cNvPr id="3" name="Content Placeholder 2">
@@ -21075,7 +21218,7 @@
 </p:sld>
 </file>
 
-<file path=ppt/slides/slide28.xml><?xml version="1.0" encoding="utf-8"?>
+<file path=ppt/slides/slide29.xml><?xml version="1.0" encoding="utf-8"?>
 <p:sld xmlns:a="http://schemas.openxmlformats.org/drawingml/2006/main" xmlns:r="http://schemas.openxmlformats.org/officeDocument/2006/relationships" xmlns:p="http://schemas.openxmlformats.org/presentationml/2006/main">
   <p:cSld>
     <p:spTree>
@@ -21982,7 +22125,117 @@
 </p:sld>
 </file>
 
-<file path=ppt/slides/slide29.xml><?xml version="1.0" encoding="utf-8"?>
+<file path=ppt/slides/slide3.xml><?xml version="1.0" encoding="utf-8"?>
+<p:sld xmlns:a="http://schemas.openxmlformats.org/drawingml/2006/main" xmlns:r="http://schemas.openxmlformats.org/officeDocument/2006/relationships" xmlns:p="http://schemas.openxmlformats.org/presentationml/2006/main">
+  <p:cSld>
+    <p:spTree>
+      <p:nvGrpSpPr>
+        <p:cNvPr id="1" name=""/>
+        <p:cNvGrpSpPr/>
+        <p:nvPr/>
+      </p:nvGrpSpPr>
+      <p:grpSpPr>
+        <a:xfrm>
+          <a:off x="0" y="0"/>
+          <a:ext cx="0" cy="0"/>
+          <a:chOff x="0" y="0"/>
+          <a:chExt cx="0" cy="0"/>
+        </a:xfrm>
+      </p:grpSpPr>
+      <p:sp>
+        <p:nvSpPr>
+          <p:cNvPr id="2" name="Title 1">
+            <a:extLst>
+              <a:ext uri="{FF2B5EF4-FFF2-40B4-BE49-F238E27FC236}">
+                <a16:creationId xmlns:a16="http://schemas.microsoft.com/office/drawing/2014/main" id="{70921253-F723-4782-FA6E-E4EFCFD9AC61}"/>
+              </a:ext>
+            </a:extLst>
+          </p:cNvPr>
+          <p:cNvSpPr>
+            <a:spLocks noGrp="1"/>
+          </p:cNvSpPr>
+          <p:nvPr>
+            <p:ph type="title"/>
+          </p:nvPr>
+        </p:nvSpPr>
+        <p:spPr/>
+        <p:txBody>
+          <a:bodyPr/>
+          <a:lstStyle/>
+          <a:p>
+            <a:r>
+              <a:rPr lang="en-GB" dirty="0"/>
+              <a:t>Text Book</a:t>
+            </a:r>
+          </a:p>
+        </p:txBody>
+      </p:sp>
+      <p:sp>
+        <p:nvSpPr>
+          <p:cNvPr id="3" name="Content Placeholder 2">
+            <a:extLst>
+              <a:ext uri="{FF2B5EF4-FFF2-40B4-BE49-F238E27FC236}">
+                <a16:creationId xmlns:a16="http://schemas.microsoft.com/office/drawing/2014/main" id="{330ABFD0-C792-9EF3-3BED-4AA7BDB2C595}"/>
+              </a:ext>
+            </a:extLst>
+          </p:cNvPr>
+          <p:cNvSpPr>
+            <a:spLocks noGrp="1"/>
+          </p:cNvSpPr>
+          <p:nvPr>
+            <p:ph idx="1"/>
+          </p:nvPr>
+        </p:nvSpPr>
+        <p:spPr/>
+        <p:txBody>
+          <a:bodyPr/>
+          <a:lstStyle/>
+          <a:p>
+            <a:r>
+              <a:rPr lang="en-GB" dirty="0"/>
+              <a:t>This lecture covers material similar to chapter 12 of </a:t>
+            </a:r>
+            <a:r>
+              <a:rPr lang="en-US" sz="2800" b="1" dirty="0"/>
+              <a:t>Stallings. </a:t>
+            </a:r>
+            <a:r>
+              <a:rPr lang="en-US" sz="2800" b="1" i="1" dirty="0"/>
+              <a:t>Computer </a:t>
+            </a:r>
+            <a:r>
+              <a:rPr lang="en-US" sz="2800" b="1" i="1" dirty="0" err="1"/>
+              <a:t>Organisation</a:t>
+            </a:r>
+            <a:r>
+              <a:rPr lang="en-US" sz="2800" b="1" i="1" dirty="0"/>
+              <a:t> &amp; Architecture</a:t>
+            </a:r>
+            <a:endParaRPr lang="en-GB" sz="2800" b="1" i="1" dirty="0"/>
+          </a:p>
+          <a:p>
+            <a:pPr lvl="1"/>
+            <a:r>
+              <a:rPr lang="en-GB" dirty="0"/>
+              <a:t>It covers Karnaugh maps (section 12.3, pages 421 to 425)</a:t>
+            </a:r>
+          </a:p>
+        </p:txBody>
+      </p:sp>
+    </p:spTree>
+    <p:extLst>
+      <p:ext uri="{BB962C8B-B14F-4D97-AF65-F5344CB8AC3E}">
+        <p14:creationId xmlns:p14="http://schemas.microsoft.com/office/powerpoint/2010/main" val="2458435575"/>
+      </p:ext>
+    </p:extLst>
+  </p:cSld>
+  <p:clrMapOvr>
+    <a:masterClrMapping/>
+  </p:clrMapOvr>
+</p:sld>
+</file>
+
+<file path=ppt/slides/slide30.xml><?xml version="1.0" encoding="utf-8"?>
 <p:sld xmlns:a="http://schemas.openxmlformats.org/drawingml/2006/main" xmlns:r="http://schemas.openxmlformats.org/officeDocument/2006/relationships" xmlns:p="http://schemas.openxmlformats.org/presentationml/2006/main">
   <p:cSld>
     <p:spTree>
@@ -22423,8 +22676,8 @@
           </a:p>
         </p:txBody>
       </p:sp>
-      <mc:AlternateContent xmlns:mc="http://schemas.openxmlformats.org/markup-compatibility/2006">
-        <mc:Choice xmlns:a14="http://schemas.microsoft.com/office/drawing/2010/main" Requires="a14">
+      <mc:AlternateContent xmlns:mc="http://schemas.openxmlformats.org/markup-compatibility/2006" xmlns:a14="http://schemas.microsoft.com/office/drawing/2010/main">
+        <mc:Choice Requires="a14">
           <p:sp>
             <p:nvSpPr>
               <p:cNvPr id="3" name="Content Placeholder 2">
@@ -22899,7 +23152,7 @@
             </p:txBody>
           </p:sp>
         </mc:Choice>
-        <mc:Fallback>
+        <mc:Fallback xmlns="">
           <p:sp>
             <p:nvSpPr>
               <p:cNvPr id="3" name="Content Placeholder 2">
@@ -23054,117 +23307,7 @@
 </p:sld>
 </file>
 
-<file path=ppt/slides/slide3.xml><?xml version="1.0" encoding="utf-8"?>
-<p:sld xmlns:a="http://schemas.openxmlformats.org/drawingml/2006/main" xmlns:r="http://schemas.openxmlformats.org/officeDocument/2006/relationships" xmlns:p="http://schemas.openxmlformats.org/presentationml/2006/main">
-  <p:cSld>
-    <p:spTree>
-      <p:nvGrpSpPr>
-        <p:cNvPr id="1" name=""/>
-        <p:cNvGrpSpPr/>
-        <p:nvPr/>
-      </p:nvGrpSpPr>
-      <p:grpSpPr>
-        <a:xfrm>
-          <a:off x="0" y="0"/>
-          <a:ext cx="0" cy="0"/>
-          <a:chOff x="0" y="0"/>
-          <a:chExt cx="0" cy="0"/>
-        </a:xfrm>
-      </p:grpSpPr>
-      <p:sp>
-        <p:nvSpPr>
-          <p:cNvPr id="2" name="Title 1">
-            <a:extLst>
-              <a:ext uri="{FF2B5EF4-FFF2-40B4-BE49-F238E27FC236}">
-                <a16:creationId xmlns:a16="http://schemas.microsoft.com/office/drawing/2014/main" id="{70921253-F723-4782-FA6E-E4EFCFD9AC61}"/>
-              </a:ext>
-            </a:extLst>
-          </p:cNvPr>
-          <p:cNvSpPr>
-            <a:spLocks noGrp="1"/>
-          </p:cNvSpPr>
-          <p:nvPr>
-            <p:ph type="title"/>
-          </p:nvPr>
-        </p:nvSpPr>
-        <p:spPr/>
-        <p:txBody>
-          <a:bodyPr/>
-          <a:lstStyle/>
-          <a:p>
-            <a:r>
-              <a:rPr lang="en-GB" dirty="0"/>
-              <a:t>Text Book</a:t>
-            </a:r>
-          </a:p>
-        </p:txBody>
-      </p:sp>
-      <p:sp>
-        <p:nvSpPr>
-          <p:cNvPr id="3" name="Content Placeholder 2">
-            <a:extLst>
-              <a:ext uri="{FF2B5EF4-FFF2-40B4-BE49-F238E27FC236}">
-                <a16:creationId xmlns:a16="http://schemas.microsoft.com/office/drawing/2014/main" id="{330ABFD0-C792-9EF3-3BED-4AA7BDB2C595}"/>
-              </a:ext>
-            </a:extLst>
-          </p:cNvPr>
-          <p:cNvSpPr>
-            <a:spLocks noGrp="1"/>
-          </p:cNvSpPr>
-          <p:nvPr>
-            <p:ph idx="1"/>
-          </p:nvPr>
-        </p:nvSpPr>
-        <p:spPr/>
-        <p:txBody>
-          <a:bodyPr/>
-          <a:lstStyle/>
-          <a:p>
-            <a:r>
-              <a:rPr lang="en-GB" dirty="0"/>
-              <a:t>This lecture covers material similar to chapter 12 of </a:t>
-            </a:r>
-            <a:r>
-              <a:rPr lang="en-US" sz="2800" b="1" dirty="0"/>
-              <a:t>Stallings. </a:t>
-            </a:r>
-            <a:r>
-              <a:rPr lang="en-US" sz="2800" b="1" i="1" dirty="0"/>
-              <a:t>Computer </a:t>
-            </a:r>
-            <a:r>
-              <a:rPr lang="en-US" sz="2800" b="1" i="1" dirty="0" err="1"/>
-              <a:t>Organisation</a:t>
-            </a:r>
-            <a:r>
-              <a:rPr lang="en-US" sz="2800" b="1" i="1" dirty="0"/>
-              <a:t> &amp; Architecture</a:t>
-            </a:r>
-            <a:endParaRPr lang="en-GB" sz="2800" b="1" i="1" dirty="0"/>
-          </a:p>
-          <a:p>
-            <a:pPr lvl="1"/>
-            <a:r>
-              <a:rPr lang="en-GB" dirty="0"/>
-              <a:t>It covers Karnaugh maps (section 12.3, pages 421 to 425)</a:t>
-            </a:r>
-          </a:p>
-        </p:txBody>
-      </p:sp>
-    </p:spTree>
-    <p:extLst>
-      <p:ext uri="{BB962C8B-B14F-4D97-AF65-F5344CB8AC3E}">
-        <p14:creationId xmlns:p14="http://schemas.microsoft.com/office/powerpoint/2010/main" val="2458435575"/>
-      </p:ext>
-    </p:extLst>
-  </p:cSld>
-  <p:clrMapOvr>
-    <a:masterClrMapping/>
-  </p:clrMapOvr>
-</p:sld>
-</file>
-
-<file path=ppt/slides/slide30.xml><?xml version="1.0" encoding="utf-8"?>
+<file path=ppt/slides/slide31.xml><?xml version="1.0" encoding="utf-8"?>
 <p:sld xmlns:a="http://schemas.openxmlformats.org/drawingml/2006/main" xmlns:r="http://schemas.openxmlformats.org/officeDocument/2006/relationships" xmlns:p="http://schemas.openxmlformats.org/presentationml/2006/main">
   <p:cSld>
     <p:spTree>
@@ -23605,8 +23748,8 @@
           </a:p>
         </p:txBody>
       </p:sp>
-      <mc:AlternateContent xmlns:mc="http://schemas.openxmlformats.org/markup-compatibility/2006">
-        <mc:Choice xmlns:a14="http://schemas.microsoft.com/office/drawing/2010/main" Requires="a14">
+      <mc:AlternateContent xmlns:mc="http://schemas.openxmlformats.org/markup-compatibility/2006" xmlns:a14="http://schemas.microsoft.com/office/drawing/2010/main">
+        <mc:Choice Requires="a14">
           <p:sp>
             <p:nvSpPr>
               <p:cNvPr id="3" name="Content Placeholder 2">
@@ -24042,7 +24185,7 @@
             </p:txBody>
           </p:sp>
         </mc:Choice>
-        <mc:Fallback>
+        <mc:Fallback xmlns="">
           <p:sp>
             <p:nvSpPr>
               <p:cNvPr id="3" name="Content Placeholder 2">
@@ -24151,7 +24294,7 @@
 </p:sld>
 </file>
 
-<file path=ppt/slides/slide31.xml><?xml version="1.0" encoding="utf-8"?>
+<file path=ppt/slides/slide32.xml><?xml version="1.0" encoding="utf-8"?>
 <p:sld xmlns:a="http://schemas.openxmlformats.org/drawingml/2006/main" xmlns:r="http://schemas.openxmlformats.org/officeDocument/2006/relationships" xmlns:p="http://schemas.openxmlformats.org/presentationml/2006/main">
   <p:cSld>
     <p:spTree>
@@ -24592,8 +24735,8 @@
           </a:p>
         </p:txBody>
       </p:sp>
-      <mc:AlternateContent xmlns:mc="http://schemas.openxmlformats.org/markup-compatibility/2006">
-        <mc:Choice xmlns:a14="http://schemas.microsoft.com/office/drawing/2010/main" Requires="a14">
+      <mc:AlternateContent xmlns:mc="http://schemas.openxmlformats.org/markup-compatibility/2006" xmlns:a14="http://schemas.microsoft.com/office/drawing/2010/main">
+        <mc:Choice Requires="a14">
           <p:sp>
             <p:nvSpPr>
               <p:cNvPr id="3" name="Content Placeholder 2">
@@ -24733,7 +24876,7 @@
             </p:txBody>
           </p:sp>
         </mc:Choice>
-        <mc:Fallback>
+        <mc:Fallback xmlns="">
           <p:sp>
             <p:nvSpPr>
               <p:cNvPr id="3" name="Content Placeholder 2">
@@ -24992,7 +25135,7 @@
 </p:sld>
 </file>
 
-<file path=ppt/slides/slide32.xml><?xml version="1.0" encoding="utf-8"?>
+<file path=ppt/slides/slide33.xml><?xml version="1.0" encoding="utf-8"?>
 <p:sld xmlns:a="http://schemas.openxmlformats.org/drawingml/2006/main" xmlns:r="http://schemas.openxmlformats.org/officeDocument/2006/relationships" xmlns:p="http://schemas.openxmlformats.org/presentationml/2006/main">
   <p:cSld>
     <p:spTree>
@@ -25833,7 +25976,7 @@
 </p:sld>
 </file>
 
-<file path=ppt/slides/slide33.xml><?xml version="1.0" encoding="utf-8"?>
+<file path=ppt/slides/slide34.xml><?xml version="1.0" encoding="utf-8"?>
 <p:sld xmlns:a="http://schemas.openxmlformats.org/drawingml/2006/main" xmlns:r="http://schemas.openxmlformats.org/officeDocument/2006/relationships" xmlns:p="http://schemas.openxmlformats.org/presentationml/2006/main">
   <p:cSld>
     <p:spTree>
@@ -25878,8 +26021,8 @@
           </a:p>
         </p:txBody>
       </p:sp>
-      <mc:AlternateContent xmlns:mc="http://schemas.openxmlformats.org/markup-compatibility/2006">
-        <mc:Choice xmlns:a14="http://schemas.microsoft.com/office/drawing/2010/main" Requires="a14">
+      <mc:AlternateContent xmlns:mc="http://schemas.openxmlformats.org/markup-compatibility/2006" xmlns:a14="http://schemas.microsoft.com/office/drawing/2010/main">
+        <mc:Choice Requires="a14">
           <p:sp>
             <p:nvSpPr>
               <p:cNvPr id="3" name="Content Placeholder 2">
@@ -26037,7 +26180,7 @@
             </p:txBody>
           </p:sp>
         </mc:Choice>
-        <mc:Fallback>
+        <mc:Fallback xmlns="">
           <p:sp>
             <p:nvSpPr>
               <p:cNvPr id="3" name="Content Placeholder 2">
@@ -26542,7 +26685,7 @@
 </p:sld>
 </file>
 
-<file path=ppt/slides/slide34.xml><?xml version="1.0" encoding="utf-8"?>
+<file path=ppt/slides/slide35.xml><?xml version="1.0" encoding="utf-8"?>
 <p:sld xmlns:a="http://schemas.openxmlformats.org/drawingml/2006/main" xmlns:r="http://schemas.openxmlformats.org/officeDocument/2006/relationships" xmlns:p="http://schemas.openxmlformats.org/presentationml/2006/main">
   <p:cSld>
     <p:spTree>
@@ -26587,8 +26730,8 @@
           </a:p>
         </p:txBody>
       </p:sp>
-      <mc:AlternateContent xmlns:mc="http://schemas.openxmlformats.org/markup-compatibility/2006">
-        <mc:Choice xmlns:a14="http://schemas.microsoft.com/office/drawing/2010/main" Requires="a14">
+      <mc:AlternateContent xmlns:mc="http://schemas.openxmlformats.org/markup-compatibility/2006" xmlns:a14="http://schemas.microsoft.com/office/drawing/2010/main">
+        <mc:Choice Requires="a14">
           <p:sp>
             <p:nvSpPr>
               <p:cNvPr id="3" name="Content Placeholder 2">
@@ -27037,7 +27180,7 @@
             </p:txBody>
           </p:sp>
         </mc:Choice>
-        <mc:Fallback>
+        <mc:Fallback xmlns="">
           <p:sp>
             <p:nvSpPr>
               <p:cNvPr id="3" name="Content Placeholder 2">
@@ -27542,7 +27685,7 @@
 </p:sld>
 </file>
 
-<file path=ppt/slides/slide35.xml><?xml version="1.0" encoding="utf-8"?>
+<file path=ppt/slides/slide36.xml><?xml version="1.0" encoding="utf-8"?>
 <p:sld xmlns:a="http://schemas.openxmlformats.org/drawingml/2006/main" xmlns:r="http://schemas.openxmlformats.org/officeDocument/2006/relationships" xmlns:p="http://schemas.openxmlformats.org/presentationml/2006/main">
   <p:cSld>
     <p:spTree>
@@ -27587,8 +27730,8 @@
           </a:p>
         </p:txBody>
       </p:sp>
-      <mc:AlternateContent xmlns:mc="http://schemas.openxmlformats.org/markup-compatibility/2006">
-        <mc:Choice xmlns:a14="http://schemas.microsoft.com/office/drawing/2010/main" Requires="a14">
+      <mc:AlternateContent xmlns:mc="http://schemas.openxmlformats.org/markup-compatibility/2006" xmlns:a14="http://schemas.microsoft.com/office/drawing/2010/main">
+        <mc:Choice Requires="a14">
           <p:sp>
             <p:nvSpPr>
               <p:cNvPr id="3" name="Content Placeholder 2">
@@ -27696,7 +27839,7 @@
             </p:txBody>
           </p:sp>
         </mc:Choice>
-        <mc:Fallback>
+        <mc:Fallback xmlns="">
           <p:sp>
             <p:nvSpPr>
               <p:cNvPr id="3" name="Content Placeholder 2">
@@ -28253,7 +28396,7 @@
 </p:sld>
 </file>
 
-<file path=ppt/slides/slide36.xml><?xml version="1.0" encoding="utf-8"?>
+<file path=ppt/slides/slide37.xml><?xml version="1.0" encoding="utf-8"?>
 <p:sld xmlns:a="http://schemas.openxmlformats.org/drawingml/2006/main" xmlns:r="http://schemas.openxmlformats.org/officeDocument/2006/relationships" xmlns:p="http://schemas.openxmlformats.org/presentationml/2006/main">
   <p:cSld>
     <p:spTree>
@@ -29534,7 +29677,7 @@
 </p:sld>
 </file>
 
-<file path=ppt/slides/slide37.xml><?xml version="1.0" encoding="utf-8"?>
+<file path=ppt/slides/slide38.xml><?xml version="1.0" encoding="utf-8"?>
 <p:sld xmlns:a="http://schemas.openxmlformats.org/drawingml/2006/main" xmlns:r="http://schemas.openxmlformats.org/officeDocument/2006/relationships" xmlns:p="http://schemas.openxmlformats.org/presentationml/2006/main">
   <p:cSld>
     <p:spTree>
@@ -29579,8 +29722,8 @@
           </a:p>
         </p:txBody>
       </p:sp>
-      <mc:AlternateContent xmlns:mc="http://schemas.openxmlformats.org/markup-compatibility/2006">
-        <mc:Choice xmlns:a14="http://schemas.microsoft.com/office/drawing/2010/main" Requires="a14">
+      <mc:AlternateContent xmlns:mc="http://schemas.openxmlformats.org/markup-compatibility/2006" xmlns:a14="http://schemas.microsoft.com/office/drawing/2010/main">
+        <mc:Choice Requires="a14">
           <p:sp>
             <p:nvSpPr>
               <p:cNvPr id="3" name="Content Placeholder 2">
@@ -29661,7 +29804,7 @@
             </p:txBody>
           </p:sp>
         </mc:Choice>
-        <mc:Fallback>
+        <mc:Fallback xmlns="">
           <p:sp>
             <p:nvSpPr>
               <p:cNvPr id="3" name="Content Placeholder 2">
@@ -30552,7 +30695,7 @@
 </p:sld>
 </file>
 
-<file path=ppt/slides/slide38.xml><?xml version="1.0" encoding="utf-8"?>
+<file path=ppt/slides/slide39.xml><?xml version="1.0" encoding="utf-8"?>
 <p:sld xmlns:a="http://schemas.openxmlformats.org/drawingml/2006/main" xmlns:r="http://schemas.openxmlformats.org/officeDocument/2006/relationships" xmlns:p="http://schemas.openxmlformats.org/presentationml/2006/main">
   <p:cSld>
     <p:spTree>
@@ -30597,8 +30740,8 @@
           </a:p>
         </p:txBody>
       </p:sp>
-      <mc:AlternateContent xmlns:mc="http://schemas.openxmlformats.org/markup-compatibility/2006">
-        <mc:Choice xmlns:a14="http://schemas.microsoft.com/office/drawing/2010/main" Requires="a14">
+      <mc:AlternateContent xmlns:mc="http://schemas.openxmlformats.org/markup-compatibility/2006" xmlns:a14="http://schemas.microsoft.com/office/drawing/2010/main">
+        <mc:Choice Requires="a14">
           <p:sp>
             <p:nvSpPr>
               <p:cNvPr id="3" name="Content Placeholder 2">
@@ -30679,7 +30822,7 @@
             </p:txBody>
           </p:sp>
         </mc:Choice>
-        <mc:Fallback>
+        <mc:Fallback xmlns="">
           <p:sp>
             <p:nvSpPr>
               <p:cNvPr id="3" name="Content Placeholder 2">
@@ -31570,7 +31713,99 @@
 </p:sld>
 </file>
 
-<file path=ppt/slides/slide39.xml><?xml version="1.0" encoding="utf-8"?>
+<file path=ppt/slides/slide4.xml><?xml version="1.0" encoding="utf-8"?>
+<p:sld xmlns:a="http://schemas.openxmlformats.org/drawingml/2006/main" xmlns:r="http://schemas.openxmlformats.org/officeDocument/2006/relationships" xmlns:p="http://schemas.openxmlformats.org/presentationml/2006/main">
+  <p:cSld>
+    <p:spTree>
+      <p:nvGrpSpPr>
+        <p:cNvPr id="1" name=""/>
+        <p:cNvGrpSpPr/>
+        <p:nvPr/>
+      </p:nvGrpSpPr>
+      <p:grpSpPr>
+        <a:xfrm>
+          <a:off x="0" y="0"/>
+          <a:ext cx="0" cy="0"/>
+          <a:chOff x="0" y="0"/>
+          <a:chExt cx="0" cy="0"/>
+        </a:xfrm>
+      </p:grpSpPr>
+      <p:sp>
+        <p:nvSpPr>
+          <p:cNvPr id="2" name="Title 1">
+            <a:extLst>
+              <a:ext uri="{FF2B5EF4-FFF2-40B4-BE49-F238E27FC236}">
+                <a16:creationId xmlns:a16="http://schemas.microsoft.com/office/drawing/2014/main" id="{30C204C0-99CA-7A76-3BF0-751D278E195A}"/>
+              </a:ext>
+            </a:extLst>
+          </p:cNvPr>
+          <p:cNvSpPr>
+            <a:spLocks noGrp="1"/>
+          </p:cNvSpPr>
+          <p:nvPr>
+            <p:ph type="title"/>
+          </p:nvPr>
+        </p:nvSpPr>
+        <p:spPr/>
+        <p:txBody>
+          <a:bodyPr/>
+          <a:lstStyle/>
+          <a:p>
+            <a:r>
+              <a:rPr lang="en-GB" dirty="0"/>
+              <a:t>Minimising Circuits</a:t>
+            </a:r>
+          </a:p>
+        </p:txBody>
+      </p:sp>
+      <p:sp>
+        <p:nvSpPr>
+          <p:cNvPr id="3" name="Content Placeholder 2">
+            <a:extLst>
+              <a:ext uri="{FF2B5EF4-FFF2-40B4-BE49-F238E27FC236}">
+                <a16:creationId xmlns:a16="http://schemas.microsoft.com/office/drawing/2014/main" id="{96EB671A-F2B7-CC36-0E15-057883196750}"/>
+              </a:ext>
+            </a:extLst>
+          </p:cNvPr>
+          <p:cNvSpPr>
+            <a:spLocks noGrp="1"/>
+          </p:cNvSpPr>
+          <p:nvPr>
+            <p:ph idx="1"/>
+          </p:nvPr>
+        </p:nvSpPr>
+        <p:spPr/>
+        <p:txBody>
+          <a:bodyPr/>
+          <a:lstStyle/>
+          <a:p>
+            <a:r>
+              <a:rPr lang="en-GB" dirty="0"/>
+              <a:t>To reduce the number of components</a:t>
+            </a:r>
+          </a:p>
+          <a:p>
+            <a:r>
+              <a:rPr lang="en-GB" dirty="0"/>
+              <a:t>Same as minimising logical function</a:t>
+            </a:r>
+          </a:p>
+        </p:txBody>
+      </p:sp>
+    </p:spTree>
+    <p:extLst>
+      <p:ext uri="{BB962C8B-B14F-4D97-AF65-F5344CB8AC3E}">
+        <p14:creationId xmlns:p14="http://schemas.microsoft.com/office/powerpoint/2010/main" val="666191990"/>
+      </p:ext>
+    </p:extLst>
+  </p:cSld>
+  <p:clrMapOvr>
+    <a:masterClrMapping/>
+  </p:clrMapOvr>
+</p:sld>
+</file>
+
+<file path=ppt/slides/slide40.xml><?xml version="1.0" encoding="utf-8"?>
 <p:sld xmlns:a="http://schemas.openxmlformats.org/drawingml/2006/main" xmlns:r="http://schemas.openxmlformats.org/officeDocument/2006/relationships" xmlns:p="http://schemas.openxmlformats.org/presentationml/2006/main">
   <p:cSld>
     <p:spTree>
@@ -32397,8 +32632,8 @@
           </a:p>
         </p:txBody>
       </p:sp>
-      <mc:AlternateContent xmlns:mc="http://schemas.openxmlformats.org/markup-compatibility/2006">
-        <mc:Choice xmlns:a14="http://schemas.microsoft.com/office/drawing/2010/main" Requires="a14">
+      <mc:AlternateContent xmlns:mc="http://schemas.openxmlformats.org/markup-compatibility/2006" xmlns:a14="http://schemas.microsoft.com/office/drawing/2010/main">
+        <mc:Choice Requires="a14">
           <p:sp>
             <p:nvSpPr>
               <p:cNvPr id="3" name="Content Placeholder 2">
@@ -32479,7 +32714,7 @@
             </p:txBody>
           </p:sp>
         </mc:Choice>
-        <mc:Fallback>
+        <mc:Fallback xmlns="">
           <p:sp>
             <p:nvSpPr>
               <p:cNvPr id="3" name="Content Placeholder 2">
@@ -32642,99 +32877,7 @@
 </p:sld>
 </file>
 
-<file path=ppt/slides/slide4.xml><?xml version="1.0" encoding="utf-8"?>
-<p:sld xmlns:a="http://schemas.openxmlformats.org/drawingml/2006/main" xmlns:r="http://schemas.openxmlformats.org/officeDocument/2006/relationships" xmlns:p="http://schemas.openxmlformats.org/presentationml/2006/main">
-  <p:cSld>
-    <p:spTree>
-      <p:nvGrpSpPr>
-        <p:cNvPr id="1" name=""/>
-        <p:cNvGrpSpPr/>
-        <p:nvPr/>
-      </p:nvGrpSpPr>
-      <p:grpSpPr>
-        <a:xfrm>
-          <a:off x="0" y="0"/>
-          <a:ext cx="0" cy="0"/>
-          <a:chOff x="0" y="0"/>
-          <a:chExt cx="0" cy="0"/>
-        </a:xfrm>
-      </p:grpSpPr>
-      <p:sp>
-        <p:nvSpPr>
-          <p:cNvPr id="2" name="Title 1">
-            <a:extLst>
-              <a:ext uri="{FF2B5EF4-FFF2-40B4-BE49-F238E27FC236}">
-                <a16:creationId xmlns:a16="http://schemas.microsoft.com/office/drawing/2014/main" id="{30C204C0-99CA-7A76-3BF0-751D278E195A}"/>
-              </a:ext>
-            </a:extLst>
-          </p:cNvPr>
-          <p:cNvSpPr>
-            <a:spLocks noGrp="1"/>
-          </p:cNvSpPr>
-          <p:nvPr>
-            <p:ph type="title"/>
-          </p:nvPr>
-        </p:nvSpPr>
-        <p:spPr/>
-        <p:txBody>
-          <a:bodyPr/>
-          <a:lstStyle/>
-          <a:p>
-            <a:r>
-              <a:rPr lang="en-GB" dirty="0"/>
-              <a:t>Minimising Circuits</a:t>
-            </a:r>
-          </a:p>
-        </p:txBody>
-      </p:sp>
-      <p:sp>
-        <p:nvSpPr>
-          <p:cNvPr id="3" name="Content Placeholder 2">
-            <a:extLst>
-              <a:ext uri="{FF2B5EF4-FFF2-40B4-BE49-F238E27FC236}">
-                <a16:creationId xmlns:a16="http://schemas.microsoft.com/office/drawing/2014/main" id="{96EB671A-F2B7-CC36-0E15-057883196750}"/>
-              </a:ext>
-            </a:extLst>
-          </p:cNvPr>
-          <p:cNvSpPr>
-            <a:spLocks noGrp="1"/>
-          </p:cNvSpPr>
-          <p:nvPr>
-            <p:ph idx="1"/>
-          </p:nvPr>
-        </p:nvSpPr>
-        <p:spPr/>
-        <p:txBody>
-          <a:bodyPr/>
-          <a:lstStyle/>
-          <a:p>
-            <a:r>
-              <a:rPr lang="en-GB" dirty="0"/>
-              <a:t>To reduce the number of components</a:t>
-            </a:r>
-          </a:p>
-          <a:p>
-            <a:r>
-              <a:rPr lang="en-GB" dirty="0"/>
-              <a:t>Same as minimising logical function</a:t>
-            </a:r>
-          </a:p>
-        </p:txBody>
-      </p:sp>
-    </p:spTree>
-    <p:extLst>
-      <p:ext uri="{BB962C8B-B14F-4D97-AF65-F5344CB8AC3E}">
-        <p14:creationId xmlns:p14="http://schemas.microsoft.com/office/powerpoint/2010/main" val="666191990"/>
-      </p:ext>
-    </p:extLst>
-  </p:cSld>
-  <p:clrMapOvr>
-    <a:masterClrMapping/>
-  </p:clrMapOvr>
-</p:sld>
-</file>
-
-<file path=ppt/slides/slide40.xml><?xml version="1.0" encoding="utf-8"?>
+<file path=ppt/slides/slide41.xml><?xml version="1.0" encoding="utf-8"?>
 <p:sld xmlns:a="http://schemas.openxmlformats.org/drawingml/2006/main" xmlns:r="http://schemas.openxmlformats.org/officeDocument/2006/relationships" xmlns:p="http://schemas.openxmlformats.org/presentationml/2006/main">
   <p:cSld>
     <p:spTree>
@@ -32779,8 +32922,8 @@
           </a:p>
         </p:txBody>
       </p:sp>
-      <mc:AlternateContent xmlns:mc="http://schemas.openxmlformats.org/markup-compatibility/2006">
-        <mc:Choice xmlns:a14="http://schemas.microsoft.com/office/drawing/2010/main" Requires="a14">
+      <mc:AlternateContent xmlns:mc="http://schemas.openxmlformats.org/markup-compatibility/2006" xmlns:a14="http://schemas.microsoft.com/office/drawing/2010/main">
+        <mc:Choice Requires="a14">
           <p:sp>
             <p:nvSpPr>
               <p:cNvPr id="3" name="Content Placeholder 2">
@@ -32975,7 +33118,7 @@
             </p:txBody>
           </p:sp>
         </mc:Choice>
-        <mc:Fallback>
+        <mc:Fallback xmlns="">
           <p:sp>
             <p:nvSpPr>
               <p:cNvPr id="3" name="Content Placeholder 2">
@@ -34024,7 +34167,7 @@
 </p:sld>
 </file>
 
-<file path=ppt/slides/slide41.xml><?xml version="1.0" encoding="utf-8"?>
+<file path=ppt/slides/slide42.xml><?xml version="1.0" encoding="utf-8"?>
 <p:sld xmlns:a="http://schemas.openxmlformats.org/drawingml/2006/main" xmlns:r="http://schemas.openxmlformats.org/officeDocument/2006/relationships" xmlns:p="http://schemas.openxmlformats.org/presentationml/2006/main">
   <p:cSld>
     <p:spTree>
@@ -35455,8 +35598,8 @@
           </a:p>
         </p:txBody>
       </p:sp>
-      <mc:AlternateContent xmlns:mc="http://schemas.openxmlformats.org/markup-compatibility/2006">
-        <mc:Choice xmlns:a14="http://schemas.microsoft.com/office/drawing/2010/main" Requires="a14">
+      <mc:AlternateContent xmlns:mc="http://schemas.openxmlformats.org/markup-compatibility/2006" xmlns:a14="http://schemas.microsoft.com/office/drawing/2010/main">
+        <mc:Choice Requires="a14">
           <p:sp>
             <p:nvSpPr>
               <p:cNvPr id="3" name="Content Placeholder 2">
@@ -35603,7 +35746,7 @@
             </p:txBody>
           </p:sp>
         </mc:Choice>
-        <mc:Fallback>
+        <mc:Fallback xmlns="">
           <p:sp>
             <p:nvSpPr>
               <p:cNvPr id="3" name="Content Placeholder 2">
@@ -35706,6 +35849,798 @@
 </file>
 
 <file path=ppt/slides/slide6.xml><?xml version="1.0" encoding="utf-8"?>
+<p:sld xmlns:a="http://schemas.openxmlformats.org/drawingml/2006/main" xmlns:r="http://schemas.openxmlformats.org/officeDocument/2006/relationships" xmlns:p="http://schemas.openxmlformats.org/presentationml/2006/main">
+  <p:cSld>
+    <p:spTree>
+      <p:nvGrpSpPr>
+        <p:cNvPr id="1" name=""/>
+        <p:cNvGrpSpPr/>
+        <p:nvPr/>
+      </p:nvGrpSpPr>
+      <p:grpSpPr>
+        <a:xfrm>
+          <a:off x="0" y="0"/>
+          <a:ext cx="0" cy="0"/>
+          <a:chOff x="0" y="0"/>
+          <a:chExt cx="0" cy="0"/>
+        </a:xfrm>
+      </p:grpSpPr>
+      <p:sp>
+        <p:nvSpPr>
+          <p:cNvPr id="2" name="标题 1">
+            <a:extLst>
+              <a:ext uri="{FF2B5EF4-FFF2-40B4-BE49-F238E27FC236}">
+                <a16:creationId xmlns:a16="http://schemas.microsoft.com/office/drawing/2014/main" id="{CF06F9A0-59AA-48C4-4796-088CEBDA70D1}"/>
+              </a:ext>
+            </a:extLst>
+          </p:cNvPr>
+          <p:cNvSpPr>
+            <a:spLocks noGrp="1"/>
+          </p:cNvSpPr>
+          <p:nvPr>
+            <p:ph type="title"/>
+          </p:nvPr>
+        </p:nvSpPr>
+        <p:spPr/>
+        <p:txBody>
+          <a:bodyPr/>
+          <a:lstStyle/>
+          <a:p>
+            <a:r>
+              <a:rPr lang="en-US" altLang="zh-CN" dirty="0" err="1"/>
+              <a:t>Kmap</a:t>
+            </a:r>
+            <a:r>
+              <a:rPr lang="zh-CN" altLang="en-US" dirty="0"/>
+              <a:t>规则</a:t>
+            </a:r>
+          </a:p>
+        </p:txBody>
+      </p:sp>
+      <p:sp>
+        <p:nvSpPr>
+          <p:cNvPr id="3" name="内容占位符 2">
+            <a:extLst>
+              <a:ext uri="{FF2B5EF4-FFF2-40B4-BE49-F238E27FC236}">
+                <a16:creationId xmlns:a16="http://schemas.microsoft.com/office/drawing/2014/main" id="{1D3AE891-77CD-890E-1869-4E0E553477A1}"/>
+              </a:ext>
+            </a:extLst>
+          </p:cNvPr>
+          <p:cNvSpPr>
+            <a:spLocks noGrp="1"/>
+          </p:cNvSpPr>
+          <p:nvPr>
+            <p:ph sz="half" idx="1"/>
+          </p:nvPr>
+        </p:nvSpPr>
+        <p:spPr>
+          <a:xfrm>
+            <a:off x="443919" y="3967993"/>
+            <a:ext cx="11468450" cy="2153895"/>
+          </a:xfrm>
+        </p:spPr>
+        <p:txBody>
+          <a:bodyPr/>
+          <a:lstStyle/>
+          <a:p>
+            <a:r>
+              <a:rPr lang="en-US" altLang="zh-CN" dirty="0"/>
+              <a:t>group</a:t>
+            </a:r>
+            <a:r>
+              <a:rPr lang="zh-CN" altLang="en-US" dirty="0"/>
+              <a:t>内容： </a:t>
+            </a:r>
+            <a:r>
+              <a:rPr lang="en-US" altLang="zh-CN" dirty="0"/>
+              <a:t>group</a:t>
+            </a:r>
+            <a:r>
+              <a:rPr lang="zh-CN" altLang="en-US" dirty="0"/>
+              <a:t>内全为</a:t>
+            </a:r>
+            <a:r>
+              <a:rPr lang="en-US" altLang="zh-CN" dirty="0"/>
+              <a:t>1</a:t>
+            </a:r>
+            <a:r>
+              <a:rPr lang="zh-CN" altLang="en-US" dirty="0"/>
+              <a:t>（</a:t>
+            </a:r>
+            <a:r>
+              <a:rPr lang="en-US" altLang="zh-CN" dirty="0"/>
+              <a:t>DNF</a:t>
+            </a:r>
+            <a:r>
+              <a:rPr lang="zh-CN" altLang="en-US" dirty="0"/>
+              <a:t>）或全为</a:t>
+            </a:r>
+            <a:r>
+              <a:rPr lang="en-US" altLang="zh-CN" dirty="0"/>
+              <a:t>0</a:t>
+            </a:r>
+            <a:r>
+              <a:rPr lang="zh-CN" altLang="en-US" dirty="0"/>
+              <a:t>（</a:t>
+            </a:r>
+            <a:r>
+              <a:rPr lang="en-US" altLang="zh-CN" dirty="0"/>
+              <a:t>CNF</a:t>
+            </a:r>
+            <a:r>
+              <a:rPr lang="zh-CN" altLang="en-US" dirty="0"/>
+              <a:t>）</a:t>
+            </a:r>
+            <a:endParaRPr lang="en-US" altLang="zh-CN" dirty="0"/>
+          </a:p>
+          <a:p>
+            <a:r>
+              <a:rPr lang="en-US" altLang="zh-CN" dirty="0"/>
+              <a:t>group</a:t>
+            </a:r>
+            <a:r>
+              <a:rPr lang="zh-CN" altLang="en-US" dirty="0"/>
+              <a:t>大小： </a:t>
+            </a:r>
+            <a:r>
+              <a:rPr lang="en-US" altLang="zh-CN" dirty="0"/>
+              <a:t>2</a:t>
+            </a:r>
+            <a:r>
+              <a:rPr lang="zh-CN" altLang="en-US" dirty="0"/>
+              <a:t>的指数次方；选最大</a:t>
+            </a:r>
+            <a:r>
+              <a:rPr lang="en-US" altLang="zh-CN" dirty="0"/>
+              <a:t>size</a:t>
+            </a:r>
+            <a:r>
+              <a:rPr lang="zh-CN" altLang="en-US" dirty="0"/>
+              <a:t>的</a:t>
+            </a:r>
+            <a:r>
+              <a:rPr lang="en-US" altLang="zh-CN" dirty="0"/>
+              <a:t>group</a:t>
+            </a:r>
+          </a:p>
+          <a:p>
+            <a:r>
+              <a:rPr lang="en-US" altLang="zh-CN" dirty="0"/>
+              <a:t>group</a:t>
+            </a:r>
+            <a:r>
+              <a:rPr lang="zh-CN" altLang="en-US" dirty="0"/>
+              <a:t>数量：在满足</a:t>
+            </a:r>
+            <a:r>
+              <a:rPr lang="en-US" altLang="zh-CN" dirty="0"/>
+              <a:t>group</a:t>
+            </a:r>
+            <a:r>
+              <a:rPr lang="zh-CN" altLang="en-US" dirty="0"/>
+              <a:t>的最大</a:t>
+            </a:r>
+            <a:r>
+              <a:rPr lang="en-US" altLang="zh-CN" dirty="0"/>
+              <a:t>size</a:t>
+            </a:r>
+            <a:r>
+              <a:rPr lang="zh-CN" altLang="en-US" dirty="0"/>
+              <a:t>的前提下，</a:t>
+            </a:r>
+            <a:r>
+              <a:rPr lang="en-US" altLang="zh-CN" dirty="0"/>
+              <a:t>group</a:t>
+            </a:r>
+            <a:r>
+              <a:rPr lang="zh-CN" altLang="en-US" dirty="0"/>
+              <a:t>数量要最小</a:t>
+            </a:r>
+            <a:endParaRPr lang="en-US" altLang="zh-CN" dirty="0"/>
+          </a:p>
+          <a:p>
+            <a:r>
+              <a:rPr lang="en-US" altLang="zh-CN" dirty="0"/>
+              <a:t>Group</a:t>
+            </a:r>
+            <a:r>
+              <a:rPr lang="zh-CN" altLang="en-US" dirty="0"/>
+              <a:t>覆盖：</a:t>
+            </a:r>
+            <a:r>
+              <a:rPr lang="en-US" altLang="zh-CN" dirty="0"/>
+              <a:t>group</a:t>
+            </a:r>
+            <a:r>
+              <a:rPr lang="zh-CN" altLang="en-US" dirty="0"/>
+              <a:t>之间可覆盖；</a:t>
+            </a:r>
+            <a:r>
+              <a:rPr lang="en-US" altLang="zh-CN" dirty="0"/>
+              <a:t>all group</a:t>
+            </a:r>
+            <a:r>
+              <a:rPr lang="zh-CN" altLang="en-US" dirty="0"/>
+              <a:t>要覆盖所有的</a:t>
+            </a:r>
+            <a:r>
+              <a:rPr lang="en-US" altLang="zh-CN" dirty="0"/>
+              <a:t>1</a:t>
+            </a:r>
+            <a:r>
+              <a:rPr lang="zh-CN" altLang="en-US" dirty="0"/>
+              <a:t>或</a:t>
+            </a:r>
+            <a:r>
+              <a:rPr lang="en-US" altLang="zh-CN" dirty="0"/>
+              <a:t>0</a:t>
+            </a:r>
+          </a:p>
+          <a:p>
+            <a:endParaRPr lang="en-US" altLang="zh-CN" dirty="0"/>
+          </a:p>
+          <a:p>
+            <a:endParaRPr lang="zh-CN" altLang="en-US" dirty="0"/>
+          </a:p>
+        </p:txBody>
+      </p:sp>
+      <p:graphicFrame>
+        <p:nvGraphicFramePr>
+          <p:cNvPr id="5" name="内容占位符 4">
+            <a:extLst>
+              <a:ext uri="{FF2B5EF4-FFF2-40B4-BE49-F238E27FC236}">
+                <a16:creationId xmlns:a16="http://schemas.microsoft.com/office/drawing/2014/main" id="{4A5F0DE2-C12C-7C25-88F3-8181C445F374}"/>
+              </a:ext>
+            </a:extLst>
+          </p:cNvPr>
+          <p:cNvGraphicFramePr>
+            <a:graphicFrameLocks noGrp="1"/>
+          </p:cNvGraphicFramePr>
+          <p:nvPr>
+            <p:ph sz="half" idx="2"/>
+            <p:extLst>
+              <p:ext uri="{D42A27DB-BD31-4B8C-83A1-F6EECF244321}">
+                <p14:modId xmlns:p14="http://schemas.microsoft.com/office/powerpoint/2010/main" val="4256660970"/>
+              </p:ext>
+            </p:extLst>
+          </p:nvPr>
+        </p:nvGraphicFramePr>
+        <p:xfrm>
+          <a:off x="334861" y="1960641"/>
+          <a:ext cx="10851155" cy="1618986"/>
+        </p:xfrm>
+        <a:graphic>
+          <a:graphicData uri="http://schemas.openxmlformats.org/drawingml/2006/table">
+            <a:tbl>
+              <a:tblPr firstRow="1" bandRow="1">
+                <a:tableStyleId>{5C22544A-7EE6-4342-B048-85BDC9FD1C3A}</a:tableStyleId>
+              </a:tblPr>
+              <a:tblGrid>
+                <a:gridCol w="1226244">
+                  <a:extLst>
+                    <a:ext uri="{9D8B030D-6E8A-4147-A177-3AD203B41FA5}">
+                      <a16:colId xmlns:a16="http://schemas.microsoft.com/office/drawing/2014/main" val="3627805523"/>
+                    </a:ext>
+                  </a:extLst>
+                </a:gridCol>
+                <a:gridCol w="1212874">
+                  <a:extLst>
+                    <a:ext uri="{9D8B030D-6E8A-4147-A177-3AD203B41FA5}">
+                      <a16:colId xmlns:a16="http://schemas.microsoft.com/office/drawing/2014/main" val="1377594066"/>
+                    </a:ext>
+                  </a:extLst>
+                </a:gridCol>
+                <a:gridCol w="1597914">
+                  <a:extLst>
+                    <a:ext uri="{9D8B030D-6E8A-4147-A177-3AD203B41FA5}">
+                      <a16:colId xmlns:a16="http://schemas.microsoft.com/office/drawing/2014/main" val="409331288"/>
+                    </a:ext>
+                  </a:extLst>
+                </a:gridCol>
+                <a:gridCol w="1713425">
+                  <a:extLst>
+                    <a:ext uri="{9D8B030D-6E8A-4147-A177-3AD203B41FA5}">
+                      <a16:colId xmlns:a16="http://schemas.microsoft.com/office/drawing/2014/main" val="1852827375"/>
+                    </a:ext>
+                  </a:extLst>
+                </a:gridCol>
+                <a:gridCol w="1968113">
+                  <a:extLst>
+                    <a:ext uri="{9D8B030D-6E8A-4147-A177-3AD203B41FA5}">
+                      <a16:colId xmlns:a16="http://schemas.microsoft.com/office/drawing/2014/main" val="3390347891"/>
+                    </a:ext>
+                  </a:extLst>
+                </a:gridCol>
+                <a:gridCol w="3132585">
+                  <a:extLst>
+                    <a:ext uri="{9D8B030D-6E8A-4147-A177-3AD203B41FA5}">
+                      <a16:colId xmlns:a16="http://schemas.microsoft.com/office/drawing/2014/main" val="3185557200"/>
+                    </a:ext>
+                  </a:extLst>
+                </a:gridCol>
+              </a:tblGrid>
+              <a:tr h="489453">
+                <a:tc>
+                  <a:txBody>
+                    <a:bodyPr/>
+                    <a:lstStyle/>
+                    <a:p>
+                      <a:pPr algn="ctr"/>
+                      <a:endParaRPr lang="zh-CN" altLang="en-US" dirty="0"/>
+                    </a:p>
+                  </a:txBody>
+                  <a:tcPr/>
+                </a:tc>
+                <a:tc>
+                  <a:txBody>
+                    <a:bodyPr/>
+                    <a:lstStyle/>
+                    <a:p>
+                      <a:pPr algn="ctr"/>
+                      <a:r>
+                        <a:rPr lang="zh-CN" altLang="en-US" dirty="0"/>
+                        <a:t>助记符</a:t>
+                      </a:r>
+                    </a:p>
+                  </a:txBody>
+                  <a:tcPr/>
+                </a:tc>
+                <a:tc>
+                  <a:txBody>
+                    <a:bodyPr/>
+                    <a:lstStyle/>
+                    <a:p>
+                      <a:pPr algn="ctr"/>
+                      <a:r>
+                        <a:rPr lang="zh-CN" altLang="en-US" dirty="0"/>
+                        <a:t>选组</a:t>
+                      </a:r>
+                    </a:p>
+                  </a:txBody>
+                  <a:tcPr/>
+                </a:tc>
+                <a:tc>
+                  <a:txBody>
+                    <a:bodyPr/>
+                    <a:lstStyle/>
+                    <a:p>
+                      <a:pPr algn="ctr"/>
+                      <a:r>
+                        <a:rPr lang="en-US" altLang="zh-CN" dirty="0"/>
+                        <a:t>INPUT A</a:t>
+                      </a:r>
+                      <a:r>
+                        <a:rPr lang="zh-CN" altLang="en-US" dirty="0"/>
+                        <a:t>取正反</a:t>
+                      </a:r>
+                    </a:p>
+                  </a:txBody>
+                  <a:tcPr/>
+                </a:tc>
+                <a:tc>
+                  <a:txBody>
+                    <a:bodyPr/>
+                    <a:lstStyle/>
+                    <a:p>
+                      <a:pPr algn="ctr"/>
+                      <a:r>
+                        <a:rPr lang="zh-CN" altLang="en-US" dirty="0"/>
+                        <a:t>组之间相连</a:t>
+                      </a:r>
+                    </a:p>
+                  </a:txBody>
+                  <a:tcPr/>
+                </a:tc>
+                <a:tc>
+                  <a:txBody>
+                    <a:bodyPr/>
+                    <a:lstStyle/>
+                    <a:p>
+                      <a:pPr algn="ctr"/>
+                      <a:r>
+                        <a:rPr lang="zh-CN" altLang="en-US" dirty="0"/>
+                        <a:t>示例</a:t>
+                      </a:r>
+                    </a:p>
+                  </a:txBody>
+                  <a:tcPr/>
+                </a:tc>
+                <a:extLst>
+                  <a:ext uri="{0D108BD9-81ED-4DB2-BD59-A6C34878D82A}">
+                    <a16:rowId xmlns:a16="http://schemas.microsoft.com/office/drawing/2014/main" val="3279334888"/>
+                  </a:ext>
+                </a:extLst>
+              </a:tr>
+              <a:tr h="489453">
+                <a:tc>
+                  <a:txBody>
+                    <a:bodyPr/>
+                    <a:lstStyle/>
+                    <a:p>
+                      <a:pPr algn="ctr"/>
+                      <a:r>
+                        <a:rPr lang="en-US" altLang="zh-CN" dirty="0"/>
+                        <a:t>DNF</a:t>
+                      </a:r>
+                      <a:endParaRPr lang="zh-CN" altLang="en-US" dirty="0"/>
+                    </a:p>
+                  </a:txBody>
+                  <a:tcPr/>
+                </a:tc>
+                <a:tc>
+                  <a:txBody>
+                    <a:bodyPr/>
+                    <a:lstStyle/>
+                    <a:p>
+                      <a:pPr algn="ctr"/>
+                      <a:r>
+                        <a:rPr lang="en-US" altLang="zh-CN" dirty="0"/>
+                        <a:t>1+1</a:t>
+                      </a:r>
+                      <a:endParaRPr lang="zh-CN" altLang="en-US" dirty="0"/>
+                    </a:p>
+                  </a:txBody>
+                  <a:tcPr/>
+                </a:tc>
+                <a:tc>
+                  <a:txBody>
+                    <a:bodyPr/>
+                    <a:lstStyle/>
+                    <a:p>
+                      <a:pPr algn="ctr"/>
+                      <a:r>
+                        <a:rPr lang="zh-CN" altLang="en-US" dirty="0"/>
+                        <a:t>全为</a:t>
+                      </a:r>
+                      <a:r>
+                        <a:rPr lang="en-US" altLang="zh-CN" dirty="0"/>
+                        <a:t>1</a:t>
+                      </a:r>
+                      <a:endParaRPr lang="zh-CN" altLang="en-US" dirty="0"/>
+                    </a:p>
+                  </a:txBody>
+                  <a:tcPr/>
+                </a:tc>
+                <a:tc>
+                  <a:txBody>
+                    <a:bodyPr/>
+                    <a:lstStyle/>
+                    <a:p>
+                      <a:pPr algn="ctr"/>
+                      <a:r>
+                        <a:rPr lang="en-US" altLang="zh-CN" dirty="0"/>
+                        <a:t>1</a:t>
+                      </a:r>
+                      <a:r>
+                        <a:rPr lang="zh-CN" altLang="en-US" dirty="0"/>
+                        <a:t>为</a:t>
+                      </a:r>
+                      <a:r>
+                        <a:rPr lang="en-US" altLang="zh-CN" dirty="0"/>
+                        <a:t>A  </a:t>
+                      </a:r>
+                      <a:endParaRPr lang="zh-CN" altLang="en-US" dirty="0"/>
+                    </a:p>
+                  </a:txBody>
+                  <a:tcPr/>
+                </a:tc>
+                <a:tc>
+                  <a:txBody>
+                    <a:bodyPr/>
+                    <a:lstStyle/>
+                    <a:p>
+                      <a:pPr algn="ctr"/>
+                      <a:r>
+                        <a:rPr lang="en-US" altLang="zh-CN" dirty="0"/>
+                        <a:t>+</a:t>
+                      </a:r>
+                      <a:r>
+                        <a:rPr lang="zh-CN" altLang="en-US" dirty="0"/>
+                        <a:t>（</a:t>
+                      </a:r>
+                      <a:r>
+                        <a:rPr lang="en-US" altLang="zh-CN" dirty="0"/>
+                        <a:t>or</a:t>
+                      </a:r>
+                      <a:r>
+                        <a:rPr lang="zh-CN" altLang="en-US" dirty="0"/>
+                        <a:t>）</a:t>
+                      </a:r>
+                    </a:p>
+                  </a:txBody>
+                  <a:tcPr/>
+                </a:tc>
+                <a:tc>
+                  <a:txBody>
+                    <a:bodyPr/>
+                    <a:lstStyle/>
+                    <a:p>
+                      <a:pPr algn="ctr"/>
+                      <a:r>
+                        <a:rPr lang="en-US" altLang="zh-CN" dirty="0"/>
+                        <a:t>(¬</a:t>
+                      </a:r>
+                      <a:r>
+                        <a:rPr lang="zh-CN" altLang="en-US" dirty="0"/>
+                        <a:t>𝐴∧𝐵∧𝐶</a:t>
+                      </a:r>
+                      <a:r>
+                        <a:rPr lang="en-US" altLang="zh-CN" dirty="0"/>
+                        <a:t>) </a:t>
+                      </a:r>
+                      <a:r>
+                        <a:rPr lang="en-US" altLang="zh-CN" dirty="0">
+                          <a:solidFill>
+                            <a:schemeClr val="accent2"/>
+                          </a:solidFill>
+                        </a:rPr>
+                        <a:t>∨</a:t>
+                      </a:r>
+                      <a:r>
+                        <a:rPr lang="en-US" altLang="zh-CN" dirty="0"/>
+                        <a:t> (</a:t>
+                      </a:r>
+                      <a:r>
+                        <a:rPr lang="zh-CN" altLang="en-US" dirty="0"/>
+                        <a:t>𝐴∧</a:t>
+                      </a:r>
+                      <a:r>
+                        <a:rPr lang="en-US" altLang="zh-CN" dirty="0"/>
+                        <a:t>¬</a:t>
+                      </a:r>
+                      <a:r>
+                        <a:rPr lang="zh-CN" altLang="en-US" dirty="0"/>
+                        <a:t>𝐵∧𝐶</a:t>
+                      </a:r>
+                      <a:r>
+                        <a:rPr lang="en-US" altLang="zh-CN" dirty="0"/>
+                        <a:t>) </a:t>
+                      </a:r>
+                      <a:endParaRPr lang="zh-CN" altLang="en-US" dirty="0"/>
+                    </a:p>
+                  </a:txBody>
+                  <a:tcPr/>
+                </a:tc>
+                <a:extLst>
+                  <a:ext uri="{0D108BD9-81ED-4DB2-BD59-A6C34878D82A}">
+                    <a16:rowId xmlns:a16="http://schemas.microsoft.com/office/drawing/2014/main" val="1341016012"/>
+                  </a:ext>
+                </a:extLst>
+              </a:tr>
+              <a:tr h="489453">
+                <a:tc>
+                  <a:txBody>
+                    <a:bodyPr/>
+                    <a:lstStyle/>
+                    <a:p>
+                      <a:pPr algn="ctr"/>
+                      <a:r>
+                        <a:rPr lang="en-US" altLang="zh-CN" dirty="0"/>
+                        <a:t>CNF</a:t>
+                      </a:r>
+                      <a:endParaRPr lang="zh-CN" altLang="en-US" dirty="0"/>
+                    </a:p>
+                  </a:txBody>
+                  <a:tcPr/>
+                </a:tc>
+                <a:tc>
+                  <a:txBody>
+                    <a:bodyPr/>
+                    <a:lstStyle/>
+                    <a:p>
+                      <a:pPr algn="ctr"/>
+                      <a:r>
+                        <a:rPr lang="en-US" altLang="zh-CN" dirty="0"/>
+                        <a:t>0*0</a:t>
+                      </a:r>
+                      <a:endParaRPr lang="zh-CN" altLang="en-US" dirty="0"/>
+                    </a:p>
+                  </a:txBody>
+                  <a:tcPr/>
+                </a:tc>
+                <a:tc>
+                  <a:txBody>
+                    <a:bodyPr/>
+                    <a:lstStyle/>
+                    <a:p>
+                      <a:pPr algn="ctr"/>
+                      <a:r>
+                        <a:rPr lang="zh-CN" altLang="en-US" dirty="0"/>
+                        <a:t>全为</a:t>
+                      </a:r>
+                      <a:r>
+                        <a:rPr lang="en-US" altLang="zh-CN" dirty="0"/>
+                        <a:t>0</a:t>
+                      </a:r>
+                      <a:endParaRPr lang="zh-CN" altLang="en-US" dirty="0"/>
+                    </a:p>
+                  </a:txBody>
+                  <a:tcPr/>
+                </a:tc>
+                <a:tc>
+                  <a:txBody>
+                    <a:bodyPr/>
+                    <a:lstStyle/>
+                    <a:p>
+                      <a:pPr algn="ctr"/>
+                      <a:r>
+                        <a:rPr lang="en-US" altLang="zh-CN" dirty="0"/>
+                        <a:t>0</a:t>
+                      </a:r>
+                      <a:r>
+                        <a:rPr lang="zh-CN" altLang="en-US" dirty="0"/>
+                        <a:t>为</a:t>
+                      </a:r>
+                      <a:r>
+                        <a:rPr lang="en-US" altLang="zh-CN" dirty="0"/>
+                        <a:t>A</a:t>
+                      </a:r>
+                      <a:endParaRPr lang="zh-CN" altLang="en-US" dirty="0"/>
+                    </a:p>
+                  </a:txBody>
+                  <a:tcPr/>
+                </a:tc>
+                <a:tc>
+                  <a:txBody>
+                    <a:bodyPr/>
+                    <a:lstStyle/>
+                    <a:p>
+                      <a:pPr algn="ctr"/>
+                      <a:r>
+                        <a:rPr lang="zh-CN" altLang="en-US" dirty="0"/>
+                        <a:t>*（</a:t>
+                      </a:r>
+                      <a:r>
+                        <a:rPr lang="en-US" altLang="zh-CN" dirty="0"/>
+                        <a:t>and</a:t>
+                      </a:r>
+                      <a:r>
+                        <a:rPr lang="zh-CN" altLang="en-US" dirty="0"/>
+                        <a:t>）</a:t>
+                      </a:r>
+                    </a:p>
+                  </a:txBody>
+                  <a:tcPr/>
+                </a:tc>
+                <a:tc>
+                  <a:txBody>
+                    <a:bodyPr/>
+                    <a:lstStyle/>
+                    <a:p>
+                      <a:pPr marL="0" marR="0" lvl="0" indent="0" algn="ctr" defTabSz="914400" rtl="0" eaLnBrk="1" fontAlgn="auto" latinLnBrk="0" hangingPunct="1">
+                        <a:lnSpc>
+                          <a:spcPct val="100000"/>
+                        </a:lnSpc>
+                        <a:spcBef>
+                          <a:spcPts val="0"/>
+                        </a:spcBef>
+                        <a:spcAft>
+                          <a:spcPts val="0"/>
+                        </a:spcAft>
+                        <a:buClrTx/>
+                        <a:buSzTx/>
+                        <a:buFontTx/>
+                        <a:buNone/>
+                        <a:tabLst/>
+                        <a:defRPr/>
+                      </a:pPr>
+                      <a:r>
+                        <a:rPr lang="en-US" altLang="zh-CN" dirty="0"/>
+                        <a:t>(¬</a:t>
+                      </a:r>
+                      <a:r>
+                        <a:rPr lang="zh-CN" altLang="en-US" dirty="0"/>
+                        <a:t>𝐴</a:t>
+                      </a:r>
+                      <a:r>
+                        <a:rPr lang="en-US" altLang="zh-CN" dirty="0">
+                          <a:solidFill>
+                            <a:schemeClr val="tx1"/>
+                          </a:solidFill>
+                        </a:rPr>
+                        <a:t>∨</a:t>
+                      </a:r>
+                      <a:r>
+                        <a:rPr lang="zh-CN" altLang="en-US" dirty="0"/>
+                        <a:t>𝐵</a:t>
+                      </a:r>
+                      <a:r>
+                        <a:rPr lang="en-US" altLang="zh-CN" dirty="0">
+                          <a:solidFill>
+                            <a:schemeClr val="tx1"/>
+                          </a:solidFill>
+                        </a:rPr>
+                        <a:t>∨</a:t>
+                      </a:r>
+                      <a:r>
+                        <a:rPr lang="zh-CN" altLang="en-US" dirty="0"/>
+                        <a:t>𝐶</a:t>
+                      </a:r>
+                      <a:r>
+                        <a:rPr lang="en-US" altLang="zh-CN" dirty="0"/>
+                        <a:t>) </a:t>
+                      </a:r>
+                      <a:r>
+                        <a:rPr lang="zh-CN" altLang="en-US" dirty="0">
+                          <a:solidFill>
+                            <a:schemeClr val="accent2"/>
+                          </a:solidFill>
+                        </a:rPr>
+                        <a:t>∧</a:t>
+                      </a:r>
+                      <a:r>
+                        <a:rPr lang="en-US" altLang="zh-CN" dirty="0"/>
+                        <a:t> (</a:t>
+                      </a:r>
+                      <a:r>
+                        <a:rPr lang="zh-CN" altLang="en-US" dirty="0"/>
+                        <a:t>𝐴</a:t>
+                      </a:r>
+                      <a:r>
+                        <a:rPr lang="en-US" altLang="zh-CN" dirty="0">
+                          <a:solidFill>
+                            <a:schemeClr val="tx1"/>
+                          </a:solidFill>
+                        </a:rPr>
+                        <a:t>∨</a:t>
+                      </a:r>
+                      <a:r>
+                        <a:rPr lang="en-US" altLang="zh-CN" dirty="0"/>
+                        <a:t>¬</a:t>
+                      </a:r>
+                      <a:r>
+                        <a:rPr lang="zh-CN" altLang="en-US" dirty="0"/>
+                        <a:t>𝐵</a:t>
+                      </a:r>
+                      <a:r>
+                        <a:rPr lang="en-US" altLang="zh-CN" dirty="0">
+                          <a:solidFill>
+                            <a:schemeClr val="tx1"/>
+                          </a:solidFill>
+                        </a:rPr>
+                        <a:t>∨</a:t>
+                      </a:r>
+                      <a:r>
+                        <a:rPr lang="zh-CN" altLang="en-US" dirty="0"/>
+                        <a:t>𝐶</a:t>
+                      </a:r>
+                      <a:r>
+                        <a:rPr lang="en-US" altLang="zh-CN" dirty="0"/>
+                        <a:t>) </a:t>
+                      </a:r>
+                      <a:endParaRPr lang="zh-CN" altLang="en-US" dirty="0"/>
+                    </a:p>
+                    <a:p>
+                      <a:pPr algn="ctr"/>
+                      <a:endParaRPr lang="zh-CN" altLang="en-US" dirty="0"/>
+                    </a:p>
+                  </a:txBody>
+                  <a:tcPr/>
+                </a:tc>
+                <a:extLst>
+                  <a:ext uri="{0D108BD9-81ED-4DB2-BD59-A6C34878D82A}">
+                    <a16:rowId xmlns:a16="http://schemas.microsoft.com/office/drawing/2014/main" val="2149934486"/>
+                  </a:ext>
+                </a:extLst>
+              </a:tr>
+            </a:tbl>
+          </a:graphicData>
+        </a:graphic>
+      </p:graphicFrame>
+    </p:spTree>
+    <p:extLst>
+      <p:ext uri="{BB962C8B-B14F-4D97-AF65-F5344CB8AC3E}">
+        <p14:creationId xmlns:p14="http://schemas.microsoft.com/office/powerpoint/2010/main" val="1943540943"/>
+      </p:ext>
+    </p:extLst>
+  </p:cSld>
+  <p:clrMapOvr>
+    <a:masterClrMapping/>
+  </p:clrMapOvr>
+</p:sld>
+</file>
+
+<file path=ppt/slides/slide7.xml><?xml version="1.0" encoding="utf-8"?>
 <p:sld xmlns:a="http://schemas.openxmlformats.org/drawingml/2006/main" xmlns:r="http://schemas.openxmlformats.org/officeDocument/2006/relationships" xmlns:p="http://schemas.openxmlformats.org/presentationml/2006/main">
   <p:cSld>
     <p:spTree>
@@ -35934,7 +36869,7 @@
 </p:sld>
 </file>
 
-<file path=ppt/slides/slide7.xml><?xml version="1.0" encoding="utf-8"?>
+<file path=ppt/slides/slide8.xml><?xml version="1.0" encoding="utf-8"?>
 <p:sld xmlns:a="http://schemas.openxmlformats.org/drawingml/2006/main" xmlns:r="http://schemas.openxmlformats.org/officeDocument/2006/relationships" xmlns:p="http://schemas.openxmlformats.org/presentationml/2006/main">
   <p:cSld>
     <p:spTree>
@@ -36327,7 +37262,7 @@
 </p:sld>
 </file>
 
-<file path=ppt/slides/slide8.xml><?xml version="1.0" encoding="utf-8"?>
+<file path=ppt/slides/slide9.xml><?xml version="1.0" encoding="utf-8"?>
 <p:sld xmlns:a="http://schemas.openxmlformats.org/drawingml/2006/main" xmlns:r="http://schemas.openxmlformats.org/officeDocument/2006/relationships" xmlns:p="http://schemas.openxmlformats.org/presentationml/2006/main">
   <p:cSld>
     <p:spTree>
@@ -36392,8 +37327,8 @@
           </a:p>
         </p:txBody>
       </p:sp>
-      <mc:AlternateContent xmlns:mc="http://schemas.openxmlformats.org/markup-compatibility/2006">
-        <mc:Choice xmlns:a14="http://schemas.microsoft.com/office/drawing/2010/main" Requires="a14">
+      <mc:AlternateContent xmlns:mc="http://schemas.openxmlformats.org/markup-compatibility/2006" xmlns:a14="http://schemas.microsoft.com/office/drawing/2010/main">
+        <mc:Choice Requires="a14">
           <p:sp>
             <p:nvSpPr>
               <p:cNvPr id="3" name="Content Placeholder 2">
@@ -36853,7 +37788,7 @@
             </p:txBody>
           </p:sp>
         </mc:Choice>
-        <mc:Fallback>
+        <mc:Fallback xmlns="">
           <p:sp>
             <p:nvSpPr>
               <p:cNvPr id="3" name="Content Placeholder 2">
@@ -36897,148 +37832,6 @@
     <p:extLst>
       <p:ext uri="{BB962C8B-B14F-4D97-AF65-F5344CB8AC3E}">
         <p14:creationId xmlns:p14="http://schemas.microsoft.com/office/powerpoint/2010/main" val="3428931588"/>
-      </p:ext>
-    </p:extLst>
-  </p:cSld>
-  <p:clrMapOvr>
-    <a:masterClrMapping/>
-  </p:clrMapOvr>
-</p:sld>
-</file>
-
-<file path=ppt/slides/slide9.xml><?xml version="1.0" encoding="utf-8"?>
-<p:sld xmlns:a="http://schemas.openxmlformats.org/drawingml/2006/main" xmlns:r="http://schemas.openxmlformats.org/officeDocument/2006/relationships" xmlns:p="http://schemas.openxmlformats.org/presentationml/2006/main">
-  <p:cSld>
-    <p:spTree>
-      <p:nvGrpSpPr>
-        <p:cNvPr id="1" name=""/>
-        <p:cNvGrpSpPr/>
-        <p:nvPr/>
-      </p:nvGrpSpPr>
-      <p:grpSpPr>
-        <a:xfrm>
-          <a:off x="0" y="0"/>
-          <a:ext cx="0" cy="0"/>
-          <a:chOff x="0" y="0"/>
-          <a:chExt cx="0" cy="0"/>
-        </a:xfrm>
-      </p:grpSpPr>
-      <p:sp>
-        <p:nvSpPr>
-          <p:cNvPr id="2" name="Title 1">
-            <a:extLst>
-              <a:ext uri="{FF2B5EF4-FFF2-40B4-BE49-F238E27FC236}">
-                <a16:creationId xmlns:a16="http://schemas.microsoft.com/office/drawing/2014/main" id="{671327DD-15A0-595C-B46B-6C1683BCF54E}"/>
-              </a:ext>
-            </a:extLst>
-          </p:cNvPr>
-          <p:cNvSpPr>
-            <a:spLocks noGrp="1"/>
-          </p:cNvSpPr>
-          <p:nvPr>
-            <p:ph type="title"/>
-          </p:nvPr>
-        </p:nvSpPr>
-        <p:spPr/>
-        <p:txBody>
-          <a:bodyPr/>
-          <a:lstStyle/>
-          <a:p>
-            <a:r>
-              <a:rPr lang="en-GB" dirty="0"/>
-              <a:t>Overlapping Groups(</a:t>
-            </a:r>
-            <a:r>
-              <a:rPr lang="zh-CN" altLang="en-US" dirty="0"/>
-              <a:t>覆盖组）</a:t>
-            </a:r>
-            <a:endParaRPr lang="en-GB" dirty="0"/>
-          </a:p>
-        </p:txBody>
-      </p:sp>
-      <p:sp>
-        <p:nvSpPr>
-          <p:cNvPr id="4" name="Content Placeholder 3">
-            <a:extLst>
-              <a:ext uri="{FF2B5EF4-FFF2-40B4-BE49-F238E27FC236}">
-                <a16:creationId xmlns:a16="http://schemas.microsoft.com/office/drawing/2014/main" id="{DCEB2E48-58F6-A2C4-254A-7FE9A98447CB}"/>
-              </a:ext>
-            </a:extLst>
-          </p:cNvPr>
-          <p:cNvSpPr>
-            <a:spLocks noGrp="1"/>
-          </p:cNvSpPr>
-          <p:nvPr>
-            <p:ph sz="half" idx="1"/>
-          </p:nvPr>
-        </p:nvSpPr>
-        <p:spPr/>
-        <p:txBody>
-          <a:bodyPr/>
-          <a:lstStyle/>
-          <a:p>
-            <a:r>
-              <a:rPr lang="en-GB" dirty="0"/>
-              <a:t>If you have overlapping groups</a:t>
-            </a:r>
-          </a:p>
-          <a:p>
-            <a:r>
-              <a:rPr lang="en-GB" dirty="0">
-                <a:solidFill>
-                  <a:schemeClr val="accent2"/>
-                </a:solidFill>
-              </a:rPr>
-              <a:t>Find the minimum number of largest groups to cover all 1’s </a:t>
-            </a:r>
-            <a:r>
-              <a:rPr lang="en-GB" dirty="0"/>
-              <a:t>(DNF) or 0’s (CNF)</a:t>
-            </a:r>
-          </a:p>
-        </p:txBody>
-      </p:sp>
-      <p:pic>
-        <p:nvPicPr>
-          <p:cNvPr id="6" name="Content Placeholder 5" descr="Diagram a displays the Karnaugh map for the function, F equals A bar B plus B C bar represented using a two dimensional array comprised of 2 rows and 4 columns with 8 squares. The values corresponding to the rows are 0 and 1 that are labeled, A and the column values corresponding to the combinations 0 0, 0 1, 1 1, and 1 0 are labeled, BC. The squares with a value 1 are as follows. (0, 1 1), (0, 1 0), and (1, 1 0). The adjacent pairs of 1is circled forming an overlapping group. Diagram b displays the Karnaugh map for the function, F equals B C bar D plus A C D represented using a two dimensional array comprised of 4 rows and 4 columns with 16 squares. The row values corresponding to the combinations 0 0, 0 1, 1 1, and 1 0 are labeled, AB and the column values corresponding to the combinations 0 0, 0 1, 1 1, and 1 0 are labeled, CD. The squares with a value 1 are as follows. (0 1, 0 1), (1 1, 0 1), (1 1, 1 1), and (1 0, 1 1). The adjacent pairs of 1is circled forming two overlapping groups." title="Two diagrams illustrate the Karnaugh Maps for overlapping groups. ">
-            <a:extLst>
-              <a:ext uri="{FF2B5EF4-FFF2-40B4-BE49-F238E27FC236}">
-                <a16:creationId xmlns:a16="http://schemas.microsoft.com/office/drawing/2014/main" id="{F8ACB1EE-BBA5-7AC6-3B72-518C596BB02B}"/>
-              </a:ext>
-            </a:extLst>
-          </p:cNvPr>
-          <p:cNvPicPr>
-            <a:picLocks noGrp="1" noChangeAspect="1"/>
-          </p:cNvPicPr>
-          <p:nvPr>
-            <p:ph sz="half" idx="2"/>
-          </p:nvPr>
-        </p:nvPicPr>
-        <p:blipFill rotWithShape="1">
-          <a:blip r:embed="rId2">
-            <a:extLst>
-              <a:ext uri="{28A0092B-C50C-407E-A947-70E740481C1C}">
-                <a14:useLocalDpi xmlns:a14="http://schemas.microsoft.com/office/drawing/2010/main" val="0"/>
-              </a:ext>
-            </a:extLst>
-          </a:blip>
-          <a:srcRect l="29290" t="15687" r="43535" b="41147"/>
-          <a:stretch/>
-        </p:blipFill>
-        <p:spPr>
-          <a:xfrm>
-            <a:off x="7704607" y="1825625"/>
-            <a:ext cx="2116785" cy="4351338"/>
-          </a:xfrm>
-          <a:prstGeom prst="rect">
-            <a:avLst/>
-          </a:prstGeom>
-        </p:spPr>
-      </p:pic>
-    </p:spTree>
-    <p:extLst>
-      <p:ext uri="{BB962C8B-B14F-4D97-AF65-F5344CB8AC3E}">
-        <p14:creationId xmlns:p14="http://schemas.microsoft.com/office/powerpoint/2010/main" val="836119605"/>
       </p:ext>
     </p:extLst>
   </p:cSld>
